--- a/Funcional.pptx
+++ b/Funcional.pptx
@@ -15,6 +15,7 @@
     <p:sldId id="263" r:id="rId14"/>
     <p:sldId id="264" r:id="rId15"/>
     <p:sldId id="265" r:id="rId16"/>
+    <p:sldId id="266" r:id="rId17"/>
   </p:sldIdLst>
   <p:sldSz cx="12191695" cy="6858000" type="screen4x3"/>
   <p:notesSz cx="6858000" cy="9144000"/>
@@ -3149,7 +3150,7 @@
         <p:spPr>
           <a:xfrm>
             <a:off x="0" y="0"/>
-            <a:ext cx="12191695" cy="73152"/>
+            <a:ext cx="12191695" cy="82296"/>
           </a:xfrm>
           <a:prstGeom prst="rect">
             <a:avLst/>
@@ -3191,8 +3192,8 @@
         </p:nvSpPr>
         <p:spPr>
           <a:xfrm>
-            <a:off x="731520" y="2011680"/>
-            <a:ext cx="109728" cy="2926080"/>
+            <a:off x="731520" y="1737360"/>
+            <a:ext cx="109728" cy="3291840"/>
           </a:xfrm>
           <a:prstGeom prst="rect">
             <a:avLst/>
@@ -3242,8 +3243,8 @@
         </p:blipFill>
         <p:spPr>
           <a:xfrm>
-            <a:off x="731520" y="914400"/>
-            <a:ext cx="2377440" cy="954770"/>
+            <a:off x="731520" y="777240"/>
+            <a:ext cx="2286000" cy="918048"/>
           </a:xfrm>
           <a:prstGeom prst="rect">
             <a:avLst/>
@@ -3258,8 +3259,8 @@
         </p:nvSpPr>
         <p:spPr>
           <a:xfrm>
-            <a:off x="1051560" y="1920240"/>
-            <a:ext cx="10058400" cy="3108960"/>
+            <a:off x="1051560" y="1645920"/>
+            <a:ext cx="10241280" cy="3200400"/>
           </a:xfrm>
           <a:prstGeom prst="rect">
             <a:avLst/>
@@ -3281,13 +3282,13 @@
               </a:defRPr>
             </a:pPr>
             <a:r>
-              <a:t>MANUAL FUNCIONAL E OPERACIONAL • VERSÃO 2026</a:t>
+              <a:t>MANUAL FUNCIONAL E OPERACIONAL • LOCAR GUINDASTES</a:t>
             </a:r>
           </a:p>
           <a:p>
             <a:pPr>
               <a:spcBef>
-                <a:spcPts val="800"/>
+                <a:spcPts val="600"/>
               </a:spcBef>
               <a:defRPr sz="3600" b="1">
                 <a:solidFill>
@@ -3303,21 +3304,21 @@
           <a:p>
             <a:pPr>
               <a:spcBef>
-                <a:spcPts val="1200"/>
+                <a:spcPts val="1000"/>
               </a:spcBef>
-              <a:defRPr sz="1400">
-                <a:solidFill>
-                  <a:srgbClr val="CBD5E1"/>
+              <a:defRPr sz="1350">
+                <a:solidFill>
+                  <a:srgbClr val="E2E8F0"/>
                 </a:solidFill>
                 <a:latin typeface="Arial"/>
               </a:defRPr>
             </a:pPr>
             <a:r>
-              <a:t>Controle de Frotas de PTA e Guindastes, Vistorias Técnicas Normativas (NR-11/12/18/35),</a:t>
+              <a:t>Gestão Operacional de Pátio, Checklists Normativos (NR-11/12/18/35), Disparo Automático ao PCM,</a:t>
             </a:r>
             <a:br/>
             <a:r>
-              <a:t>Integração com PCM, Bloqueio Automático, Gestão Comercial e Emissão de Laudos Periciais.</a:t>
+              <a:t>Sincronização Nuvem Appwrite Cloud, Arquitetura 100% Offline-First e Laudos Periciais com Hash Forense.</a:t>
             </a:r>
           </a:p>
         </p:txBody>
@@ -3325,6 +3326,116 @@
       <p:sp>
         <p:nvSpPr>
           <p:cNvPr id="7" name="Rounded Rectangle 6"/>
+          <p:cNvSpPr/>
+          <p:nvPr/>
+        </p:nvSpPr>
+        <p:spPr>
+          <a:xfrm>
+            <a:off x="1051560" y="3931920"/>
+            <a:ext cx="10058400" cy="1051560"/>
+          </a:xfrm>
+          <a:prstGeom prst="roundRect">
+            <a:avLst/>
+          </a:prstGeom>
+          <a:solidFill>
+            <a:srgbClr val="262C38"/>
+          </a:solidFill>
+          <a:ln w="15240">
+            <a:solidFill>
+              <a:srgbClr val="F59E0B"/>
+            </a:solidFill>
+          </a:ln>
+        </p:spPr>
+        <p:style>
+          <a:lnRef idx="1">
+            <a:schemeClr val="accent1"/>
+          </a:lnRef>
+          <a:fillRef idx="3">
+            <a:schemeClr val="accent1"/>
+          </a:fillRef>
+          <a:effectRef idx="2">
+            <a:schemeClr val="accent1"/>
+          </a:effectRef>
+          <a:fontRef idx="minor">
+            <a:schemeClr val="lt1"/>
+          </a:fontRef>
+        </p:style>
+        <p:txBody>
+          <a:bodyPr rtlCol="0" anchor="ctr"/>
+          <a:lstStyle/>
+          <a:p>
+            <a:pPr algn="ctr"/>
+          </a:p>
+        </p:txBody>
+      </p:sp>
+      <p:sp>
+        <p:nvSpPr>
+          <p:cNvPr id="8" name="TextBox 7"/>
+          <p:cNvSpPr txBox="1"/>
+          <p:nvPr/>
+        </p:nvSpPr>
+        <p:spPr>
+          <a:xfrm>
+            <a:off x="1234440" y="4023360"/>
+            <a:ext cx="9692640" cy="868680"/>
+          </a:xfrm>
+          <a:prstGeom prst="rect">
+            <a:avLst/>
+          </a:prstGeom>
+          <a:noFill/>
+        </p:spPr>
+        <p:txBody>
+          <a:bodyPr wrap="square">
+            <a:spAutoFit/>
+          </a:bodyPr>
+          <a:lstStyle/>
+          <a:p>
+            <a:pPr>
+              <a:defRPr sz="1000" b="1">
+                <a:solidFill>
+                  <a:srgbClr val="F59E0B"/>
+                </a:solidFill>
+              </a:defRPr>
+            </a:pPr>
+            <a:r>
+              <a:t>🌐 LINK OFICIAL DE ACESSO AO SISTEMA (PRODUÇÃO VERCEL &amp; PWA):</a:t>
+            </a:r>
+          </a:p>
+          <a:p>
+            <a:pPr>
+              <a:spcBef>
+                <a:spcPts val="200"/>
+              </a:spcBef>
+              <a:defRPr sz="1800" b="1">
+                <a:solidFill>
+                  <a:srgbClr val="FFFFFF"/>
+                </a:solidFill>
+              </a:defRPr>
+            </a:pPr>
+            <a:r>
+              <a:t>https://inspecao-frota-locar.vercel.app/</a:t>
+            </a:r>
+          </a:p>
+          <a:p>
+            <a:pPr>
+              <a:spcBef>
+                <a:spcPts val="200"/>
+              </a:spcBef>
+              <a:defRPr sz="950">
+                <a:solidFill>
+                  <a:srgbClr val="94A3B8"/>
+                </a:solidFill>
+              </a:defRPr>
+            </a:pPr>
+            <a:r>
+              <a:t>Disponível no Computador, Tablet ou Celular (Instalável via PWA). Funciona 100% Offline no Pátio.</a:t>
+            </a:r>
+          </a:p>
+        </p:txBody>
+      </p:sp>
+      <p:sp>
+        <p:nvSpPr>
+          <p:cNvPr id="9" name="Rounded Rectangle 8"/>
           <p:cNvSpPr/>
           <p:nvPr/>
         </p:nvSpPr>
@@ -3341,7 +3452,7 @@
           </a:solidFill>
           <a:ln w="15240">
             <a:solidFill>
-              <a:srgbClr val="334155"/>
+              <a:srgbClr val="3C4858"/>
             </a:solidFill>
           </a:ln>
         </p:spPr>
@@ -3369,7 +3480,7 @@
       </p:sp>
       <p:sp>
         <p:nvSpPr>
-          <p:cNvPr id="8" name="TextBox 7"/>
+          <p:cNvPr id="10" name="TextBox 9"/>
           <p:cNvSpPr txBox="1"/>
           <p:nvPr/>
         </p:nvSpPr>
@@ -3394,7 +3505,6 @@
                 <a:solidFill>
                   <a:srgbClr val="FFFFFF"/>
                 </a:solidFill>
-                <a:latin typeface="Arial"/>
               </a:defRPr>
             </a:pPr>
             <a:r>
@@ -3410,11 +3520,10 @@
                 <a:solidFill>
                   <a:srgbClr val="94A3B8"/>
                 </a:solidFill>
-                <a:latin typeface="Arial"/>
               </a:defRPr>
             </a:pPr>
             <a:r>
-              <a:t>Responsável Técnico / Desenvolvimento: Maikon Pinho  •  Tecnologias: Offline-First PWA, Appwrite Cloud, IA Vision &amp; Forensic Hash SHA-256</a:t>
+              <a:t>Desenvolvido por Maikon Pinho  •  Identidade Visual: Cinza Escuro, Amarelo e Branco  •  Versão 2026</a:t>
             </a:r>
           </a:p>
         </p:txBody>
@@ -3489,7 +3598,7 @@
         <p:spPr>
           <a:xfrm>
             <a:off x="0" y="0"/>
-            <a:ext cx="12191695" cy="73152"/>
+            <a:ext cx="12191695" cy="82296"/>
           </a:xfrm>
           <a:prstGeom prst="rect">
             <a:avLst/>
@@ -3531,7 +3640,7 @@
         </p:nvSpPr>
         <p:spPr>
           <a:xfrm>
-            <a:off x="731520" y="320040"/>
+            <a:off x="731520" y="292608"/>
             <a:ext cx="8686800" cy="1005840"/>
           </a:xfrm>
           <a:prstGeom prst="rect">
@@ -3554,13 +3663,13 @@
               </a:defRPr>
             </a:pPr>
             <a:r>
-              <a:t>IMPACTO NA OPERAÇÃO DE BETIM</a:t>
+              <a:t>DIRETRIZES TÉCNICAS E COMERCIAIS POR CLIENTE</a:t>
             </a:r>
           </a:p>
           <a:p>
             <a:pPr>
               <a:spcBef>
-                <a:spcPts val="400"/>
+                <a:spcPts val="300"/>
               </a:spcBef>
               <a:defRPr sz="2200" b="1">
                 <a:solidFill>
@@ -3570,7 +3679,7 @@
               </a:defRPr>
             </a:pPr>
             <a:r>
-              <a:t>9. Conclusão &amp; Benefícios Estratégicos</a:t>
+              <a:t>9. Matriz de Rigor por Cliente (Client Tiers)</a:t>
             </a:r>
           </a:p>
         </p:txBody>
@@ -3591,7 +3700,7 @@
         </p:blipFill>
         <p:spPr>
           <a:xfrm>
-            <a:off x="9875520" y="320040"/>
+            <a:off x="9875520" y="274320"/>
             <a:ext cx="1645920" cy="660994"/>
           </a:xfrm>
           <a:prstGeom prst="rect">
@@ -3608,7 +3717,7 @@
         <p:spPr>
           <a:xfrm>
             <a:off x="731520" y="1645920"/>
-            <a:ext cx="5212080" cy="2011680"/>
+            <a:ext cx="2560320" cy="4389120"/>
           </a:xfrm>
           <a:prstGeom prst="roundRect">
             <a:avLst/>
@@ -3618,7 +3727,7 @@
           </a:solidFill>
           <a:ln w="15240">
             <a:solidFill>
-              <a:srgbClr val="334155"/>
+              <a:srgbClr val="3C4858"/>
             </a:solidFill>
           </a:ln>
         </p:spPr>
@@ -3646,6 +3755,890 @@
       </p:sp>
       <p:sp>
         <p:nvSpPr>
+          <p:cNvPr id="7" name="Rectangle 6"/>
+          <p:cNvSpPr/>
+          <p:nvPr/>
+        </p:nvSpPr>
+        <p:spPr>
+          <a:xfrm>
+            <a:off x="731520" y="1645920"/>
+            <a:ext cx="2560320" cy="109728"/>
+          </a:xfrm>
+          <a:prstGeom prst="rect">
+            <a:avLst/>
+          </a:prstGeom>
+          <a:solidFill>
+            <a:srgbClr val="F59E0B"/>
+          </a:solidFill>
+          <a:ln>
+            <a:noFill/>
+          </a:ln>
+        </p:spPr>
+        <p:style>
+          <a:lnRef idx="1">
+            <a:schemeClr val="accent1"/>
+          </a:lnRef>
+          <a:fillRef idx="3">
+            <a:schemeClr val="accent1"/>
+          </a:fillRef>
+          <a:effectRef idx="2">
+            <a:schemeClr val="accent1"/>
+          </a:effectRef>
+          <a:fontRef idx="minor">
+            <a:schemeClr val="lt1"/>
+          </a:fontRef>
+        </p:style>
+        <p:txBody>
+          <a:bodyPr rtlCol="0" anchor="ctr"/>
+          <a:lstStyle/>
+          <a:p>
+            <a:pPr algn="ctr"/>
+          </a:p>
+        </p:txBody>
+      </p:sp>
+      <p:sp>
+        <p:nvSpPr>
+          <p:cNvPr id="8" name="TextBox 7"/>
+          <p:cNvSpPr txBox="1"/>
+          <p:nvPr/>
+        </p:nvSpPr>
+        <p:spPr>
+          <a:xfrm>
+            <a:off x="914400" y="1920240"/>
+            <a:ext cx="2194560" cy="3931920"/>
+          </a:xfrm>
+          <a:prstGeom prst="rect">
+            <a:avLst/>
+          </a:prstGeom>
+          <a:noFill/>
+        </p:spPr>
+        <p:txBody>
+          <a:bodyPr wrap="square">
+            <a:spAutoFit/>
+          </a:bodyPr>
+          <a:lstStyle/>
+          <a:p>
+            <a:pPr>
+              <a:defRPr sz="1600" b="1">
+                <a:solidFill>
+                  <a:srgbClr val="F59E0B"/>
+                </a:solidFill>
+              </a:defRPr>
+            </a:pPr>
+            <a:r>
+              <a:t>TIER AA</a:t>
+            </a:r>
+          </a:p>
+          <a:p>
+            <a:pPr>
+              <a:spcBef>
+                <a:spcPts val="400"/>
+              </a:spcBef>
+              <a:defRPr sz="1100" b="1">
+                <a:solidFill>
+                  <a:srgbClr val="FFFFFF"/>
+                </a:solidFill>
+              </a:defRPr>
+            </a:pPr>
+            <a:r>
+              <a:t>Grandes Minerações &amp; Siderurgias</a:t>
+            </a:r>
+          </a:p>
+          <a:p>
+            <a:pPr>
+              <a:spcBef>
+                <a:spcPts val="800"/>
+              </a:spcBef>
+              <a:defRPr sz="1000">
+                <a:solidFill>
+                  <a:srgbClr val="F59E0B"/>
+                </a:solidFill>
+              </a:defRPr>
+            </a:pPr>
+            <a:r>
+              <a:t>Principais Clientes:</a:t>
+            </a:r>
+            <a:br/>
+            <a:r>
+              <a:t>Vale, Usiminas, Anglo American, CSN, ArcelorMittal</a:t>
+            </a:r>
+          </a:p>
+          <a:p>
+            <a:pPr>
+              <a:spcBef>
+                <a:spcPts val="1000"/>
+              </a:spcBef>
+              <a:defRPr sz="1050">
+                <a:solidFill>
+                  <a:srgbClr val="E2E8F0"/>
+                </a:solidFill>
+              </a:defRPr>
+            </a:pPr>
+            <a:r>
+              <a:t>Exigências Técnicas:</a:t>
+            </a:r>
+            <a:br/>
+            <a:r>
+              <a:t>Rigor Máximo: Pintura 100% impecável, testes de carga, ART mecânica, horímetro estrito e vistoria pericial.</a:t>
+            </a:r>
+          </a:p>
+        </p:txBody>
+      </p:sp>
+      <p:sp>
+        <p:nvSpPr>
+          <p:cNvPr id="9" name="Rounded Rectangle 8"/>
+          <p:cNvSpPr/>
+          <p:nvPr/>
+        </p:nvSpPr>
+        <p:spPr>
+          <a:xfrm>
+            <a:off x="3456432" y="1645920"/>
+            <a:ext cx="2560320" cy="4389120"/>
+          </a:xfrm>
+          <a:prstGeom prst="roundRect">
+            <a:avLst/>
+          </a:prstGeom>
+          <a:solidFill>
+            <a:srgbClr val="1E232C"/>
+          </a:solidFill>
+          <a:ln w="15240">
+            <a:solidFill>
+              <a:srgbClr val="3C4858"/>
+            </a:solidFill>
+          </a:ln>
+        </p:spPr>
+        <p:style>
+          <a:lnRef idx="1">
+            <a:schemeClr val="accent1"/>
+          </a:lnRef>
+          <a:fillRef idx="3">
+            <a:schemeClr val="accent1"/>
+          </a:fillRef>
+          <a:effectRef idx="2">
+            <a:schemeClr val="accent1"/>
+          </a:effectRef>
+          <a:fontRef idx="minor">
+            <a:schemeClr val="lt1"/>
+          </a:fontRef>
+        </p:style>
+        <p:txBody>
+          <a:bodyPr rtlCol="0" anchor="ctr"/>
+          <a:lstStyle/>
+          <a:p>
+            <a:pPr algn="ctr"/>
+          </a:p>
+        </p:txBody>
+      </p:sp>
+      <p:sp>
+        <p:nvSpPr>
+          <p:cNvPr id="10" name="Rectangle 9"/>
+          <p:cNvSpPr/>
+          <p:nvPr/>
+        </p:nvSpPr>
+        <p:spPr>
+          <a:xfrm>
+            <a:off x="3456432" y="1645920"/>
+            <a:ext cx="2560320" cy="109728"/>
+          </a:xfrm>
+          <a:prstGeom prst="rect">
+            <a:avLst/>
+          </a:prstGeom>
+          <a:solidFill>
+            <a:srgbClr val="FFFFFF"/>
+          </a:solidFill>
+          <a:ln>
+            <a:noFill/>
+          </a:ln>
+        </p:spPr>
+        <p:style>
+          <a:lnRef idx="1">
+            <a:schemeClr val="accent1"/>
+          </a:lnRef>
+          <a:fillRef idx="3">
+            <a:schemeClr val="accent1"/>
+          </a:fillRef>
+          <a:effectRef idx="2">
+            <a:schemeClr val="accent1"/>
+          </a:effectRef>
+          <a:fontRef idx="minor">
+            <a:schemeClr val="lt1"/>
+          </a:fontRef>
+        </p:style>
+        <p:txBody>
+          <a:bodyPr rtlCol="0" anchor="ctr"/>
+          <a:lstStyle/>
+          <a:p>
+            <a:pPr algn="ctr"/>
+          </a:p>
+        </p:txBody>
+      </p:sp>
+      <p:sp>
+        <p:nvSpPr>
+          <p:cNvPr id="11" name="TextBox 10"/>
+          <p:cNvSpPr txBox="1"/>
+          <p:nvPr/>
+        </p:nvSpPr>
+        <p:spPr>
+          <a:xfrm>
+            <a:off x="3639312" y="1920240"/>
+            <a:ext cx="2194560" cy="3931920"/>
+          </a:xfrm>
+          <a:prstGeom prst="rect">
+            <a:avLst/>
+          </a:prstGeom>
+          <a:noFill/>
+        </p:spPr>
+        <p:txBody>
+          <a:bodyPr wrap="square">
+            <a:spAutoFit/>
+          </a:bodyPr>
+          <a:lstStyle/>
+          <a:p>
+            <a:pPr>
+              <a:defRPr sz="1600" b="1">
+                <a:solidFill>
+                  <a:srgbClr val="FFFFFF"/>
+                </a:solidFill>
+              </a:defRPr>
+            </a:pPr>
+            <a:r>
+              <a:t>TIER A</a:t>
+            </a:r>
+          </a:p>
+          <a:p>
+            <a:pPr>
+              <a:spcBef>
+                <a:spcPts val="400"/>
+              </a:spcBef>
+              <a:defRPr sz="1100" b="1">
+                <a:solidFill>
+                  <a:srgbClr val="FFFFFF"/>
+                </a:solidFill>
+              </a:defRPr>
+            </a:pPr>
+            <a:r>
+              <a:t>Contratadas dos Grandes Players</a:t>
+            </a:r>
+          </a:p>
+          <a:p>
+            <a:pPr>
+              <a:spcBef>
+                <a:spcPts val="800"/>
+              </a:spcBef>
+              <a:defRPr sz="1000">
+                <a:solidFill>
+                  <a:srgbClr val="F59E0B"/>
+                </a:solidFill>
+              </a:defRPr>
+            </a:pPr>
+            <a:r>
+              <a:t>Principais Clientes:</a:t>
+            </a:r>
+            <a:br/>
+            <a:r>
+              <a:t>Andrade Gutierrez, Camargo Corrêa, Manserv, Tenenge</a:t>
+            </a:r>
+          </a:p>
+          <a:p>
+            <a:pPr>
+              <a:spcBef>
+                <a:spcPts val="1000"/>
+              </a:spcBef>
+              <a:defRPr sz="1050">
+                <a:solidFill>
+                  <a:srgbClr val="E2E8F0"/>
+                </a:solidFill>
+              </a:defRPr>
+            </a:pPr>
+            <a:r>
+              <a:t>Exigências Técnicas:</a:t>
+            </a:r>
+            <a:br/>
+            <a:r>
+              <a:t>Rigor Elevado: Atendimento integral às NRs 11/12/18 e homologação de requisitos da contratante principal.</a:t>
+            </a:r>
+          </a:p>
+        </p:txBody>
+      </p:sp>
+      <p:sp>
+        <p:nvSpPr>
+          <p:cNvPr id="12" name="Rounded Rectangle 11"/>
+          <p:cNvSpPr/>
+          <p:nvPr/>
+        </p:nvSpPr>
+        <p:spPr>
+          <a:xfrm>
+            <a:off x="6181344" y="1645920"/>
+            <a:ext cx="2560320" cy="4389120"/>
+          </a:xfrm>
+          <a:prstGeom prst="roundRect">
+            <a:avLst/>
+          </a:prstGeom>
+          <a:solidFill>
+            <a:srgbClr val="1E232C"/>
+          </a:solidFill>
+          <a:ln w="15240">
+            <a:solidFill>
+              <a:srgbClr val="3C4858"/>
+            </a:solidFill>
+          </a:ln>
+        </p:spPr>
+        <p:style>
+          <a:lnRef idx="1">
+            <a:schemeClr val="accent1"/>
+          </a:lnRef>
+          <a:fillRef idx="3">
+            <a:schemeClr val="accent1"/>
+          </a:fillRef>
+          <a:effectRef idx="2">
+            <a:schemeClr val="accent1"/>
+          </a:effectRef>
+          <a:fontRef idx="minor">
+            <a:schemeClr val="lt1"/>
+          </a:fontRef>
+        </p:style>
+        <p:txBody>
+          <a:bodyPr rtlCol="0" anchor="ctr"/>
+          <a:lstStyle/>
+          <a:p>
+            <a:pPr algn="ctr"/>
+          </a:p>
+        </p:txBody>
+      </p:sp>
+      <p:sp>
+        <p:nvSpPr>
+          <p:cNvPr id="13" name="Rectangle 12"/>
+          <p:cNvSpPr/>
+          <p:nvPr/>
+        </p:nvSpPr>
+        <p:spPr>
+          <a:xfrm>
+            <a:off x="6181344" y="1645920"/>
+            <a:ext cx="2560320" cy="109728"/>
+          </a:xfrm>
+          <a:prstGeom prst="rect">
+            <a:avLst/>
+          </a:prstGeom>
+          <a:solidFill>
+            <a:srgbClr val="F59E0B"/>
+          </a:solidFill>
+          <a:ln>
+            <a:noFill/>
+          </a:ln>
+        </p:spPr>
+        <p:style>
+          <a:lnRef idx="1">
+            <a:schemeClr val="accent1"/>
+          </a:lnRef>
+          <a:fillRef idx="3">
+            <a:schemeClr val="accent1"/>
+          </a:fillRef>
+          <a:effectRef idx="2">
+            <a:schemeClr val="accent1"/>
+          </a:effectRef>
+          <a:fontRef idx="minor">
+            <a:schemeClr val="lt1"/>
+          </a:fontRef>
+        </p:style>
+        <p:txBody>
+          <a:bodyPr rtlCol="0" anchor="ctr"/>
+          <a:lstStyle/>
+          <a:p>
+            <a:pPr algn="ctr"/>
+          </a:p>
+        </p:txBody>
+      </p:sp>
+      <p:sp>
+        <p:nvSpPr>
+          <p:cNvPr id="14" name="TextBox 13"/>
+          <p:cNvSpPr txBox="1"/>
+          <p:nvPr/>
+        </p:nvSpPr>
+        <p:spPr>
+          <a:xfrm>
+            <a:off x="6364224" y="1920240"/>
+            <a:ext cx="2194560" cy="3931920"/>
+          </a:xfrm>
+          <a:prstGeom prst="rect">
+            <a:avLst/>
+          </a:prstGeom>
+          <a:noFill/>
+        </p:spPr>
+        <p:txBody>
+          <a:bodyPr wrap="square">
+            <a:spAutoFit/>
+          </a:bodyPr>
+          <a:lstStyle/>
+          <a:p>
+            <a:pPr>
+              <a:defRPr sz="1600" b="1">
+                <a:solidFill>
+                  <a:srgbClr val="F59E0B"/>
+                </a:solidFill>
+              </a:defRPr>
+            </a:pPr>
+            <a:r>
+              <a:t>TIER B</a:t>
+            </a:r>
+          </a:p>
+          <a:p>
+            <a:pPr>
+              <a:spcBef>
+                <a:spcPts val="400"/>
+              </a:spcBef>
+              <a:defRPr sz="1100" b="1">
+                <a:solidFill>
+                  <a:srgbClr val="FFFFFF"/>
+                </a:solidFill>
+              </a:defRPr>
+            </a:pPr>
+            <a:r>
+              <a:t>Obras Públicas &amp; Infraestrutura</a:t>
+            </a:r>
+          </a:p>
+          <a:p>
+            <a:pPr>
+              <a:spcBef>
+                <a:spcPts val="800"/>
+              </a:spcBef>
+              <a:defRPr sz="1000">
+                <a:solidFill>
+                  <a:srgbClr val="F59E0B"/>
+                </a:solidFill>
+              </a:defRPr>
+            </a:pPr>
+            <a:r>
+              <a:t>Principais Clientes:</a:t>
+            </a:r>
+            <a:br/>
+            <a:r>
+              <a:t>Construtoras de Rodovias, Galpões e Prefeituras</a:t>
+            </a:r>
+          </a:p>
+          <a:p>
+            <a:pPr>
+              <a:spcBef>
+                <a:spcPts val="1000"/>
+              </a:spcBef>
+              <a:defRPr sz="1050">
+                <a:solidFill>
+                  <a:srgbClr val="E2E8F0"/>
+                </a:solidFill>
+              </a:defRPr>
+            </a:pPr>
+            <a:r>
+              <a:t>Exigências Técnicas:</a:t>
+            </a:r>
+            <a:br/>
+            <a:r>
+              <a:t>Rigor Moderado: Equipamento 100% funcional com itens mandatórios de segurança testados e laudo válido.</a:t>
+            </a:r>
+          </a:p>
+        </p:txBody>
+      </p:sp>
+      <p:sp>
+        <p:nvSpPr>
+          <p:cNvPr id="15" name="Rounded Rectangle 14"/>
+          <p:cNvSpPr/>
+          <p:nvPr/>
+        </p:nvSpPr>
+        <p:spPr>
+          <a:xfrm>
+            <a:off x="8906256" y="1645920"/>
+            <a:ext cx="2560320" cy="4389120"/>
+          </a:xfrm>
+          <a:prstGeom prst="roundRect">
+            <a:avLst/>
+          </a:prstGeom>
+          <a:solidFill>
+            <a:srgbClr val="1E232C"/>
+          </a:solidFill>
+          <a:ln w="15240">
+            <a:solidFill>
+              <a:srgbClr val="3C4858"/>
+            </a:solidFill>
+          </a:ln>
+        </p:spPr>
+        <p:style>
+          <a:lnRef idx="1">
+            <a:schemeClr val="accent1"/>
+          </a:lnRef>
+          <a:fillRef idx="3">
+            <a:schemeClr val="accent1"/>
+          </a:fillRef>
+          <a:effectRef idx="2">
+            <a:schemeClr val="accent1"/>
+          </a:effectRef>
+          <a:fontRef idx="minor">
+            <a:schemeClr val="lt1"/>
+          </a:fontRef>
+        </p:style>
+        <p:txBody>
+          <a:bodyPr rtlCol="0" anchor="ctr"/>
+          <a:lstStyle/>
+          <a:p>
+            <a:pPr algn="ctr"/>
+          </a:p>
+        </p:txBody>
+      </p:sp>
+      <p:sp>
+        <p:nvSpPr>
+          <p:cNvPr id="16" name="Rectangle 15"/>
+          <p:cNvSpPr/>
+          <p:nvPr/>
+        </p:nvSpPr>
+        <p:spPr>
+          <a:xfrm>
+            <a:off x="8906256" y="1645920"/>
+            <a:ext cx="2560320" cy="109728"/>
+          </a:xfrm>
+          <a:prstGeom prst="rect">
+            <a:avLst/>
+          </a:prstGeom>
+          <a:solidFill>
+            <a:srgbClr val="94A3B8"/>
+          </a:solidFill>
+          <a:ln>
+            <a:noFill/>
+          </a:ln>
+        </p:spPr>
+        <p:style>
+          <a:lnRef idx="1">
+            <a:schemeClr val="accent1"/>
+          </a:lnRef>
+          <a:fillRef idx="3">
+            <a:schemeClr val="accent1"/>
+          </a:fillRef>
+          <a:effectRef idx="2">
+            <a:schemeClr val="accent1"/>
+          </a:effectRef>
+          <a:fontRef idx="minor">
+            <a:schemeClr val="lt1"/>
+          </a:fontRef>
+        </p:style>
+        <p:txBody>
+          <a:bodyPr rtlCol="0" anchor="ctr"/>
+          <a:lstStyle/>
+          <a:p>
+            <a:pPr algn="ctr"/>
+          </a:p>
+        </p:txBody>
+      </p:sp>
+      <p:sp>
+        <p:nvSpPr>
+          <p:cNvPr id="17" name="TextBox 16"/>
+          <p:cNvSpPr txBox="1"/>
+          <p:nvPr/>
+        </p:nvSpPr>
+        <p:spPr>
+          <a:xfrm>
+            <a:off x="9089136" y="1920240"/>
+            <a:ext cx="2194560" cy="3931920"/>
+          </a:xfrm>
+          <a:prstGeom prst="rect">
+            <a:avLst/>
+          </a:prstGeom>
+          <a:noFill/>
+        </p:spPr>
+        <p:txBody>
+          <a:bodyPr wrap="square">
+            <a:spAutoFit/>
+          </a:bodyPr>
+          <a:lstStyle/>
+          <a:p>
+            <a:pPr>
+              <a:defRPr sz="1600" b="1">
+                <a:solidFill>
+                  <a:srgbClr val="94A3B8"/>
+                </a:solidFill>
+              </a:defRPr>
+            </a:pPr>
+            <a:r>
+              <a:t>TIER C</a:t>
+            </a:r>
+          </a:p>
+          <a:p>
+            <a:pPr>
+              <a:spcBef>
+                <a:spcPts val="400"/>
+              </a:spcBef>
+              <a:defRPr sz="1100" b="1">
+                <a:solidFill>
+                  <a:srgbClr val="FFFFFF"/>
+                </a:solidFill>
+              </a:defRPr>
+            </a:pPr>
+            <a:r>
+              <a:t>Locação Operacional Padrão</a:t>
+            </a:r>
+          </a:p>
+          <a:p>
+            <a:pPr>
+              <a:spcBef>
+                <a:spcPts val="800"/>
+              </a:spcBef>
+              <a:defRPr sz="1000">
+                <a:solidFill>
+                  <a:srgbClr val="F59E0B"/>
+                </a:solidFill>
+              </a:defRPr>
+            </a:pPr>
+            <a:r>
+              <a:t>Principais Clientes:</a:t>
+            </a:r>
+            <a:br/>
+            <a:r>
+              <a:t>Locações Avulsas, Indústrias Locais e Prestadores</a:t>
+            </a:r>
+          </a:p>
+          <a:p>
+            <a:pPr>
+              <a:spcBef>
+                <a:spcPts val="1000"/>
+              </a:spcBef>
+              <a:defRPr sz="1050">
+                <a:solidFill>
+                  <a:srgbClr val="E2E8F0"/>
+                </a:solidFill>
+              </a:defRPr>
+            </a:pPr>
+            <a:r>
+              <a:t>Exigências Técnicas:</a:t>
+            </a:r>
+            <a:br/>
+            <a:r>
+              <a:t>Rigor Padrão: Conformidade mecânica, hidráulica e operacional plena antes da mobilização no pátio.</a:t>
+            </a:r>
+          </a:p>
+        </p:txBody>
+      </p:sp>
+    </p:spTree>
+  </p:cSld>
+  <p:clrMapOvr>
+    <a:masterClrMapping/>
+  </p:clrMapOvr>
+</p:sld>
+</file>
+
+<file path=ppt/slides/slide11.xml><?xml version="1.0" encoding="utf-8"?>
+<p:sld xmlns:a="http://schemas.openxmlformats.org/drawingml/2006/main" xmlns:p="http://schemas.openxmlformats.org/presentationml/2006/main" xmlns:r="http://schemas.openxmlformats.org/officeDocument/2006/relationships">
+  <p:cSld>
+    <p:spTree>
+      <p:nvGrpSpPr>
+        <p:cNvPr id="1" name=""/>
+        <p:cNvGrpSpPr/>
+        <p:nvPr/>
+      </p:nvGrpSpPr>
+      <p:grpSpPr/>
+      <p:sp>
+        <p:nvSpPr>
+          <p:cNvPr id="2" name="Rectangle 1"/>
+          <p:cNvSpPr/>
+          <p:nvPr/>
+        </p:nvSpPr>
+        <p:spPr>
+          <a:xfrm>
+            <a:off x="0" y="0"/>
+            <a:ext cx="12191695" cy="6858000"/>
+          </a:xfrm>
+          <a:prstGeom prst="rect">
+            <a:avLst/>
+          </a:prstGeom>
+          <a:solidFill>
+            <a:srgbClr val="14171D"/>
+          </a:solidFill>
+          <a:ln>
+            <a:noFill/>
+          </a:ln>
+        </p:spPr>
+        <p:style>
+          <a:lnRef idx="1">
+            <a:schemeClr val="accent1"/>
+          </a:lnRef>
+          <a:fillRef idx="3">
+            <a:schemeClr val="accent1"/>
+          </a:fillRef>
+          <a:effectRef idx="2">
+            <a:schemeClr val="accent1"/>
+          </a:effectRef>
+          <a:fontRef idx="minor">
+            <a:schemeClr val="lt1"/>
+          </a:fontRef>
+        </p:style>
+        <p:txBody>
+          <a:bodyPr rtlCol="0" anchor="ctr"/>
+          <a:lstStyle/>
+          <a:p>
+            <a:pPr algn="ctr"/>
+          </a:p>
+        </p:txBody>
+      </p:sp>
+      <p:sp>
+        <p:nvSpPr>
+          <p:cNvPr id="3" name="Rectangle 2"/>
+          <p:cNvSpPr/>
+          <p:nvPr/>
+        </p:nvSpPr>
+        <p:spPr>
+          <a:xfrm>
+            <a:off x="0" y="0"/>
+            <a:ext cx="12191695" cy="82296"/>
+          </a:xfrm>
+          <a:prstGeom prst="rect">
+            <a:avLst/>
+          </a:prstGeom>
+          <a:solidFill>
+            <a:srgbClr val="F59E0B"/>
+          </a:solidFill>
+          <a:ln>
+            <a:noFill/>
+          </a:ln>
+        </p:spPr>
+        <p:style>
+          <a:lnRef idx="1">
+            <a:schemeClr val="accent1"/>
+          </a:lnRef>
+          <a:fillRef idx="3">
+            <a:schemeClr val="accent1"/>
+          </a:fillRef>
+          <a:effectRef idx="2">
+            <a:schemeClr val="accent1"/>
+          </a:effectRef>
+          <a:fontRef idx="minor">
+            <a:schemeClr val="lt1"/>
+          </a:fontRef>
+        </p:style>
+        <p:txBody>
+          <a:bodyPr rtlCol="0" anchor="ctr"/>
+          <a:lstStyle/>
+          <a:p>
+            <a:pPr algn="ctr"/>
+          </a:p>
+        </p:txBody>
+      </p:sp>
+      <p:sp>
+        <p:nvSpPr>
+          <p:cNvPr id="4" name="TextBox 3"/>
+          <p:cNvSpPr txBox="1"/>
+          <p:nvPr/>
+        </p:nvSpPr>
+        <p:spPr>
+          <a:xfrm>
+            <a:off x="731520" y="292608"/>
+            <a:ext cx="8686800" cy="1005840"/>
+          </a:xfrm>
+          <a:prstGeom prst="rect">
+            <a:avLst/>
+          </a:prstGeom>
+          <a:noFill/>
+        </p:spPr>
+        <p:txBody>
+          <a:bodyPr wrap="square" lIns="0" tIns="0" rIns="0" bIns="0">
+            <a:spAutoFit/>
+          </a:bodyPr>
+          <a:lstStyle/>
+          <a:p>
+            <a:pPr>
+              <a:defRPr sz="950" b="1">
+                <a:solidFill>
+                  <a:srgbClr val="F59E0B"/>
+                </a:solidFill>
+                <a:latin typeface="Arial"/>
+              </a:defRPr>
+            </a:pPr>
+            <a:r>
+              <a:t>GANHOS TÉCNICOS, OPERACIONAIS E JURÍDICOS PARA A LOCAR</a:t>
+            </a:r>
+          </a:p>
+          <a:p>
+            <a:pPr>
+              <a:spcBef>
+                <a:spcPts val="300"/>
+              </a:spcBef>
+              <a:defRPr sz="2200" b="1">
+                <a:solidFill>
+                  <a:srgbClr val="FFFFFF"/>
+                </a:solidFill>
+                <a:latin typeface="Arial"/>
+              </a:defRPr>
+            </a:pPr>
+            <a:r>
+              <a:t>10. Conclusão &amp; Benefícios Estratégicos</a:t>
+            </a:r>
+          </a:p>
+        </p:txBody>
+      </p:sp>
+      <p:pic>
+        <p:nvPicPr>
+          <p:cNvPr id="5" name="Picture 4" descr="locar_logo_transparent.png"/>
+          <p:cNvPicPr>
+            <a:picLocks noChangeAspect="1"/>
+          </p:cNvPicPr>
+          <p:nvPr/>
+        </p:nvPicPr>
+        <p:blipFill>
+          <a:blip r:embed="rId2"/>
+          <a:stretch>
+            <a:fillRect/>
+          </a:stretch>
+        </p:blipFill>
+        <p:spPr>
+          <a:xfrm>
+            <a:off x="9875520" y="274320"/>
+            <a:ext cx="1645920" cy="660994"/>
+          </a:xfrm>
+          <a:prstGeom prst="rect">
+            <a:avLst/>
+          </a:prstGeom>
+        </p:spPr>
+      </p:pic>
+      <p:sp>
+        <p:nvSpPr>
+          <p:cNvPr id="6" name="Rounded Rectangle 5"/>
+          <p:cNvSpPr/>
+          <p:nvPr/>
+        </p:nvSpPr>
+        <p:spPr>
+          <a:xfrm>
+            <a:off x="731520" y="1645920"/>
+            <a:ext cx="5212080" cy="2011680"/>
+          </a:xfrm>
+          <a:prstGeom prst="roundRect">
+            <a:avLst/>
+          </a:prstGeom>
+          <a:solidFill>
+            <a:srgbClr val="1E232C"/>
+          </a:solidFill>
+          <a:ln w="15240">
+            <a:solidFill>
+              <a:srgbClr val="3C4858"/>
+            </a:solidFill>
+          </a:ln>
+        </p:spPr>
+        <p:style>
+          <a:lnRef idx="1">
+            <a:schemeClr val="accent1"/>
+          </a:lnRef>
+          <a:fillRef idx="3">
+            <a:schemeClr val="accent1"/>
+          </a:fillRef>
+          <a:effectRef idx="2">
+            <a:schemeClr val="accent1"/>
+          </a:effectRef>
+          <a:fontRef idx="minor">
+            <a:schemeClr val="lt1"/>
+          </a:fontRef>
+        </p:style>
+        <p:txBody>
+          <a:bodyPr rtlCol="0" anchor="ctr"/>
+          <a:lstStyle/>
+          <a:p>
+            <a:pPr algn="ctr"/>
+          </a:p>
+        </p:txBody>
+      </p:sp>
+      <p:sp>
+        <p:nvSpPr>
           <p:cNvPr id="7" name="TextBox 6"/>
           <p:cNvSpPr txBox="1"/>
           <p:nvPr/>
@@ -3684,7 +4677,7 @@
               </a:spcBef>
               <a:defRPr sz="1200">
                 <a:solidFill>
-                  <a:srgbClr val="CBD5E1"/>
+                  <a:srgbClr val="E2E8F0"/>
                 </a:solidFill>
               </a:defRPr>
             </a:pPr>
@@ -3713,7 +4706,7 @@
           </a:solidFill>
           <a:ln w="15240">
             <a:solidFill>
-              <a:srgbClr val="334155"/>
+              <a:srgbClr val="3C4858"/>
             </a:solidFill>
           </a:ln>
         </p:spPr>
@@ -3769,7 +4762,7 @@
               </a:defRPr>
             </a:pPr>
             <a:r>
-              <a:t>🛡️  Segurança Jurídica</a:t>
+              <a:t>🛡️  Segurança e Blindagem Jurídica</a:t>
             </a:r>
           </a:p>
           <a:p>
@@ -3779,12 +4772,12 @@
               </a:spcBef>
               <a:defRPr sz="1200">
                 <a:solidFill>
-                  <a:srgbClr val="CBD5E1"/>
+                  <a:srgbClr val="E2E8F0"/>
                 </a:solidFill>
               </a:defRPr>
             </a:pPr>
             <a:r>
-              <a:t>Blindagem em caso de auditorias e acidentes, com comprovação forense de vistoria técnica prévia rigorosa.</a:t>
+              <a:t>Comprovação forense de vistoria técnica prévia rigorosa para Ministério do Trabalho e seguradoras.</a:t>
             </a:r>
           </a:p>
         </p:txBody>
@@ -3808,7 +4801,7 @@
           </a:solidFill>
           <a:ln w="15240">
             <a:solidFill>
-              <a:srgbClr val="334155"/>
+              <a:srgbClr val="3C4858"/>
             </a:solidFill>
           </a:ln>
         </p:spPr>
@@ -3864,7 +4857,7 @@
               </a:defRPr>
             </a:pPr>
             <a:r>
-              <a:t>🤝  Conexão Comercial &amp; PCM</a:t>
+              <a:t>🤝  Sinergia Pátio, PCM e Comercial</a:t>
             </a:r>
           </a:p>
           <a:p>
@@ -3874,12 +4867,12 @@
               </a:spcBef>
               <a:defRPr sz="1200">
                 <a:solidFill>
-                  <a:srgbClr val="CBD5E1"/>
+                  <a:srgbClr val="E2E8F0"/>
                 </a:solidFill>
               </a:defRPr>
             </a:pPr>
             <a:r>
-              <a:t>Visibilidade instantânea para o Comercial saber quais máquinas estão aptas ou quando sairão da oficina.</a:t>
+              <a:t>Visibilidade instantânea sobre quais equipamentos estão aptos, reservados ou em reparos na oficina.</a:t>
             </a:r>
           </a:p>
         </p:txBody>
@@ -3903,7 +4896,7 @@
           </a:solidFill>
           <a:ln w="15240">
             <a:solidFill>
-              <a:srgbClr val="334155"/>
+              <a:srgbClr val="3C4858"/>
             </a:solidFill>
           </a:ln>
         </p:spPr>
@@ -3959,7 +4952,7 @@
               </a:defRPr>
             </a:pPr>
             <a:r>
-              <a:t>🌐  Resiliência Offline-First</a:t>
+              <a:t>🌐  Resiliência Máxima Offline-First</a:t>
             </a:r>
           </a:p>
           <a:p>
@@ -3969,12 +4962,12 @@
               </a:spcBef>
               <a:defRPr sz="1200">
                 <a:solidFill>
-                  <a:srgbClr val="CBD5E1"/>
+                  <a:srgbClr val="E2E8F0"/>
                 </a:solidFill>
               </a:defRPr>
             </a:pPr>
             <a:r>
-              <a:t>O inspetor trabalha sem interrupções mesmo em áreas remotas do pátio sem sinal de internet ou Wi-Fi.</a:t>
+              <a:t>Operação garantida no pátio de Betim sem interrupções e sincronização automática transparente com a nuvem.</a:t>
             </a:r>
           </a:p>
         </p:txBody>
@@ -4049,7 +5042,7 @@
         <p:spPr>
           <a:xfrm>
             <a:off x="0" y="0"/>
-            <a:ext cx="12191695" cy="73152"/>
+            <a:ext cx="12191695" cy="82296"/>
           </a:xfrm>
           <a:prstGeom prst="rect">
             <a:avLst/>
@@ -4091,7 +5084,7 @@
         </p:nvSpPr>
         <p:spPr>
           <a:xfrm>
-            <a:off x="731520" y="320040"/>
+            <a:off x="731520" y="292608"/>
             <a:ext cx="8686800" cy="1005840"/>
           </a:xfrm>
           <a:prstGeom prst="rect">
@@ -4114,13 +5107,13 @@
               </a:defRPr>
             </a:pPr>
             <a:r>
-              <a:t>ALINHAMENTO OPERACIONAL E COMPLIANCE</a:t>
+              <a:t>EXEMPLOS VISUAIS REAIS DO SISTEMA EM OPERAÇÃO</a:t>
             </a:r>
           </a:p>
           <a:p>
             <a:pPr>
               <a:spcBef>
-                <a:spcPts val="400"/>
+                <a:spcPts val="300"/>
               </a:spcBef>
               <a:defRPr sz="2200" b="1">
                 <a:solidFill>
@@ -4130,7 +5123,7 @@
               </a:defRPr>
             </a:pPr>
             <a:r>
-              <a:t>1. Visão Geral e Propósito Corporativo</a:t>
+              <a:t>1. Visão Geral da Interface &amp; Telas do Sistema</a:t>
             </a:r>
           </a:p>
         </p:txBody>
@@ -4151,7 +5144,7 @@
         </p:blipFill>
         <p:spPr>
           <a:xfrm>
-            <a:off x="9875520" y="320040"/>
+            <a:off x="9875520" y="274320"/>
             <a:ext cx="1645920" cy="660994"/>
           </a:xfrm>
           <a:prstGeom prst="rect">
@@ -4168,7 +5161,7 @@
         <p:spPr>
           <a:xfrm>
             <a:off x="731520" y="1645920"/>
-            <a:ext cx="3328416" cy="4389120"/>
+            <a:ext cx="2542032" cy="4480560"/>
           </a:xfrm>
           <a:prstGeom prst="roundRect">
             <a:avLst/>
@@ -4178,7 +5171,7 @@
           </a:solidFill>
           <a:ln w="15240">
             <a:solidFill>
-              <a:srgbClr val="334155"/>
+              <a:srgbClr val="3C4858"/>
             </a:solidFill>
           </a:ln>
         </p:spPr>
@@ -4204,25 +5197,101 @@
           </a:p>
         </p:txBody>
       </p:sp>
-      <p:sp>
-        <p:nvSpPr>
-          <p:cNvPr id="7" name="Rounded Rectangle 6"/>
+      <p:pic>
+        <p:nvPicPr>
+          <p:cNvPr id="7" name="Picture 6" descr="screen_dashboard.png"/>
+          <p:cNvPicPr>
+            <a:picLocks noChangeAspect="1"/>
+          </p:cNvPicPr>
+          <p:nvPr/>
+        </p:nvPicPr>
+        <p:blipFill>
+          <a:blip r:embed="rId3"/>
+          <a:stretch>
+            <a:fillRect/>
+          </a:stretch>
+        </p:blipFill>
+        <p:spPr>
+          <a:xfrm>
+            <a:off x="841248" y="1783080"/>
+            <a:ext cx="2322576" cy="1306449"/>
+          </a:xfrm>
+          <a:prstGeom prst="rect">
+            <a:avLst/>
+          </a:prstGeom>
+        </p:spPr>
+      </p:pic>
+      <p:sp>
+        <p:nvSpPr>
+          <p:cNvPr id="8" name="TextBox 7"/>
+          <p:cNvSpPr txBox="1"/>
+          <p:nvPr/>
+        </p:nvSpPr>
+        <p:spPr>
+          <a:xfrm>
+            <a:off x="868680" y="4572000"/>
+            <a:ext cx="2267712" cy="1371600"/>
+          </a:xfrm>
+          <a:prstGeom prst="rect">
+            <a:avLst/>
+          </a:prstGeom>
+          <a:noFill/>
+        </p:spPr>
+        <p:txBody>
+          <a:bodyPr wrap="square">
+            <a:spAutoFit/>
+          </a:bodyPr>
+          <a:lstStyle/>
+          <a:p>
+            <a:pPr>
+              <a:defRPr sz="1400" b="1">
+                <a:solidFill>
+                  <a:srgbClr val="F59E0B"/>
+                </a:solidFill>
+              </a:defRPr>
+            </a:pPr>
+            <a:r>
+              <a:t>Dashboard da Frota</a:t>
+            </a:r>
+          </a:p>
+          <a:p>
+            <a:pPr>
+              <a:spcBef>
+                <a:spcPts val="400"/>
+              </a:spcBef>
+              <a:defRPr sz="1050">
+                <a:solidFill>
+                  <a:srgbClr val="E2E8F0"/>
+                </a:solidFill>
+              </a:defRPr>
+            </a:pPr>
+            <a:r>
+              <a:t>KPIs em tempo real e grid dos 273 ativos de Betim.</a:t>
+            </a:r>
+          </a:p>
+        </p:txBody>
+      </p:sp>
+      <p:sp>
+        <p:nvSpPr>
+          <p:cNvPr id="9" name="Rounded Rectangle 8"/>
           <p:cNvSpPr/>
           <p:nvPr/>
         </p:nvSpPr>
         <p:spPr>
           <a:xfrm>
-            <a:off x="731520" y="1645920"/>
-            <a:ext cx="3328416" cy="109728"/>
+            <a:off x="3456432" y="1645920"/>
+            <a:ext cx="2542032" cy="4480560"/>
           </a:xfrm>
           <a:prstGeom prst="roundRect">
             <a:avLst/>
           </a:prstGeom>
           <a:solidFill>
-            <a:srgbClr val="EF4444"/>
+            <a:srgbClr val="1E232C"/>
           </a:solidFill>
-          <a:ln>
-            <a:noFill/>
+          <a:ln w="15240">
+            <a:solidFill>
+              <a:srgbClr val="3C4858"/>
+            </a:solidFill>
           </a:ln>
         </p:spPr>
         <p:style>
@@ -4247,16 +5316,40 @@
           </a:p>
         </p:txBody>
       </p:sp>
-      <p:sp>
-        <p:nvSpPr>
-          <p:cNvPr id="8" name="TextBox 7"/>
+      <p:pic>
+        <p:nvPicPr>
+          <p:cNvPr id="10" name="Picture 9" descr="screen_inspecao.png"/>
+          <p:cNvPicPr>
+            <a:picLocks noChangeAspect="1"/>
+          </p:cNvPicPr>
+          <p:nvPr/>
+        </p:nvPicPr>
+        <p:blipFill>
+          <a:blip r:embed="rId4"/>
+          <a:stretch>
+            <a:fillRect/>
+          </a:stretch>
+        </p:blipFill>
+        <p:spPr>
+          <a:xfrm>
+            <a:off x="3566160" y="1783080"/>
+            <a:ext cx="2322576" cy="1306449"/>
+          </a:xfrm>
+          <a:prstGeom prst="rect">
+            <a:avLst/>
+          </a:prstGeom>
+        </p:spPr>
+      </p:pic>
+      <p:sp>
+        <p:nvSpPr>
+          <p:cNvPr id="11" name="TextBox 10"/>
           <p:cNvSpPr txBox="1"/>
           <p:nvPr/>
         </p:nvSpPr>
         <p:spPr>
           <a:xfrm>
-            <a:off x="1005840" y="1965960"/>
-            <a:ext cx="2779776" cy="3840480"/>
+            <a:off x="3593592" y="4572000"/>
+            <a:ext cx="2267712" cy="1371600"/>
           </a:xfrm>
           <a:prstGeom prst="rect">
             <a:avLst/>
@@ -4270,45 +5363,43 @@
           <a:lstStyle/>
           <a:p>
             <a:pPr>
-              <a:defRPr sz="1600" b="1">
-                <a:solidFill>
-                  <a:srgbClr val="FFFFFF"/>
-                </a:solidFill>
-                <a:latin typeface="Arial"/>
+              <a:defRPr sz="1400" b="1">
+                <a:solidFill>
+                  <a:srgbClr val="F59E0B"/>
+                </a:solidFill>
               </a:defRPr>
             </a:pPr>
             <a:r>
-              <a:t>🎯 Tolerância Zero na Segurança</a:t>
+              <a:t>Stepper de Inspeção</a:t>
             </a:r>
           </a:p>
           <a:p>
             <a:pPr>
               <a:spcBef>
-                <a:spcPts val="1400"/>
+                <a:spcPts val="400"/>
               </a:spcBef>
-              <a:defRPr sz="1200">
-                <a:solidFill>
-                  <a:srgbClr val="CBD5E1"/>
-                </a:solidFill>
-                <a:latin typeface="Arial"/>
+              <a:defRPr sz="1050">
+                <a:solidFill>
+                  <a:srgbClr val="E2E8F0"/>
+                </a:solidFill>
               </a:defRPr>
             </a:pPr>
             <a:r>
-              <a:t>Elimina a liberação indevida de máquinas com defeitos visuais, estruturais ou mecânicos. Se houver 1 única não conformidade, o ativo é compulsoriamente bloqueado no pátio e direcionado à oficina do PCM.</a:t>
-            </a:r>
-          </a:p>
-        </p:txBody>
-      </p:sp>
-      <p:sp>
-        <p:nvSpPr>
-          <p:cNvPr id="9" name="Rounded Rectangle 8"/>
+              <a:t>Checklist normativo com fotos obrigatórias.</a:t>
+            </a:r>
+          </a:p>
+        </p:txBody>
+      </p:sp>
+      <p:sp>
+        <p:nvSpPr>
+          <p:cNvPr id="12" name="Rounded Rectangle 11"/>
           <p:cNvSpPr/>
           <p:nvPr/>
         </p:nvSpPr>
         <p:spPr>
           <a:xfrm>
-            <a:off x="4425696" y="1645920"/>
-            <a:ext cx="3328416" cy="4389120"/>
+            <a:off x="6181344" y="1645920"/>
+            <a:ext cx="2542032" cy="4480560"/>
           </a:xfrm>
           <a:prstGeom prst="roundRect">
             <a:avLst/>
@@ -4318,7 +5409,7 @@
           </a:solidFill>
           <a:ln w="15240">
             <a:solidFill>
-              <a:srgbClr val="334155"/>
+              <a:srgbClr val="3C4858"/>
             </a:solidFill>
           </a:ln>
         </p:spPr>
@@ -4344,25 +5435,101 @@
           </a:p>
         </p:txBody>
       </p:sp>
-      <p:sp>
-        <p:nvSpPr>
-          <p:cNvPr id="10" name="Rounded Rectangle 9"/>
+      <p:pic>
+        <p:nvPicPr>
+          <p:cNvPr id="13" name="Picture 12" descr="screen_pcm.png"/>
+          <p:cNvPicPr>
+            <a:picLocks noChangeAspect="1"/>
+          </p:cNvPicPr>
+          <p:nvPr/>
+        </p:nvPicPr>
+        <p:blipFill>
+          <a:blip r:embed="rId5"/>
+          <a:stretch>
+            <a:fillRect/>
+          </a:stretch>
+        </p:blipFill>
+        <p:spPr>
+          <a:xfrm>
+            <a:off x="6291072" y="1783080"/>
+            <a:ext cx="2322576" cy="1306449"/>
+          </a:xfrm>
+          <a:prstGeom prst="rect">
+            <a:avLst/>
+          </a:prstGeom>
+        </p:spPr>
+      </p:pic>
+      <p:sp>
+        <p:nvSpPr>
+          <p:cNvPr id="14" name="TextBox 13"/>
+          <p:cNvSpPr txBox="1"/>
+          <p:nvPr/>
+        </p:nvSpPr>
+        <p:spPr>
+          <a:xfrm>
+            <a:off x="6318504" y="4572000"/>
+            <a:ext cx="2267712" cy="1371600"/>
+          </a:xfrm>
+          <a:prstGeom prst="rect">
+            <a:avLst/>
+          </a:prstGeom>
+          <a:noFill/>
+        </p:spPr>
+        <p:txBody>
+          <a:bodyPr wrap="square">
+            <a:spAutoFit/>
+          </a:bodyPr>
+          <a:lstStyle/>
+          <a:p>
+            <a:pPr>
+              <a:defRPr sz="1400" b="1">
+                <a:solidFill>
+                  <a:srgbClr val="F59E0B"/>
+                </a:solidFill>
+              </a:defRPr>
+            </a:pPr>
+            <a:r>
+              <a:t>Central do PCM</a:t>
+            </a:r>
+          </a:p>
+          <a:p>
+            <a:pPr>
+              <a:spcBef>
+                <a:spcPts val="400"/>
+              </a:spcBef>
+              <a:defRPr sz="1050">
+                <a:solidFill>
+                  <a:srgbClr val="E2E8F0"/>
+                </a:solidFill>
+              </a:defRPr>
+            </a:pPr>
+            <a:r>
+              <a:t>S.S. automáticas, ordens e disparos de e-mail/WhatsApp.</a:t>
+            </a:r>
+          </a:p>
+        </p:txBody>
+      </p:sp>
+      <p:sp>
+        <p:nvSpPr>
+          <p:cNvPr id="15" name="Rounded Rectangle 14"/>
           <p:cNvSpPr/>
           <p:nvPr/>
         </p:nvSpPr>
         <p:spPr>
           <a:xfrm>
-            <a:off x="4425696" y="1645920"/>
-            <a:ext cx="3328416" cy="109728"/>
+            <a:off x="8906256" y="1645920"/>
+            <a:ext cx="2542032" cy="4480560"/>
           </a:xfrm>
           <a:prstGeom prst="roundRect">
             <a:avLst/>
           </a:prstGeom>
           <a:solidFill>
-            <a:srgbClr val="F59E0B"/>
+            <a:srgbClr val="1E232C"/>
           </a:solidFill>
-          <a:ln>
-            <a:noFill/>
+          <a:ln w="15240">
+            <a:solidFill>
+              <a:srgbClr val="3C4858"/>
+            </a:solidFill>
           </a:ln>
         </p:spPr>
         <p:style>
@@ -4387,16 +5554,40 @@
           </a:p>
         </p:txBody>
       </p:sp>
-      <p:sp>
-        <p:nvSpPr>
-          <p:cNvPr id="11" name="TextBox 10"/>
+      <p:pic>
+        <p:nvPicPr>
+          <p:cNvPr id="16" name="Picture 15" descr="screen_laudos.png"/>
+          <p:cNvPicPr>
+            <a:picLocks noChangeAspect="1"/>
+          </p:cNvPicPr>
+          <p:nvPr/>
+        </p:nvPicPr>
+        <p:blipFill>
+          <a:blip r:embed="rId6"/>
+          <a:stretch>
+            <a:fillRect/>
+          </a:stretch>
+        </p:blipFill>
+        <p:spPr>
+          <a:xfrm>
+            <a:off x="9015984" y="1783080"/>
+            <a:ext cx="2322576" cy="1306449"/>
+          </a:xfrm>
+          <a:prstGeom prst="rect">
+            <a:avLst/>
+          </a:prstGeom>
+        </p:spPr>
+      </p:pic>
+      <p:sp>
+        <p:nvSpPr>
+          <p:cNvPr id="17" name="TextBox 16"/>
           <p:cNvSpPr txBox="1"/>
           <p:nvPr/>
         </p:nvSpPr>
         <p:spPr>
           <a:xfrm>
-            <a:off x="4700016" y="1965960"/>
-            <a:ext cx="2779776" cy="3840480"/>
+            <a:off x="9043416" y="4572000"/>
+            <a:ext cx="2267712" cy="1371600"/>
           </a:xfrm>
           <a:prstGeom prst="rect">
             <a:avLst/>
@@ -4410,187 +5601,29 @@
           <a:lstStyle/>
           <a:p>
             <a:pPr>
-              <a:defRPr sz="1600" b="1">
-                <a:solidFill>
-                  <a:srgbClr val="FFFFFF"/>
-                </a:solidFill>
-                <a:latin typeface="Arial"/>
+              <a:defRPr sz="1400" b="1">
+                <a:solidFill>
+                  <a:srgbClr val="F59E0B"/>
+                </a:solidFill>
               </a:defRPr>
             </a:pPr>
             <a:r>
-              <a:t>📜 Conformidade Normativa Estrita</a:t>
+              <a:t>Laudos &amp; Histórico</a:t>
             </a:r>
           </a:p>
           <a:p>
             <a:pPr>
               <a:spcBef>
-                <a:spcPts val="1400"/>
+                <a:spcPts val="400"/>
               </a:spcBef>
-              <a:defRPr sz="1200">
-                <a:solidFill>
-                  <a:srgbClr val="CBD5E1"/>
-                </a:solidFill>
-                <a:latin typeface="Arial"/>
+              <a:defRPr sz="1050">
+                <a:solidFill>
+                  <a:srgbClr val="E2E8F0"/>
+                </a:solidFill>
               </a:defRPr>
             </a:pPr>
             <a:r>
-              <a:t>Checklists rigorosos baseados nas normas brasileiras e internacionais obrigatórias:</a:t>
-            </a:r>
-            <a:br/>
-            <a:r>
-              <a:t>• NR-11: Transporte e Movimentação</a:t>
-            </a:r>
-            <a:br/>
-            <a:r>
-              <a:t>• NR-12: Segurança em Máquinas</a:t>
-            </a:r>
-            <a:br/>
-            <a:r>
-              <a:t>• NR-18 (Anexo IV) &amp; NR-35: Trabalho em Altura</a:t>
-            </a:r>
-            <a:br/>
-            <a:r>
-              <a:t>• ABNT NBR 16776 &amp; ASME B30.5</a:t>
-            </a:r>
-          </a:p>
-        </p:txBody>
-      </p:sp>
-      <p:sp>
-        <p:nvSpPr>
-          <p:cNvPr id="12" name="Rounded Rectangle 11"/>
-          <p:cNvSpPr/>
-          <p:nvPr/>
-        </p:nvSpPr>
-        <p:spPr>
-          <a:xfrm>
-            <a:off x="8119872" y="1645920"/>
-            <a:ext cx="3328416" cy="4389120"/>
-          </a:xfrm>
-          <a:prstGeom prst="roundRect">
-            <a:avLst/>
-          </a:prstGeom>
-          <a:solidFill>
-            <a:srgbClr val="1E232C"/>
-          </a:solidFill>
-          <a:ln w="15240">
-            <a:solidFill>
-              <a:srgbClr val="334155"/>
-            </a:solidFill>
-          </a:ln>
-        </p:spPr>
-        <p:style>
-          <a:lnRef idx="1">
-            <a:schemeClr val="accent1"/>
-          </a:lnRef>
-          <a:fillRef idx="3">
-            <a:schemeClr val="accent1"/>
-          </a:fillRef>
-          <a:effectRef idx="2">
-            <a:schemeClr val="accent1"/>
-          </a:effectRef>
-          <a:fontRef idx="minor">
-            <a:schemeClr val="lt1"/>
-          </a:fontRef>
-        </p:style>
-        <p:txBody>
-          <a:bodyPr rtlCol="0" anchor="ctr"/>
-          <a:lstStyle/>
-          <a:p>
-            <a:pPr algn="ctr"/>
-          </a:p>
-        </p:txBody>
-      </p:sp>
-      <p:sp>
-        <p:nvSpPr>
-          <p:cNvPr id="13" name="Rounded Rectangle 12"/>
-          <p:cNvSpPr/>
-          <p:nvPr/>
-        </p:nvSpPr>
-        <p:spPr>
-          <a:xfrm>
-            <a:off x="8119872" y="1645920"/>
-            <a:ext cx="3328416" cy="109728"/>
-          </a:xfrm>
-          <a:prstGeom prst="roundRect">
-            <a:avLst/>
-          </a:prstGeom>
-          <a:solidFill>
-            <a:srgbClr val="10B981"/>
-          </a:solidFill>
-          <a:ln>
-            <a:noFill/>
-          </a:ln>
-        </p:spPr>
-        <p:style>
-          <a:lnRef idx="1">
-            <a:schemeClr val="accent1"/>
-          </a:lnRef>
-          <a:fillRef idx="3">
-            <a:schemeClr val="accent1"/>
-          </a:fillRef>
-          <a:effectRef idx="2">
-            <a:schemeClr val="accent1"/>
-          </a:effectRef>
-          <a:fontRef idx="minor">
-            <a:schemeClr val="lt1"/>
-          </a:fontRef>
-        </p:style>
-        <p:txBody>
-          <a:bodyPr rtlCol="0" anchor="ctr"/>
-          <a:lstStyle/>
-          <a:p>
-            <a:pPr algn="ctr"/>
-          </a:p>
-        </p:txBody>
-      </p:sp>
-      <p:sp>
-        <p:nvSpPr>
-          <p:cNvPr id="14" name="TextBox 13"/>
-          <p:cNvSpPr txBox="1"/>
-          <p:nvPr/>
-        </p:nvSpPr>
-        <p:spPr>
-          <a:xfrm>
-            <a:off x="8394192" y="1965960"/>
-            <a:ext cx="2779776" cy="3840480"/>
-          </a:xfrm>
-          <a:prstGeom prst="rect">
-            <a:avLst/>
-          </a:prstGeom>
-          <a:noFill/>
-        </p:spPr>
-        <p:txBody>
-          <a:bodyPr wrap="square">
-            <a:spAutoFit/>
-          </a:bodyPr>
-          <a:lstStyle/>
-          <a:p>
-            <a:pPr>
-              <a:defRPr sz="1600" b="1">
-                <a:solidFill>
-                  <a:srgbClr val="FFFFFF"/>
-                </a:solidFill>
-                <a:latin typeface="Arial"/>
-              </a:defRPr>
-            </a:pPr>
-            <a:r>
-              <a:t>⚡ Agilidade e Integração em Tempo Real</a:t>
-            </a:r>
-          </a:p>
-          <a:p>
-            <a:pPr>
-              <a:spcBef>
-                <a:spcPts val="1400"/>
-              </a:spcBef>
-              <a:defRPr sz="1200">
-                <a:solidFill>
-                  <a:srgbClr val="CBD5E1"/>
-                </a:solidFill>
-                <a:latin typeface="Arial"/>
-              </a:defRPr>
-            </a:pPr>
-            <a:r>
-              <a:t>Conexão direta e automática entre a Inspeção Técnica de Pátio, o PCM (Planejamento e Controle de Manutenção) e o Comercial. Redução drástica do Lead Time de mobilização e reparos de frota.</a:t>
+              <a:t>Rastreabilidade e certificação com QR Code / SHA-256.</a:t>
             </a:r>
           </a:p>
         </p:txBody>
@@ -4665,7 +5698,7 @@
         <p:spPr>
           <a:xfrm>
             <a:off x="0" y="0"/>
-            <a:ext cx="12191695" cy="73152"/>
+            <a:ext cx="12191695" cy="82296"/>
           </a:xfrm>
           <a:prstGeom prst="rect">
             <a:avLst/>
@@ -4707,7 +5740,7 @@
         </p:nvSpPr>
         <p:spPr>
           <a:xfrm>
-            <a:off x="731520" y="320040"/>
+            <a:off x="731520" y="292608"/>
             <a:ext cx="8686800" cy="1005840"/>
           </a:xfrm>
           <a:prstGeom prst="rect">
@@ -4730,13 +5763,13 @@
               </a:defRPr>
             </a:pPr>
             <a:r>
-              <a:t>ARQUITETURA FUNCIONAL &amp; NUVEM</a:t>
+              <a:t>RESILIÊNCIA NO PÁTIO DE BETIM SEM SINAL DE REDE</a:t>
             </a:r>
           </a:p>
           <a:p>
             <a:pPr>
               <a:spcBef>
-                <a:spcPts val="400"/>
+                <a:spcPts val="300"/>
               </a:spcBef>
               <a:defRPr sz="2200" b="1">
                 <a:solidFill>
@@ -4746,7 +5779,7 @@
               </a:defRPr>
             </a:pPr>
             <a:r>
-              <a:t>2. Estrutura e Módulos do Sistema</a:t>
+              <a:t>2. Funcionamento 100% Offline no Celular (PWA)</a:t>
             </a:r>
           </a:p>
         </p:txBody>
@@ -4767,7 +5800,7 @@
         </p:blipFill>
         <p:spPr>
           <a:xfrm>
-            <a:off x="9875520" y="320040"/>
+            <a:off x="9875520" y="274320"/>
             <a:ext cx="1645920" cy="660994"/>
           </a:xfrm>
           <a:prstGeom prst="rect">
@@ -4784,7 +5817,7 @@
         <p:spPr>
           <a:xfrm>
             <a:off x="731520" y="1645920"/>
-            <a:ext cx="5212080" cy="2011680"/>
+            <a:ext cx="3383280" cy="4480560"/>
           </a:xfrm>
           <a:prstGeom prst="roundRect">
             <a:avLst/>
@@ -4794,7 +5827,7 @@
           </a:solidFill>
           <a:ln w="15240">
             <a:solidFill>
-              <a:srgbClr val="334155"/>
+              <a:srgbClr val="3C4858"/>
             </a:solidFill>
           </a:ln>
         </p:spPr>
@@ -4828,8 +5861,8 @@
         </p:nvSpPr>
         <p:spPr>
           <a:xfrm>
-            <a:off x="1005840" y="1828800"/>
-            <a:ext cx="4663440" cy="1645920"/>
+            <a:off x="914400" y="1828800"/>
+            <a:ext cx="3017520" cy="4114800"/>
           </a:xfrm>
           <a:prstGeom prst="rect">
             <a:avLst/>
@@ -4843,47 +5876,47 @@
           <a:lstStyle/>
           <a:p>
             <a:pPr>
-              <a:defRPr sz="1500" b="1">
+              <a:defRPr sz="1600" b="1">
                 <a:solidFill>
                   <a:srgbClr val="F59E0B"/>
                 </a:solidFill>
-                <a:latin typeface="Arial"/>
               </a:defRPr>
             </a:pPr>
             <a:r>
-              <a:t>🚜 Gestão de Frota &amp; Dashboard</a:t>
+              <a:t>📱 Aplicativo PWA Instalável</a:t>
             </a:r>
           </a:p>
           <a:p>
             <a:pPr>
               <a:spcBef>
-                <a:spcPts val="300"/>
-              </a:spcBef>
-              <a:defRPr sz="1000" b="1">
-                <a:solidFill>
-                  <a:srgbClr val="38BDF8"/>
-                </a:solidFill>
-                <a:latin typeface="Arial"/>
-              </a:defRPr>
-            </a:pPr>
-            <a:r>
-              <a:t>Status / Papel: Visibilidade Geral</a:t>
-            </a:r>
-          </a:p>
-          <a:p>
-            <a:pPr>
-              <a:spcBef>
-                <a:spcPts val="600"/>
+                <a:spcPts val="1000"/>
               </a:spcBef>
               <a:defRPr sz="1100">
                 <a:solidFill>
-                  <a:srgbClr val="CBD5E1"/>
-                </a:solidFill>
-                <a:latin typeface="Arial"/>
+                  <a:srgbClr val="E2E8F0"/>
+                </a:solidFill>
               </a:defRPr>
             </a:pPr>
             <a:r>
-              <a:t>Controle dos 273 equipamentos ativos da base Betim. Segregação por Divisão PTA (245) e Divisão Guindastes (29), filtros por status operacional, clientes contratantes e horímetro de preventiva.</a:t>
+              <a:t>• Instalação sem App Store: O inspetor acessa o link e toca em 'Adicionar à Tela de Início'.</a:t>
+            </a:r>
+            <a:br/>
+            <a:br/>
+            <a:r>
+              <a:t>• Service Worker &amp; Cache: O código, telas e fotos são gravados no celular para abrir instantaneamente mesmo em modo avião.</a:t>
+            </a:r>
+            <a:br/>
+            <a:br/>
+            <a:r>
+              <a:t>• Banco Local Dual-Layer:</a:t>
+            </a:r>
+            <a:br/>
+            <a:r>
+              <a:t>  - IndexedDB: Fotos e evidências pesadas.</a:t>
+            </a:r>
+            <a:br/>
+            <a:r>
+              <a:t>  - LocalStorage: Dados de frota e filas.</a:t>
             </a:r>
           </a:p>
         </p:txBody>
@@ -4896,8 +5929,8 @@
         </p:nvSpPr>
         <p:spPr>
           <a:xfrm>
-            <a:off x="6217920" y="1645920"/>
-            <a:ext cx="5212080" cy="2011680"/>
+            <a:off x="4389120" y="1645920"/>
+            <a:ext cx="3383280" cy="4480560"/>
           </a:xfrm>
           <a:prstGeom prst="roundRect">
             <a:avLst/>
@@ -4907,7 +5940,7 @@
           </a:solidFill>
           <a:ln w="15240">
             <a:solidFill>
-              <a:srgbClr val="334155"/>
+              <a:srgbClr val="3C4858"/>
             </a:solidFill>
           </a:ln>
         </p:spPr>
@@ -4941,8 +5974,8 @@
         </p:nvSpPr>
         <p:spPr>
           <a:xfrm>
-            <a:off x="6492240" y="1828800"/>
-            <a:ext cx="4663440" cy="1645920"/>
+            <a:off x="4572000" y="1828800"/>
+            <a:ext cx="3017520" cy="4114800"/>
           </a:xfrm>
           <a:prstGeom prst="rect">
             <a:avLst/>
@@ -4956,47 +5989,39 @@
           <a:lstStyle/>
           <a:p>
             <a:pPr>
-              <a:defRPr sz="1500" b="1">
-                <a:solidFill>
-                  <a:srgbClr val="F59E0B"/>
-                </a:solidFill>
-                <a:latin typeface="Arial"/>
+              <a:defRPr sz="1600" b="1">
+                <a:solidFill>
+                  <a:srgbClr val="FFFFFF"/>
+                </a:solidFill>
               </a:defRPr>
             </a:pPr>
             <a:r>
-              <a:t>📋 Motor de Inspeção Técnica</a:t>
+              <a:t>🔒 Zero Risco de Perda</a:t>
             </a:r>
           </a:p>
           <a:p>
             <a:pPr>
               <a:spcBef>
-                <a:spcPts val="300"/>
-              </a:spcBef>
-              <a:defRPr sz="1000" b="1">
-                <a:solidFill>
-                  <a:srgbClr val="38BDF8"/>
-                </a:solidFill>
-                <a:latin typeface="Arial"/>
-              </a:defRPr>
-            </a:pPr>
-            <a:r>
-              <a:t>Status / Papel: Validação Estrita</a:t>
-            </a:r>
-          </a:p>
-          <a:p>
-            <a:pPr>
-              <a:spcBef>
-                <a:spcPts val="600"/>
+                <a:spcPts val="1000"/>
               </a:spcBef>
               <a:defRPr sz="1100">
                 <a:solidFill>
-                  <a:srgbClr val="CBD5E1"/>
-                </a:solidFill>
-                <a:latin typeface="Arial"/>
+                  <a:srgbClr val="E2E8F0"/>
+                </a:solidFill>
               </a:defRPr>
             </a:pPr>
             <a:r>
-              <a:t>Stepper guiado de vistoria com itens normativos, registro fotográfico obrigatório com carimbo forense para falhas, auditoria visual por IA e validação de 100% dos quesitos com assinatura digital.</a:t>
+              <a:t>• Trabalho Ininterrupto no Pátio: O inspetor preenche o checklist, tira fotos e assina sem travar.</a:t>
+            </a:r>
+            <a:br/>
+            <a:br/>
+            <a:r>
+              <a:t>• Fila de Contingência (Sync Queue): Se não houver rede, a vistoria entra em uma fila segura no celular.</a:t>
+            </a:r>
+            <a:br/>
+            <a:br/>
+            <a:r>
+              <a:t>• Segurança Máxima: Bateria descarregada, desligamento ou fechamento do app não apagam os dados preenchidos.</a:t>
             </a:r>
           </a:p>
         </p:txBody>
@@ -5009,8 +6034,8 @@
         </p:nvSpPr>
         <p:spPr>
           <a:xfrm>
-            <a:off x="731520" y="3931920"/>
-            <a:ext cx="5212080" cy="2011680"/>
+            <a:off x="8046720" y="1645920"/>
+            <a:ext cx="3383280" cy="4480560"/>
           </a:xfrm>
           <a:prstGeom prst="roundRect">
             <a:avLst/>
@@ -5020,7 +6045,7 @@
           </a:solidFill>
           <a:ln w="15240">
             <a:solidFill>
-              <a:srgbClr val="334155"/>
+              <a:srgbClr val="3C4858"/>
             </a:solidFill>
           </a:ln>
         </p:spPr>
@@ -5054,8 +6079,8 @@
         </p:nvSpPr>
         <p:spPr>
           <a:xfrm>
-            <a:off x="1005840" y="4114800"/>
-            <a:ext cx="4663440" cy="1645920"/>
+            <a:off x="8229600" y="1828800"/>
+            <a:ext cx="3017520" cy="4114800"/>
           </a:xfrm>
           <a:prstGeom prst="rect">
             <a:avLst/>
@@ -5069,160 +6094,44 @@
           <a:lstStyle/>
           <a:p>
             <a:pPr>
-              <a:defRPr sz="1500" b="1">
+              <a:defRPr sz="1600" b="1">
                 <a:solidFill>
                   <a:srgbClr val="F59E0B"/>
                 </a:solidFill>
-                <a:latin typeface="Arial"/>
               </a:defRPr>
             </a:pPr>
             <a:r>
-              <a:t>📨 Central de Atendimento PCM</a:t>
+              <a:t>🚦 Indicadores no Topo</a:t>
             </a:r>
           </a:p>
           <a:p>
             <a:pPr>
               <a:spcBef>
-                <a:spcPts val="300"/>
-              </a:spcBef>
-              <a:defRPr sz="1000" b="1">
-                <a:solidFill>
-                  <a:srgbClr val="38BDF8"/>
-                </a:solidFill>
-                <a:latin typeface="Arial"/>
-              </a:defRPr>
-            </a:pPr>
-            <a:r>
-              <a:t>Status / Papel: Fluxo Corretivo</a:t>
-            </a:r>
-          </a:p>
-          <a:p>
-            <a:pPr>
-              <a:spcBef>
-                <a:spcPts val="600"/>
+                <a:spcPts val="1000"/>
               </a:spcBef>
               <a:defRPr sz="1100">
                 <a:solidFill>
-                  <a:srgbClr val="CBD5E1"/>
-                </a:solidFill>
-                <a:latin typeface="Arial"/>
+                  <a:srgbClr val="E2E8F0"/>
+                </a:solidFill>
               </a:defRPr>
             </a:pPr>
             <a:r>
-              <a:t>Geração instantânea de Solicitações de Serviço (S.S.) em caso de não conformidades. Gestão de etapas (Aberta, Em Planejamento, Em Execução, Concluída), disparo de e-mail e WhatsApp para o PCM.</a:t>
-            </a:r>
-          </a:p>
-        </p:txBody>
-      </p:sp>
-      <p:sp>
-        <p:nvSpPr>
-          <p:cNvPr id="12" name="Rounded Rectangle 11"/>
-          <p:cNvSpPr/>
-          <p:nvPr/>
-        </p:nvSpPr>
-        <p:spPr>
-          <a:xfrm>
-            <a:off x="6217920" y="3931920"/>
-            <a:ext cx="5212080" cy="2011680"/>
-          </a:xfrm>
-          <a:prstGeom prst="roundRect">
-            <a:avLst/>
-          </a:prstGeom>
-          <a:solidFill>
-            <a:srgbClr val="1E232C"/>
-          </a:solidFill>
-          <a:ln w="15240">
-            <a:solidFill>
-              <a:srgbClr val="334155"/>
-            </a:solidFill>
-          </a:ln>
-        </p:spPr>
-        <p:style>
-          <a:lnRef idx="1">
-            <a:schemeClr val="accent1"/>
-          </a:lnRef>
-          <a:fillRef idx="3">
-            <a:schemeClr val="accent1"/>
-          </a:fillRef>
-          <a:effectRef idx="2">
-            <a:schemeClr val="accent1"/>
-          </a:effectRef>
-          <a:fontRef idx="minor">
-            <a:schemeClr val="lt1"/>
-          </a:fontRef>
-        </p:style>
-        <p:txBody>
-          <a:bodyPr rtlCol="0" anchor="ctr"/>
-          <a:lstStyle/>
-          <a:p>
-            <a:pPr algn="ctr"/>
-          </a:p>
-        </p:txBody>
-      </p:sp>
-      <p:sp>
-        <p:nvSpPr>
-          <p:cNvPr id="13" name="TextBox 12"/>
-          <p:cNvSpPr txBox="1"/>
-          <p:nvPr/>
-        </p:nvSpPr>
-        <p:spPr>
-          <a:xfrm>
-            <a:off x="6492240" y="4114800"/>
-            <a:ext cx="4663440" cy="1645920"/>
-          </a:xfrm>
-          <a:prstGeom prst="rect">
-            <a:avLst/>
-          </a:prstGeom>
-          <a:noFill/>
-        </p:spPr>
-        <p:txBody>
-          <a:bodyPr wrap="square">
-            <a:spAutoFit/>
-          </a:bodyPr>
-          <a:lstStyle/>
-          <a:p>
-            <a:pPr>
-              <a:defRPr sz="1500" b="1">
-                <a:solidFill>
-                  <a:srgbClr val="F59E0B"/>
-                </a:solidFill>
-                <a:latin typeface="Arial"/>
-              </a:defRPr>
-            </a:pPr>
-            <a:r>
-              <a:t>📜 Laudos Periciais &amp; Auditoria Forense</a:t>
-            </a:r>
-          </a:p>
-          <a:p>
-            <a:pPr>
-              <a:spcBef>
-                <a:spcPts val="300"/>
-              </a:spcBef>
-              <a:defRPr sz="1000" b="1">
-                <a:solidFill>
-                  <a:srgbClr val="38BDF8"/>
-                </a:solidFill>
-                <a:latin typeface="Arial"/>
-              </a:defRPr>
-            </a:pPr>
-            <a:r>
-              <a:t>Status / Papel: Validade Jurídica</a:t>
-            </a:r>
-          </a:p>
-          <a:p>
-            <a:pPr>
-              <a:spcBef>
-                <a:spcPts val="600"/>
-              </a:spcBef>
-              <a:defRPr sz="1100">
-                <a:solidFill>
-                  <a:srgbClr val="CBD5E1"/>
-                </a:solidFill>
-                <a:latin typeface="Arial"/>
-              </a:defRPr>
-            </a:pPr>
-            <a:r>
-              <a:t>Geração do Laudo Técnico Pericial em PDF oficial com carimbo, QR Code dinâmico autenticador e Hash Criptográfico SHA-256 para auditorias do Ministério do Trabalho e clientes de grande porte.</a:t>
+              <a:t>O inspetor visualiza a conectividade em tempo real no cabeçalho:</a:t>
+            </a:r>
+            <a:br/>
+            <a:br/>
+            <a:r>
+              <a:t>🟢 Appwrite OK: Todos os laudos já estão salvos e sincronizados na nuvem.</a:t>
+            </a:r>
+            <a:br/>
+            <a:br/>
+            <a:r>
+              <a:t>🟡 X Pendente(s): Há laudos na fila aguardando término de transmissão.</a:t>
+            </a:r>
+            <a:br/>
+            <a:br/>
+            <a:r>
+              <a:t>🔴 Offline Pátio: Celular sem sinal; dados protegidos na memória local.</a:t>
             </a:r>
           </a:p>
         </p:txBody>
@@ -5297,7 +6206,7 @@
         <p:spPr>
           <a:xfrm>
             <a:off x="0" y="0"/>
-            <a:ext cx="12191695" cy="73152"/>
+            <a:ext cx="12191695" cy="82296"/>
           </a:xfrm>
           <a:prstGeom prst="rect">
             <a:avLst/>
@@ -5339,7 +6248,7 @@
         </p:nvSpPr>
         <p:spPr>
           <a:xfrm>
-            <a:off x="731520" y="320040"/>
+            <a:off x="731520" y="292608"/>
             <a:ext cx="8686800" cy="1005840"/>
           </a:xfrm>
           <a:prstGeom prst="rect">
@@ -5362,13 +6271,13 @@
               </a:defRPr>
             </a:pPr>
             <a:r>
-              <a:t>AUTOMAÇÃO INTELIGENTE DE PÁTIO</a:t>
+              <a:t>AUTOMAÇÃO COMPLETA: O USUÁRIO NÃO PRECISA FAZER NADA</a:t>
             </a:r>
           </a:p>
           <a:p>
             <a:pPr>
               <a:spcBef>
-                <a:spcPts val="400"/>
+                <a:spcPts val="300"/>
               </a:spcBef>
               <a:defRPr sz="2200" b="1">
                 <a:solidFill>
@@ -5378,7 +6287,7 @@
               </a:defRPr>
             </a:pPr>
             <a:r>
-              <a:t>3. Regra Fundamental: Transições Automáticas de Status</a:t>
+              <a:t>3. Sincronização com a Nuvem (Appwrite Cloud)</a:t>
             </a:r>
           </a:p>
         </p:txBody>
@@ -5399,7 +6308,7 @@
         </p:blipFill>
         <p:spPr>
           <a:xfrm>
-            <a:off x="9875520" y="320040"/>
+            <a:off x="9875520" y="274320"/>
             <a:ext cx="1645920" cy="660994"/>
           </a:xfrm>
           <a:prstGeom prst="rect">
@@ -5416,7 +6325,7 @@
         <p:spPr>
           <a:xfrm>
             <a:off x="731520" y="1645920"/>
-            <a:ext cx="5120640" cy="4480560"/>
+            <a:ext cx="6217920" cy="4480560"/>
           </a:xfrm>
           <a:prstGeom prst="roundRect">
             <a:avLst/>
@@ -5426,7 +6335,7 @@
           </a:solidFill>
           <a:ln w="15240">
             <a:solidFill>
-              <a:srgbClr val="EF4444"/>
+              <a:srgbClr val="3C4858"/>
             </a:solidFill>
           </a:ln>
         </p:spPr>
@@ -5461,7 +6370,7 @@
         <p:spPr>
           <a:xfrm>
             <a:off x="1005840" y="1828800"/>
-            <a:ext cx="4572000" cy="4114800"/>
+            <a:ext cx="5669280" cy="4114800"/>
           </a:xfrm>
           <a:prstGeom prst="rect">
             <a:avLst/>
@@ -5477,73 +6386,49 @@
             <a:pPr>
               <a:defRPr sz="1800" b="1">
                 <a:solidFill>
-                  <a:srgbClr val="EF4444"/>
+                  <a:srgbClr val="F59E0B"/>
                 </a:solidFill>
               </a:defRPr>
             </a:pPr>
             <a:r>
-              <a:t>⛔ SE REPROVADO NA INSPEÇÃO</a:t>
+              <a:t>⚡ Quando a Sincronização Acontece?</a:t>
             </a:r>
           </a:p>
           <a:p>
             <a:pPr>
               <a:spcBef>
-                <a:spcPts val="600"/>
-              </a:spcBef>
-              <a:defRPr sz="1200">
-                <a:solidFill>
-                  <a:srgbClr val="94A3B8"/>
-                </a:solidFill>
-              </a:defRPr>
-            </a:pPr>
-            <a:r>
-              <a:t>Status da Frota passa automaticamente para:</a:t>
-            </a:r>
-          </a:p>
-          <a:p>
-            <a:pPr>
-              <a:spcBef>
-                <a:spcPts val="400"/>
-              </a:spcBef>
-              <a:defRPr sz="2000" b="1">
-                <a:solidFill>
-                  <a:srgbClr val="F59E0B"/>
-                </a:solidFill>
-              </a:defRPr>
-            </a:pPr>
-            <a:r>
-              <a:t>⚙️ MANUTENÇÃO (PCM)</a:t>
-            </a:r>
-          </a:p>
-          <a:p>
-            <a:pPr>
-              <a:spcBef>
-                <a:spcPts val="1400"/>
+                <a:spcPts val="1200"/>
               </a:spcBef>
               <a:defRPr sz="1150">
                 <a:solidFill>
-                  <a:srgbClr val="CBD5E1"/>
+                  <a:srgbClr val="E2E8F0"/>
                 </a:solidFill>
               </a:defRPr>
             </a:pPr>
             <a:r>
-              <a:t>O que acontece no sistema:</a:t>
+              <a:t>1. Automático ao Recuperar Sinal (Wi-Fi ou 4G/5G):</a:t>
             </a:r>
             <a:br/>
             <a:r>
-              <a:t>1. Bloqueio Imediato: O equipamento é marcado como retido no pátio de Betim.</a:t>
+              <a:t>Assim que o inspetor se aproxima da oficina ou entra na cobertura de rede, o navegador detecta o evento 'online' instantaneamente e descarrega toda a fila de vistorias pendentes (flushSyncQueue) para a nuvem.</a:t>
             </a:r>
             <a:br/>
-            <a:r>
-              <a:t>2. Solicitação de Serviço (S.S.): Criada instantaneamente vinculada ao PCM com as não conformidades e fotos de evidência.</a:t>
-            </a:r>
             <a:br/>
             <a:r>
-              <a:t>3. Proteção Comercial: Se a máquina possuía reserva para cliente (ex: Vale), a reserva é suspensa e anotada como retida para evitar saída indevida.</a:t>
+              <a:t>2. Automático ao Reabrir o Aplicativo com Internet:</a:t>
             </a:r>
             <a:br/>
             <a:r>
-              <a:t>4. Comunicação Automática: E-mail e link de WhatsApp gerados para acionar o PCM.</a:t>
+              <a:t>Se o app foi fechado offline, nos primeiros 3 segundos após reabrir com conexão, uma rotina em segundo plano verifica pendências e envia tudo automaticamente.</a:t>
+            </a:r>
+            <a:br/>
+            <a:br/>
+            <a:r>
+              <a:t>3. Em Tempo Real (se já houver sinal no pátio):</a:t>
+            </a:r>
+            <a:br/>
+            <a:r>
+              <a:t>Se o aparelho estiver conectado no momento de assinar o laudo, a gravação na nuvem ocorre no mesmo segundo.</a:t>
             </a:r>
           </a:p>
         </p:txBody>
@@ -5556,18 +6441,18 @@
         </p:nvSpPr>
         <p:spPr>
           <a:xfrm>
-            <a:off x="6309360" y="1645920"/>
-            <a:ext cx="5120640" cy="4480560"/>
+            <a:off x="7132320" y="1645920"/>
+            <a:ext cx="4297680" cy="4480560"/>
           </a:xfrm>
           <a:prstGeom prst="roundRect">
             <a:avLst/>
           </a:prstGeom>
           <a:solidFill>
-            <a:srgbClr val="1E232C"/>
+            <a:srgbClr val="262C38"/>
           </a:solidFill>
           <a:ln w="15240">
             <a:solidFill>
-              <a:srgbClr val="10B981"/>
+              <a:srgbClr val="F59E0B"/>
             </a:solidFill>
           </a:ln>
         </p:spPr>
@@ -5601,8 +6486,8 @@
         </p:nvSpPr>
         <p:spPr>
           <a:xfrm>
-            <a:off x="6583680" y="1828800"/>
-            <a:ext cx="4572000" cy="4114800"/>
+            <a:off x="7406640" y="1828800"/>
+            <a:ext cx="3749039" cy="4114800"/>
           </a:xfrm>
           <a:prstGeom prst="rect">
             <a:avLst/>
@@ -5618,12 +6503,12 @@
             <a:pPr>
               <a:defRPr sz="1800" b="1">
                 <a:solidFill>
-                  <a:srgbClr val="10B981"/>
+                  <a:srgbClr val="FFFFFF"/>
                 </a:solidFill>
               </a:defRPr>
             </a:pPr>
             <a:r>
-              <a:t>✓ SE 100% APROVADO NA INSPEÇÃO</a:t>
+              <a:t>❓ É necessário fazer algo?</a:t>
             </a:r>
           </a:p>
           <a:p>
@@ -5631,60 +6516,43 @@
               <a:spcBef>
                 <a:spcPts val="600"/>
               </a:spcBef>
-              <a:defRPr sz="1200">
-                <a:solidFill>
-                  <a:srgbClr val="94A3B8"/>
+              <a:defRPr sz="1300" b="1">
+                <a:solidFill>
+                  <a:srgbClr val="10B981"/>
                 </a:solidFill>
               </a:defRPr>
             </a:pPr>
             <a:r>
-              <a:t>Status da Frota passa automaticamente para:</a:t>
+              <a:t>NÃO! A sincronização é 100% transparente e automática.</a:t>
             </a:r>
           </a:p>
           <a:p>
             <a:pPr>
               <a:spcBef>
-                <a:spcPts val="400"/>
-              </a:spcBef>
-              <a:defRPr sz="2000" b="1">
-                <a:solidFill>
-                  <a:srgbClr val="10B981"/>
-                </a:solidFill>
-              </a:defRPr>
-            </a:pPr>
-            <a:r>
-              <a:t>🟢 DISPONÍVEL NO PÁTIO</a:t>
-            </a:r>
-          </a:p>
-          <a:p>
-            <a:pPr>
-              <a:spcBef>
-                <a:spcPts val="1400"/>
+                <a:spcPts val="1000"/>
               </a:spcBef>
               <a:defRPr sz="1150">
                 <a:solidFill>
-                  <a:srgbClr val="CBD5E1"/>
+                  <a:srgbClr val="E2E8F0"/>
                 </a:solidFill>
               </a:defRPr>
             </a:pPr>
             <a:r>
-              <a:t>O que acontece no sistema:</a:t>
+              <a:t>O inspetor não precisa se preocupar em apertar botões para sincronizar.</a:t>
             </a:r>
             <a:br/>
-            <a:r>
-              <a:t>1. Liberação Imediata: Máquina 100% apta e regularizada para locação ou mobilização.</a:t>
-            </a:r>
             <a:br/>
             <a:r>
-              <a:t>2. Limpeza de Pendências: Qualquer reserva ou pendência de manutenção anterior é regularizada e limpa.</a:t>
+              <a:t>👆 Sincronização Manual (Opcional):</a:t>
             </a:r>
             <a:br/>
             <a:r>
-              <a:t>3. Baixa Técnica no PCM: Se existia S.S. aberta para este ativo na oficina, ela é automaticamente concluída com a aprovação.</a:t>
+              <a:t>Se o inspetor desejar forçar o envio imediato, basta tocar no botão 'Appwrite OK' ou 'Pendente(s)' no cabeçalho.</a:t>
             </a:r>
             <a:br/>
-            <a:r>
-              <a:t>4. Laudo Pericial Liberado: Emissão imediata do laudo com carimbo verde de liberação, QR Code e Hash SHA-256.</a:t>
+            <a:br/>
+            <a:r>
+              <a:t>O sistema tentará a conexão na hora e exibirá um aviso em tela: 'X registros sincronizados com sucesso!'.</a:t>
             </a:r>
           </a:p>
         </p:txBody>
@@ -5759,7 +6627,7 @@
         <p:spPr>
           <a:xfrm>
             <a:off x="0" y="0"/>
-            <a:ext cx="12191695" cy="73152"/>
+            <a:ext cx="12191695" cy="82296"/>
           </a:xfrm>
           <a:prstGeom prst="rect">
             <a:avLst/>
@@ -5801,7 +6669,7 @@
         </p:nvSpPr>
         <p:spPr>
           <a:xfrm>
-            <a:off x="731520" y="320040"/>
+            <a:off x="731520" y="292608"/>
             <a:ext cx="8686800" cy="1005840"/>
           </a:xfrm>
           <a:prstGeom prst="rect">
@@ -5824,13 +6692,13 @@
               </a:defRPr>
             </a:pPr>
             <a:r>
-              <a:t>FLUXO OPERACIONAL E COMERCIAL INTEGRADO</a:t>
+              <a:t>AUTOMAÇÃO DE STATUS DA FROTA NA FINALIZAÇÃO DA VISTORIA</a:t>
             </a:r>
           </a:p>
           <a:p>
             <a:pPr>
               <a:spcBef>
-                <a:spcPts val="400"/>
+                <a:spcPts val="300"/>
               </a:spcBef>
               <a:defRPr sz="2200" b="1">
                 <a:solidFill>
@@ -5840,7 +6708,7 @@
               </a:defRPr>
             </a:pPr>
             <a:r>
-              <a:t>4. Ciclo de Vida e Estados da Frota</a:t>
+              <a:t>4. Regra Operacional: Transições Automáticas de Status</a:t>
             </a:r>
           </a:p>
         </p:txBody>
@@ -5861,7 +6729,7 @@
         </p:blipFill>
         <p:spPr>
           <a:xfrm>
-            <a:off x="9875520" y="320040"/>
+            <a:off x="9875520" y="274320"/>
             <a:ext cx="1645920" cy="660994"/>
           </a:xfrm>
           <a:prstGeom prst="rect">
@@ -5878,7 +6746,7 @@
         <p:spPr>
           <a:xfrm>
             <a:off x="731520" y="1645920"/>
-            <a:ext cx="2560320" cy="4389120"/>
+            <a:ext cx="5120640" cy="4480560"/>
           </a:xfrm>
           <a:prstGeom prst="roundRect">
             <a:avLst/>
@@ -5888,7 +6756,7 @@
           </a:solidFill>
           <a:ln w="15240">
             <a:solidFill>
-              <a:srgbClr val="334155"/>
+              <a:srgbClr val="EF4444"/>
             </a:solidFill>
           </a:ln>
         </p:spPr>
@@ -5916,23 +6784,117 @@
       </p:sp>
       <p:sp>
         <p:nvSpPr>
-          <p:cNvPr id="7" name="Rectangle 6"/>
+          <p:cNvPr id="7" name="TextBox 6"/>
+          <p:cNvSpPr txBox="1"/>
+          <p:nvPr/>
+        </p:nvSpPr>
+        <p:spPr>
+          <a:xfrm>
+            <a:off x="1005840" y="1828800"/>
+            <a:ext cx="4572000" cy="4114800"/>
+          </a:xfrm>
+          <a:prstGeom prst="rect">
+            <a:avLst/>
+          </a:prstGeom>
+          <a:noFill/>
+        </p:spPr>
+        <p:txBody>
+          <a:bodyPr wrap="square">
+            <a:spAutoFit/>
+          </a:bodyPr>
+          <a:lstStyle/>
+          <a:p>
+            <a:pPr>
+              <a:defRPr sz="1700" b="1">
+                <a:solidFill>
+                  <a:srgbClr val="EF4444"/>
+                </a:solidFill>
+              </a:defRPr>
+            </a:pPr>
+            <a:r>
+              <a:t>⛔ SE REPROVADO NA INSPEÇÃO</a:t>
+            </a:r>
+          </a:p>
+          <a:p>
+            <a:pPr>
+              <a:spcBef>
+                <a:spcPts val="400"/>
+              </a:spcBef>
+              <a:defRPr sz="1100">
+                <a:solidFill>
+                  <a:srgbClr val="94A3B8"/>
+                </a:solidFill>
+              </a:defRPr>
+            </a:pPr>
+            <a:r>
+              <a:t>Status da Frota passa automaticamente para:</a:t>
+            </a:r>
+          </a:p>
+          <a:p>
+            <a:pPr>
+              <a:spcBef>
+                <a:spcPts val="400"/>
+              </a:spcBef>
+              <a:defRPr sz="2000" b="1">
+                <a:solidFill>
+                  <a:srgbClr val="F59E0B"/>
+                </a:solidFill>
+              </a:defRPr>
+            </a:pPr>
+            <a:r>
+              <a:t>⚙️ MANUTENÇÃO (PCM)</a:t>
+            </a:r>
+          </a:p>
+          <a:p>
+            <a:pPr>
+              <a:spcBef>
+                <a:spcPts val="1200"/>
+              </a:spcBef>
+              <a:defRPr sz="1150">
+                <a:solidFill>
+                  <a:srgbClr val="E2E8F0"/>
+                </a:solidFill>
+              </a:defRPr>
+            </a:pPr>
+            <a:r>
+              <a:t>• Bloqueio Compulsório: Equipamento fica impedido de sair do pátio.</a:t>
+            </a:r>
+            <a:br/>
+            <a:r>
+              <a:t>• S.S. Imediata: Gera a Solicitação de Serviço ao PCM com fotos e normas.</a:t>
+            </a:r>
+            <a:br/>
+            <a:r>
+              <a:t>• Suspensão de Reserva: Se estava reservado para cliente, a reserva é suspensa e anotada como retida para manutenção.</a:t>
+            </a:r>
+            <a:br/>
+            <a:r>
+              <a:t>• Notificação PCM: Disparo de e-mail padrão e WhatsApp para a oficina.</a:t>
+            </a:r>
+          </a:p>
+        </p:txBody>
+      </p:sp>
+      <p:sp>
+        <p:nvSpPr>
+          <p:cNvPr id="8" name="Rounded Rectangle 7"/>
           <p:cNvSpPr/>
           <p:nvPr/>
         </p:nvSpPr>
         <p:spPr>
           <a:xfrm>
-            <a:off x="731520" y="1645920"/>
-            <a:ext cx="2560320" cy="109728"/>
-          </a:xfrm>
-          <a:prstGeom prst="rect">
+            <a:off x="6309360" y="1645920"/>
+            <a:ext cx="5120640" cy="4480560"/>
+          </a:xfrm>
+          <a:prstGeom prst="roundRect">
             <a:avLst/>
           </a:prstGeom>
           <a:solidFill>
-            <a:srgbClr val="10B981"/>
+            <a:srgbClr val="1E232C"/>
           </a:solidFill>
-          <a:ln>
-            <a:noFill/>
+          <a:ln w="15240">
+            <a:solidFill>
+              <a:srgbClr val="10B981"/>
+            </a:solidFill>
           </a:ln>
         </p:spPr>
         <p:style>
@@ -5959,14 +6921,14 @@
       </p:sp>
       <p:sp>
         <p:nvSpPr>
-          <p:cNvPr id="8" name="TextBox 7"/>
+          <p:cNvPr id="9" name="TextBox 8"/>
           <p:cNvSpPr txBox="1"/>
           <p:nvPr/>
         </p:nvSpPr>
         <p:spPr>
           <a:xfrm>
-            <a:off x="914400" y="1920240"/>
-            <a:ext cx="2194560" cy="3931920"/>
+            <a:off x="6583680" y="1828800"/>
+            <a:ext cx="4572000" cy="4114800"/>
           </a:xfrm>
           <a:prstGeom prst="rect">
             <a:avLst/>
@@ -5980,14 +6942,14 @@
           <a:lstStyle/>
           <a:p>
             <a:pPr>
-              <a:defRPr sz="1600" b="1">
+              <a:defRPr sz="1700" b="1">
                 <a:solidFill>
                   <a:srgbClr val="10B981"/>
                 </a:solidFill>
               </a:defRPr>
             </a:pPr>
             <a:r>
-              <a:t>🟢 DISPONÍVEL</a:t>
+              <a:t>✓ SE 100% APROVADO NA INSPEÇÃO</a:t>
             </a:r>
           </a:p>
           <a:p>
@@ -5995,14 +6957,29 @@
               <a:spcBef>
                 <a:spcPts val="400"/>
               </a:spcBef>
-              <a:defRPr sz="1100" b="1">
-                <a:solidFill>
-                  <a:srgbClr val="FFFFFF"/>
+              <a:defRPr sz="1100">
+                <a:solidFill>
+                  <a:srgbClr val="94A3B8"/>
                 </a:solidFill>
               </a:defRPr>
             </a:pPr>
             <a:r>
-              <a:t>Pronto para Locação</a:t>
+              <a:t>Status da Frota passa automaticamente para:</a:t>
+            </a:r>
+          </a:p>
+          <a:p>
+            <a:pPr>
+              <a:spcBef>
+                <a:spcPts val="400"/>
+              </a:spcBef>
+              <a:defRPr sz="2000" b="1">
+                <a:solidFill>
+                  <a:srgbClr val="10B981"/>
+                </a:solidFill>
+              </a:defRPr>
+            </a:pPr>
+            <a:r>
+              <a:t>🟢 DISPONÍVEL NO PÁTIO</a:t>
             </a:r>
           </a:p>
           <a:p>
@@ -6010,473 +6987,26 @@
               <a:spcBef>
                 <a:spcPts val="1200"/>
               </a:spcBef>
-              <a:defRPr sz="1100">
-                <a:solidFill>
-                  <a:srgbClr val="CBD5E1"/>
+              <a:defRPr sz="1150">
+                <a:solidFill>
+                  <a:srgbClr val="E2E8F0"/>
                 </a:solidFill>
               </a:defRPr>
             </a:pPr>
             <a:r>
-              <a:t>Equipamento aprovado em inspeção técnica e liberado no pátio. É o único status que permite nova Reserva Comercial.</a:t>
-            </a:r>
-          </a:p>
-        </p:txBody>
-      </p:sp>
-      <p:sp>
-        <p:nvSpPr>
-          <p:cNvPr id="9" name="Rounded Rectangle 8"/>
-          <p:cNvSpPr/>
-          <p:nvPr/>
-        </p:nvSpPr>
-        <p:spPr>
-          <a:xfrm>
-            <a:off x="3456432" y="1645920"/>
-            <a:ext cx="2560320" cy="4389120"/>
-          </a:xfrm>
-          <a:prstGeom prst="roundRect">
-            <a:avLst/>
-          </a:prstGeom>
-          <a:solidFill>
-            <a:srgbClr val="1E232C"/>
-          </a:solidFill>
-          <a:ln w="15240">
-            <a:solidFill>
-              <a:srgbClr val="334155"/>
-            </a:solidFill>
-          </a:ln>
-        </p:spPr>
-        <p:style>
-          <a:lnRef idx="1">
-            <a:schemeClr val="accent1"/>
-          </a:lnRef>
-          <a:fillRef idx="3">
-            <a:schemeClr val="accent1"/>
-          </a:fillRef>
-          <a:effectRef idx="2">
-            <a:schemeClr val="accent1"/>
-          </a:effectRef>
-          <a:fontRef idx="minor">
-            <a:schemeClr val="lt1"/>
-          </a:fontRef>
-        </p:style>
-        <p:txBody>
-          <a:bodyPr rtlCol="0" anchor="ctr"/>
-          <a:lstStyle/>
-          <a:p>
-            <a:pPr algn="ctr"/>
-          </a:p>
-        </p:txBody>
-      </p:sp>
-      <p:sp>
-        <p:nvSpPr>
-          <p:cNvPr id="10" name="Rectangle 9"/>
-          <p:cNvSpPr/>
-          <p:nvPr/>
-        </p:nvSpPr>
-        <p:spPr>
-          <a:xfrm>
-            <a:off x="3456432" y="1645920"/>
-            <a:ext cx="2560320" cy="109728"/>
-          </a:xfrm>
-          <a:prstGeom prst="rect">
-            <a:avLst/>
-          </a:prstGeom>
-          <a:solidFill>
-            <a:srgbClr val="F59E0B"/>
-          </a:solidFill>
-          <a:ln>
-            <a:noFill/>
-          </a:ln>
-        </p:spPr>
-        <p:style>
-          <a:lnRef idx="1">
-            <a:schemeClr val="accent1"/>
-          </a:lnRef>
-          <a:fillRef idx="3">
-            <a:schemeClr val="accent1"/>
-          </a:fillRef>
-          <a:effectRef idx="2">
-            <a:schemeClr val="accent1"/>
-          </a:effectRef>
-          <a:fontRef idx="minor">
-            <a:schemeClr val="lt1"/>
-          </a:fontRef>
-        </p:style>
-        <p:txBody>
-          <a:bodyPr rtlCol="0" anchor="ctr"/>
-          <a:lstStyle/>
-          <a:p>
-            <a:pPr algn="ctr"/>
-          </a:p>
-        </p:txBody>
-      </p:sp>
-      <p:sp>
-        <p:nvSpPr>
-          <p:cNvPr id="11" name="TextBox 10"/>
-          <p:cNvSpPr txBox="1"/>
-          <p:nvPr/>
-        </p:nvSpPr>
-        <p:spPr>
-          <a:xfrm>
-            <a:off x="3639312" y="1920240"/>
-            <a:ext cx="2194560" cy="3931920"/>
-          </a:xfrm>
-          <a:prstGeom prst="rect">
-            <a:avLst/>
-          </a:prstGeom>
-          <a:noFill/>
-        </p:spPr>
-        <p:txBody>
-          <a:bodyPr wrap="square">
-            <a:spAutoFit/>
-          </a:bodyPr>
-          <a:lstStyle/>
-          <a:p>
-            <a:pPr>
-              <a:defRPr sz="1600" b="1">
-                <a:solidFill>
-                  <a:srgbClr val="F59E0B"/>
-                </a:solidFill>
-              </a:defRPr>
-            </a:pPr>
-            <a:r>
-              <a:t>🟡 RESERVADA</a:t>
-            </a:r>
-          </a:p>
-          <a:p>
-            <a:pPr>
-              <a:spcBef>
-                <a:spcPts val="400"/>
-              </a:spcBef>
-              <a:defRPr sz="1100" b="1">
-                <a:solidFill>
-                  <a:srgbClr val="FFFFFF"/>
-                </a:solidFill>
-              </a:defRPr>
-            </a:pPr>
-            <a:r>
-              <a:t>Acordo Comercial</a:t>
-            </a:r>
-          </a:p>
-          <a:p>
-            <a:pPr>
-              <a:spcBef>
-                <a:spcPts val="1200"/>
-              </a:spcBef>
-              <a:defRPr sz="1100">
-                <a:solidFill>
-                  <a:srgbClr val="CBD5E1"/>
-                </a:solidFill>
-              </a:defRPr>
-            </a:pPr>
-            <a:r>
-              <a:t>Reservado para cliente específico (ex: Vale, Usiminas). Exige nova vistoria técnica rigorosa antes da mobilização na obra.</a:t>
-            </a:r>
-          </a:p>
-        </p:txBody>
-      </p:sp>
-      <p:sp>
-        <p:nvSpPr>
-          <p:cNvPr id="12" name="Rounded Rectangle 11"/>
-          <p:cNvSpPr/>
-          <p:nvPr/>
-        </p:nvSpPr>
-        <p:spPr>
-          <a:xfrm>
-            <a:off x="6181344" y="1645920"/>
-            <a:ext cx="2560320" cy="4389120"/>
-          </a:xfrm>
-          <a:prstGeom prst="roundRect">
-            <a:avLst/>
-          </a:prstGeom>
-          <a:solidFill>
-            <a:srgbClr val="1E232C"/>
-          </a:solidFill>
-          <a:ln w="15240">
-            <a:solidFill>
-              <a:srgbClr val="334155"/>
-            </a:solidFill>
-          </a:ln>
-        </p:spPr>
-        <p:style>
-          <a:lnRef idx="1">
-            <a:schemeClr val="accent1"/>
-          </a:lnRef>
-          <a:fillRef idx="3">
-            <a:schemeClr val="accent1"/>
-          </a:fillRef>
-          <a:effectRef idx="2">
-            <a:schemeClr val="accent1"/>
-          </a:effectRef>
-          <a:fontRef idx="minor">
-            <a:schemeClr val="lt1"/>
-          </a:fontRef>
-        </p:style>
-        <p:txBody>
-          <a:bodyPr rtlCol="0" anchor="ctr"/>
-          <a:lstStyle/>
-          <a:p>
-            <a:pPr algn="ctr"/>
-          </a:p>
-        </p:txBody>
-      </p:sp>
-      <p:sp>
-        <p:nvSpPr>
-          <p:cNvPr id="13" name="Rectangle 12"/>
-          <p:cNvSpPr/>
-          <p:nvPr/>
-        </p:nvSpPr>
-        <p:spPr>
-          <a:xfrm>
-            <a:off x="6181344" y="1645920"/>
-            <a:ext cx="2560320" cy="109728"/>
-          </a:xfrm>
-          <a:prstGeom prst="rect">
-            <a:avLst/>
-          </a:prstGeom>
-          <a:solidFill>
-            <a:srgbClr val="38BDF8"/>
-          </a:solidFill>
-          <a:ln>
-            <a:noFill/>
-          </a:ln>
-        </p:spPr>
-        <p:style>
-          <a:lnRef idx="1">
-            <a:schemeClr val="accent1"/>
-          </a:lnRef>
-          <a:fillRef idx="3">
-            <a:schemeClr val="accent1"/>
-          </a:fillRef>
-          <a:effectRef idx="2">
-            <a:schemeClr val="accent1"/>
-          </a:effectRef>
-          <a:fontRef idx="minor">
-            <a:schemeClr val="lt1"/>
-          </a:fontRef>
-        </p:style>
-        <p:txBody>
-          <a:bodyPr rtlCol="0" anchor="ctr"/>
-          <a:lstStyle/>
-          <a:p>
-            <a:pPr algn="ctr"/>
-          </a:p>
-        </p:txBody>
-      </p:sp>
-      <p:sp>
-        <p:nvSpPr>
-          <p:cNvPr id="14" name="TextBox 13"/>
-          <p:cNvSpPr txBox="1"/>
-          <p:nvPr/>
-        </p:nvSpPr>
-        <p:spPr>
-          <a:xfrm>
-            <a:off x="6364224" y="1920240"/>
-            <a:ext cx="2194560" cy="3931920"/>
-          </a:xfrm>
-          <a:prstGeom prst="rect">
-            <a:avLst/>
-          </a:prstGeom>
-          <a:noFill/>
-        </p:spPr>
-        <p:txBody>
-          <a:bodyPr wrap="square">
-            <a:spAutoFit/>
-          </a:bodyPr>
-          <a:lstStyle/>
-          <a:p>
-            <a:pPr>
-              <a:defRPr sz="1600" b="1">
-                <a:solidFill>
-                  <a:srgbClr val="38BDF8"/>
-                </a:solidFill>
-              </a:defRPr>
-            </a:pPr>
-            <a:r>
-              <a:t>🔵 LOCADA</a:t>
-            </a:r>
-          </a:p>
-          <a:p>
-            <a:pPr>
-              <a:spcBef>
-                <a:spcPts val="400"/>
-              </a:spcBef>
-              <a:defRPr sz="1100" b="1">
-                <a:solidFill>
-                  <a:srgbClr val="FFFFFF"/>
-                </a:solidFill>
-              </a:defRPr>
-            </a:pPr>
-            <a:r>
-              <a:t>Em Operação no Cliente</a:t>
-            </a:r>
-          </a:p>
-          <a:p>
-            <a:pPr>
-              <a:spcBef>
-                <a:spcPts val="1200"/>
-              </a:spcBef>
-              <a:defRPr sz="1100">
-                <a:solidFill>
-                  <a:srgbClr val="CBD5E1"/>
-                </a:solidFill>
-              </a:defRPr>
-            </a:pPr>
-            <a:r>
-              <a:t>Ativo em operação no cliente. Pode passar por inspeções periódicas de campo para checagem contínua de segurança.</a:t>
-            </a:r>
-          </a:p>
-        </p:txBody>
-      </p:sp>
-      <p:sp>
-        <p:nvSpPr>
-          <p:cNvPr id="15" name="Rounded Rectangle 14"/>
-          <p:cNvSpPr/>
-          <p:nvPr/>
-        </p:nvSpPr>
-        <p:spPr>
-          <a:xfrm>
-            <a:off x="8906256" y="1645920"/>
-            <a:ext cx="2560320" cy="4389120"/>
-          </a:xfrm>
-          <a:prstGeom prst="roundRect">
-            <a:avLst/>
-          </a:prstGeom>
-          <a:solidFill>
-            <a:srgbClr val="1E232C"/>
-          </a:solidFill>
-          <a:ln w="15240">
-            <a:solidFill>
-              <a:srgbClr val="334155"/>
-            </a:solidFill>
-          </a:ln>
-        </p:spPr>
-        <p:style>
-          <a:lnRef idx="1">
-            <a:schemeClr val="accent1"/>
-          </a:lnRef>
-          <a:fillRef idx="3">
-            <a:schemeClr val="accent1"/>
-          </a:fillRef>
-          <a:effectRef idx="2">
-            <a:schemeClr val="accent1"/>
-          </a:effectRef>
-          <a:fontRef idx="minor">
-            <a:schemeClr val="lt1"/>
-          </a:fontRef>
-        </p:style>
-        <p:txBody>
-          <a:bodyPr rtlCol="0" anchor="ctr"/>
-          <a:lstStyle/>
-          <a:p>
-            <a:pPr algn="ctr"/>
-          </a:p>
-        </p:txBody>
-      </p:sp>
-      <p:sp>
-        <p:nvSpPr>
-          <p:cNvPr id="16" name="Rectangle 15"/>
-          <p:cNvSpPr/>
-          <p:nvPr/>
-        </p:nvSpPr>
-        <p:spPr>
-          <a:xfrm>
-            <a:off x="8906256" y="1645920"/>
-            <a:ext cx="2560320" cy="109728"/>
-          </a:xfrm>
-          <a:prstGeom prst="rect">
-            <a:avLst/>
-          </a:prstGeom>
-          <a:solidFill>
-            <a:srgbClr val="EF4444"/>
-          </a:solidFill>
-          <a:ln>
-            <a:noFill/>
-          </a:ln>
-        </p:spPr>
-        <p:style>
-          <a:lnRef idx="1">
-            <a:schemeClr val="accent1"/>
-          </a:lnRef>
-          <a:fillRef idx="3">
-            <a:schemeClr val="accent1"/>
-          </a:fillRef>
-          <a:effectRef idx="2">
-            <a:schemeClr val="accent1"/>
-          </a:effectRef>
-          <a:fontRef idx="minor">
-            <a:schemeClr val="lt1"/>
-          </a:fontRef>
-        </p:style>
-        <p:txBody>
-          <a:bodyPr rtlCol="0" anchor="ctr"/>
-          <a:lstStyle/>
-          <a:p>
-            <a:pPr algn="ctr"/>
-          </a:p>
-        </p:txBody>
-      </p:sp>
-      <p:sp>
-        <p:nvSpPr>
-          <p:cNvPr id="17" name="TextBox 16"/>
-          <p:cNvSpPr txBox="1"/>
-          <p:nvPr/>
-        </p:nvSpPr>
-        <p:spPr>
-          <a:xfrm>
-            <a:off x="9089136" y="1920240"/>
-            <a:ext cx="2194560" cy="3931920"/>
-          </a:xfrm>
-          <a:prstGeom prst="rect">
-            <a:avLst/>
-          </a:prstGeom>
-          <a:noFill/>
-        </p:spPr>
-        <p:txBody>
-          <a:bodyPr wrap="square">
-            <a:spAutoFit/>
-          </a:bodyPr>
-          <a:lstStyle/>
-          <a:p>
-            <a:pPr>
-              <a:defRPr sz="1600" b="1">
-                <a:solidFill>
-                  <a:srgbClr val="EF4444"/>
-                </a:solidFill>
-              </a:defRPr>
-            </a:pPr>
-            <a:r>
-              <a:t>🟠 MANUTENÇÃO</a:t>
-            </a:r>
-          </a:p>
-          <a:p>
-            <a:pPr>
-              <a:spcBef>
-                <a:spcPts val="400"/>
-              </a:spcBef>
-              <a:defRPr sz="1100" b="1">
-                <a:solidFill>
-                  <a:srgbClr val="FFFFFF"/>
-                </a:solidFill>
-              </a:defRPr>
-            </a:pPr>
-            <a:r>
-              <a:t>Retido na Oficina (PCM)</a:t>
-            </a:r>
-          </a:p>
-          <a:p>
-            <a:pPr>
-              <a:spcBef>
-                <a:spcPts val="1200"/>
-              </a:spcBef>
-              <a:defRPr sz="1100">
-                <a:solidFill>
-                  <a:srgbClr val="CBD5E1"/>
-                </a:solidFill>
-              </a:defRPr>
-            </a:pPr>
-            <a:r>
-              <a:t>Ativo reprovado em inspeção ou aguardando reparos pelo PCM. Retorna a 'DISPONÍVEL' somente após concluir reparos e nova aprovação.</a:t>
+              <a:t>• Liberação Comercial: Equipamento apto para nova locação no pátio.</a:t>
+            </a:r>
+            <a:br/>
+            <a:r>
+              <a:t>• Limpeza de Pendências: Reserva antiga e dados transitórios são liberados.</a:t>
+            </a:r>
+            <a:br/>
+            <a:r>
+              <a:t>• Baixa Técnica no PCM: Qualquer S.S. que estava em aberto é concluída no sistema com o laudo de aprovação.</a:t>
+            </a:r>
+            <a:br/>
+            <a:r>
+              <a:t>• Laudo Liberado: Emissão do laudo com selo verde, QR Code e Hash SHA-256.</a:t>
             </a:r>
           </a:p>
         </p:txBody>
@@ -6551,7 +7081,7 @@
         <p:spPr>
           <a:xfrm>
             <a:off x="0" y="0"/>
-            <a:ext cx="12191695" cy="73152"/>
+            <a:ext cx="12191695" cy="82296"/>
           </a:xfrm>
           <a:prstGeom prst="rect">
             <a:avLst/>
@@ -6593,7 +7123,7 @@
         </p:nvSpPr>
         <p:spPr>
           <a:xfrm>
-            <a:off x="731520" y="320040"/>
+            <a:off x="731520" y="292608"/>
             <a:ext cx="8686800" cy="1005840"/>
           </a:xfrm>
           <a:prstGeom prst="rect">
@@ -6616,13 +7146,13 @@
               </a:defRPr>
             </a:pPr>
             <a:r>
-              <a:t>METODOLOGIA DE VISTORIA NORMATIVA</a:t>
+              <a:t>PAINEL GERENCIAL DA FILIAL BETIM / MG</a:t>
             </a:r>
           </a:p>
           <a:p>
             <a:pPr>
               <a:spcBef>
-                <a:spcPts val="400"/>
+                <a:spcPts val="300"/>
               </a:spcBef>
               <a:defRPr sz="2200" b="1">
                 <a:solidFill>
@@ -6632,7 +7162,7 @@
               </a:defRPr>
             </a:pPr>
             <a:r>
-              <a:t>5. O Passo a Passo da Inspeção Técnica</a:t>
+              <a:t>5. Gestão de Frota &amp; Métricas CMMS Engeman®</a:t>
             </a:r>
           </a:p>
         </p:txBody>
@@ -6653,7 +7183,7 @@
         </p:blipFill>
         <p:spPr>
           <a:xfrm>
-            <a:off x="9875520" y="320040"/>
+            <a:off x="9875520" y="274320"/>
             <a:ext cx="1645920" cy="660994"/>
           </a:xfrm>
           <a:prstGeom prst="rect">
@@ -6661,16 +7191,40 @@
           </a:prstGeom>
         </p:spPr>
       </p:pic>
-      <p:sp>
-        <p:nvSpPr>
-          <p:cNvPr id="6" name="Rounded Rectangle 5"/>
+      <p:pic>
+        <p:nvPicPr>
+          <p:cNvPr id="6" name="Picture 5" descr="screen_dashboard.png"/>
+          <p:cNvPicPr>
+            <a:picLocks noChangeAspect="1"/>
+          </p:cNvPicPr>
+          <p:nvPr/>
+        </p:nvPicPr>
+        <p:blipFill>
+          <a:blip r:embed="rId3"/>
+          <a:stretch>
+            <a:fillRect/>
+          </a:stretch>
+        </p:blipFill>
+        <p:spPr>
+          <a:xfrm>
+            <a:off x="731520" y="1645920"/>
+            <a:ext cx="5852160" cy="3291840"/>
+          </a:xfrm>
+          <a:prstGeom prst="rect">
+            <a:avLst/>
+          </a:prstGeom>
+        </p:spPr>
+      </p:pic>
+      <p:sp>
+        <p:nvSpPr>
+          <p:cNvPr id="7" name="Rounded Rectangle 6"/>
           <p:cNvSpPr/>
           <p:nvPr/>
         </p:nvSpPr>
         <p:spPr>
           <a:xfrm>
-            <a:off x="731520" y="1645920"/>
-            <a:ext cx="2560320" cy="4389120"/>
+            <a:off x="6766560" y="1645920"/>
+            <a:ext cx="4663440" cy="4480560"/>
           </a:xfrm>
           <a:prstGeom prst="roundRect">
             <a:avLst/>
@@ -6680,7 +7234,7 @@
           </a:solidFill>
           <a:ln w="15240">
             <a:solidFill>
-              <a:srgbClr val="334155"/>
+              <a:srgbClr val="3C4858"/>
             </a:solidFill>
           </a:ln>
         </p:spPr>
@@ -6708,14 +7262,14 @@
       </p:sp>
       <p:sp>
         <p:nvSpPr>
-          <p:cNvPr id="7" name="TextBox 6"/>
+          <p:cNvPr id="8" name="TextBox 7"/>
           <p:cNvSpPr txBox="1"/>
           <p:nvPr/>
         </p:nvSpPr>
         <p:spPr>
           <a:xfrm>
-            <a:off x="914400" y="1920240"/>
-            <a:ext cx="2194560" cy="3931920"/>
+            <a:off x="6995160" y="1828800"/>
+            <a:ext cx="4206240" cy="4114800"/>
           </a:xfrm>
           <a:prstGeom prst="rect">
             <a:avLst/>
@@ -6729,374 +7283,64 @@
           <a:lstStyle/>
           <a:p>
             <a:pPr>
-              <a:defRPr sz="1100" b="1">
+              <a:defRPr sz="1700" b="1">
                 <a:solidFill>
                   <a:srgbClr val="F59E0B"/>
                 </a:solidFill>
               </a:defRPr>
             </a:pPr>
             <a:r>
-              <a:t>ETAPA 1</a:t>
+              <a:t>Indicadores em Tempo Real</a:t>
             </a:r>
           </a:p>
           <a:p>
             <a:pPr>
               <a:spcBef>
-                <a:spcPts val="400"/>
+                <a:spcPts val="1000"/>
               </a:spcBef>
-              <a:defRPr sz="1500" b="1">
-                <a:solidFill>
-                  <a:srgbClr val="FFFFFF"/>
+              <a:defRPr sz="1150">
+                <a:solidFill>
+                  <a:srgbClr val="E2E8F0"/>
                 </a:solidFill>
               </a:defRPr>
             </a:pPr>
             <a:r>
-              <a:t>Abertura &amp; Identificação</a:t>
-            </a:r>
-          </a:p>
-          <a:p>
-            <a:pPr>
-              <a:spcBef>
-                <a:spcPts val="1200"/>
-              </a:spcBef>
-              <a:defRPr sz="1100">
-                <a:solidFill>
-                  <a:srgbClr val="CBD5E1"/>
-                </a:solidFill>
-              </a:defRPr>
-            </a:pPr>
-            <a:r>
-              <a:t>Seleção do equipamento pela TAG, registro da matrícula e telefone do inspetor, turno de trabalho, horímetro atual e destinação comercial (Client Tier).</a:t>
-            </a:r>
-          </a:p>
-        </p:txBody>
-      </p:sp>
-      <p:sp>
-        <p:nvSpPr>
-          <p:cNvPr id="8" name="Rounded Rectangle 7"/>
-          <p:cNvSpPr/>
-          <p:nvPr/>
-        </p:nvSpPr>
-        <p:spPr>
-          <a:xfrm>
-            <a:off x="3456432" y="1645920"/>
-            <a:ext cx="2560320" cy="4389120"/>
-          </a:xfrm>
-          <a:prstGeom prst="roundRect">
-            <a:avLst/>
-          </a:prstGeom>
-          <a:solidFill>
-            <a:srgbClr val="1E232C"/>
-          </a:solidFill>
-          <a:ln w="15240">
-            <a:solidFill>
-              <a:srgbClr val="334155"/>
-            </a:solidFill>
-          </a:ln>
-        </p:spPr>
-        <p:style>
-          <a:lnRef idx="1">
-            <a:schemeClr val="accent1"/>
-          </a:lnRef>
-          <a:fillRef idx="3">
-            <a:schemeClr val="accent1"/>
-          </a:fillRef>
-          <a:effectRef idx="2">
-            <a:schemeClr val="accent1"/>
-          </a:effectRef>
-          <a:fontRef idx="minor">
-            <a:schemeClr val="lt1"/>
-          </a:fontRef>
-        </p:style>
-        <p:txBody>
-          <a:bodyPr rtlCol="0" anchor="ctr"/>
-          <a:lstStyle/>
-          <a:p>
-            <a:pPr algn="ctr"/>
-          </a:p>
-        </p:txBody>
-      </p:sp>
-      <p:sp>
-        <p:nvSpPr>
-          <p:cNvPr id="9" name="TextBox 8"/>
-          <p:cNvSpPr txBox="1"/>
-          <p:nvPr/>
-        </p:nvSpPr>
-        <p:spPr>
-          <a:xfrm>
-            <a:off x="3639312" y="1920240"/>
-            <a:ext cx="2194560" cy="3931920"/>
-          </a:xfrm>
-          <a:prstGeom prst="rect">
-            <a:avLst/>
-          </a:prstGeom>
-          <a:noFill/>
-        </p:spPr>
-        <p:txBody>
-          <a:bodyPr wrap="square">
-            <a:spAutoFit/>
-          </a:bodyPr>
-          <a:lstStyle/>
-          <a:p>
-            <a:pPr>
-              <a:defRPr sz="1100" b="1">
-                <a:solidFill>
-                  <a:srgbClr val="F59E0B"/>
-                </a:solidFill>
-              </a:defRPr>
-            </a:pPr>
-            <a:r>
-              <a:t>ETAPA 2</a:t>
-            </a:r>
-          </a:p>
-          <a:p>
-            <a:pPr>
-              <a:spcBef>
-                <a:spcPts val="400"/>
-              </a:spcBef>
-              <a:defRPr sz="1500" b="1">
-                <a:solidFill>
-                  <a:srgbClr val="FFFFFF"/>
-                </a:solidFill>
-              </a:defRPr>
-            </a:pPr>
-            <a:r>
-              <a:t>Checklist Normativo</a:t>
-            </a:r>
-          </a:p>
-          <a:p>
-            <a:pPr>
-              <a:spcBef>
-                <a:spcPts val="1200"/>
-              </a:spcBef>
-              <a:defRPr sz="1100">
-                <a:solidFill>
-                  <a:srgbClr val="CBD5E1"/>
-                </a:solidFill>
-              </a:defRPr>
-            </a:pPr>
-            <a:r>
-              <a:t>Inspeção visual e funcional setorizada (Externa, Operacional, Segurança, Mecânica/Hidráulica). Cada item deve ser checado obrigatoriamente como Conforme ou Não Conforme.</a:t>
-            </a:r>
-          </a:p>
-        </p:txBody>
-      </p:sp>
-      <p:sp>
-        <p:nvSpPr>
-          <p:cNvPr id="10" name="Rounded Rectangle 9"/>
-          <p:cNvSpPr/>
-          <p:nvPr/>
-        </p:nvSpPr>
-        <p:spPr>
-          <a:xfrm>
-            <a:off x="6181344" y="1645920"/>
-            <a:ext cx="2560320" cy="4389120"/>
-          </a:xfrm>
-          <a:prstGeom prst="roundRect">
-            <a:avLst/>
-          </a:prstGeom>
-          <a:solidFill>
-            <a:srgbClr val="1E232C"/>
-          </a:solidFill>
-          <a:ln w="15240">
-            <a:solidFill>
-              <a:srgbClr val="334155"/>
-            </a:solidFill>
-          </a:ln>
-        </p:spPr>
-        <p:style>
-          <a:lnRef idx="1">
-            <a:schemeClr val="accent1"/>
-          </a:lnRef>
-          <a:fillRef idx="3">
-            <a:schemeClr val="accent1"/>
-          </a:fillRef>
-          <a:effectRef idx="2">
-            <a:schemeClr val="accent1"/>
-          </a:effectRef>
-          <a:fontRef idx="minor">
-            <a:schemeClr val="lt1"/>
-          </a:fontRef>
-        </p:style>
-        <p:txBody>
-          <a:bodyPr rtlCol="0" anchor="ctr"/>
-          <a:lstStyle/>
-          <a:p>
-            <a:pPr algn="ctr"/>
-          </a:p>
-        </p:txBody>
-      </p:sp>
-      <p:sp>
-        <p:nvSpPr>
-          <p:cNvPr id="11" name="TextBox 10"/>
-          <p:cNvSpPr txBox="1"/>
-          <p:nvPr/>
-        </p:nvSpPr>
-        <p:spPr>
-          <a:xfrm>
-            <a:off x="6364224" y="1920240"/>
-            <a:ext cx="2194560" cy="3931920"/>
-          </a:xfrm>
-          <a:prstGeom prst="rect">
-            <a:avLst/>
-          </a:prstGeom>
-          <a:noFill/>
-        </p:spPr>
-        <p:txBody>
-          <a:bodyPr wrap="square">
-            <a:spAutoFit/>
-          </a:bodyPr>
-          <a:lstStyle/>
-          <a:p>
-            <a:pPr>
-              <a:defRPr sz="1100" b="1">
-                <a:solidFill>
-                  <a:srgbClr val="F59E0B"/>
-                </a:solidFill>
-              </a:defRPr>
-            </a:pPr>
-            <a:r>
-              <a:t>ETAPA 3</a:t>
-            </a:r>
-          </a:p>
-          <a:p>
-            <a:pPr>
-              <a:spcBef>
-                <a:spcPts val="400"/>
-              </a:spcBef>
-              <a:defRPr sz="1500" b="1">
-                <a:solidFill>
-                  <a:srgbClr val="FFFFFF"/>
-                </a:solidFill>
-              </a:defRPr>
-            </a:pPr>
-            <a:r>
-              <a:t>Evidência &amp; Auditoria IA</a:t>
-            </a:r>
-          </a:p>
-          <a:p>
-            <a:pPr>
-              <a:spcBef>
-                <a:spcPts val="1200"/>
-              </a:spcBef>
-              <a:defRPr sz="1100">
-                <a:solidFill>
-                  <a:srgbClr val="CBD5E1"/>
-                </a:solidFill>
-              </a:defRPr>
-            </a:pPr>
-            <a:r>
-              <a:t>Para itens reprovados, captura de foto obrigatória com carimbo de TAG, data e hora. A IA Copilot analisa a foto e categoriza a gravidade segundo as NRs vigentes.</a:t>
-            </a:r>
-          </a:p>
-        </p:txBody>
-      </p:sp>
-      <p:sp>
-        <p:nvSpPr>
-          <p:cNvPr id="12" name="Rounded Rectangle 11"/>
-          <p:cNvSpPr/>
-          <p:nvPr/>
-        </p:nvSpPr>
-        <p:spPr>
-          <a:xfrm>
-            <a:off x="8906256" y="1645920"/>
-            <a:ext cx="2560320" cy="4389120"/>
-          </a:xfrm>
-          <a:prstGeom prst="roundRect">
-            <a:avLst/>
-          </a:prstGeom>
-          <a:solidFill>
-            <a:srgbClr val="1E232C"/>
-          </a:solidFill>
-          <a:ln w="15240">
-            <a:solidFill>
-              <a:srgbClr val="334155"/>
-            </a:solidFill>
-          </a:ln>
-        </p:spPr>
-        <p:style>
-          <a:lnRef idx="1">
-            <a:schemeClr val="accent1"/>
-          </a:lnRef>
-          <a:fillRef idx="3">
-            <a:schemeClr val="accent1"/>
-          </a:fillRef>
-          <a:effectRef idx="2">
-            <a:schemeClr val="accent1"/>
-          </a:effectRef>
-          <a:fontRef idx="minor">
-            <a:schemeClr val="lt1"/>
-          </a:fontRef>
-        </p:style>
-        <p:txBody>
-          <a:bodyPr rtlCol="0" anchor="ctr"/>
-          <a:lstStyle/>
-          <a:p>
-            <a:pPr algn="ctr"/>
-          </a:p>
-        </p:txBody>
-      </p:sp>
-      <p:sp>
-        <p:nvSpPr>
-          <p:cNvPr id="13" name="TextBox 12"/>
-          <p:cNvSpPr txBox="1"/>
-          <p:nvPr/>
-        </p:nvSpPr>
-        <p:spPr>
-          <a:xfrm>
-            <a:off x="9089136" y="1920240"/>
-            <a:ext cx="2194560" cy="3931920"/>
-          </a:xfrm>
-          <a:prstGeom prst="rect">
-            <a:avLst/>
-          </a:prstGeom>
-          <a:noFill/>
-        </p:spPr>
-        <p:txBody>
-          <a:bodyPr wrap="square">
-            <a:spAutoFit/>
-          </a:bodyPr>
-          <a:lstStyle/>
-          <a:p>
-            <a:pPr>
-              <a:defRPr sz="1100" b="1">
-                <a:solidFill>
-                  <a:srgbClr val="F59E0B"/>
-                </a:solidFill>
-              </a:defRPr>
-            </a:pPr>
-            <a:r>
-              <a:t>ETAPA 4</a:t>
-            </a:r>
-          </a:p>
-          <a:p>
-            <a:pPr>
-              <a:spcBef>
-                <a:spcPts val="400"/>
-              </a:spcBef>
-              <a:defRPr sz="1500" b="1">
-                <a:solidFill>
-                  <a:srgbClr val="FFFFFF"/>
-                </a:solidFill>
-              </a:defRPr>
-            </a:pPr>
-            <a:r>
-              <a:t>Assinatura &amp; Emissão</a:t>
-            </a:r>
-          </a:p>
-          <a:p>
-            <a:pPr>
-              <a:spcBef>
-                <a:spcPts val="1200"/>
-              </a:spcBef>
-              <a:defRPr sz="1100">
-                <a:solidFill>
-                  <a:srgbClr val="CBD5E1"/>
-                </a:solidFill>
-              </a:defRPr>
-            </a:pPr>
-            <a:r>
-              <a:t>Parecer técnico do inspetor e assinatura digital obrigatória no Canvas. Cálculo do Hash SHA-256 e emissão do Laudo com atualização imediata do status da frota.</a:t>
+              <a:t>• 273 Ativos Cadastrados:</a:t>
+            </a:r>
+            <a:br/>
+            <a:r>
+              <a:t>  - Divisão PTA: 245 plataformas elevatórias (Genie, JLG, Haulotte).</a:t>
+            </a:r>
+            <a:br/>
+            <a:r>
+              <a:t>  - Divisão Guindastes: 29 ativos (Liebherr, Grove, Muncks, Empilhadeiras).</a:t>
+            </a:r>
+            <a:br/>
+            <a:br/>
+            <a:r>
+              <a:t>• Filtros Instantâneos de Status:</a:t>
+            </a:r>
+            <a:br/>
+            <a:r>
+              <a:t>  Disponíveis, Reservadas, Locadas e Em Manutenção.</a:t>
+            </a:r>
+            <a:br/>
+            <a:br/>
+            <a:r>
+              <a:t>• Alerta de Manutenção Preventiva:</a:t>
+            </a:r>
+            <a:br/>
+            <a:r>
+              <a:t>  Identifica automaticamente horímetros próximos do ciclo de 250h/500h com badge de preventiva.</a:t>
+            </a:r>
+            <a:br/>
+            <a:br/>
+            <a:r>
+              <a:t>• Exportação de Relatórios CSV:</a:t>
+            </a:r>
+            <a:br/>
+            <a:r>
+              <a:t>  Planilhas formatadas para gestão e auditoria gerencial.</a:t>
             </a:r>
           </a:p>
         </p:txBody>
@@ -7171,7 +7415,7 @@
         <p:spPr>
           <a:xfrm>
             <a:off x="0" y="0"/>
-            <a:ext cx="12191695" cy="73152"/>
+            <a:ext cx="12191695" cy="82296"/>
           </a:xfrm>
           <a:prstGeom prst="rect">
             <a:avLst/>
@@ -7213,7 +7457,7 @@
         </p:nvSpPr>
         <p:spPr>
           <a:xfrm>
-            <a:off x="731520" y="320040"/>
+            <a:off x="731520" y="292608"/>
             <a:ext cx="8686800" cy="1005840"/>
           </a:xfrm>
           <a:prstGeom prst="rect">
@@ -7236,13 +7480,13 @@
               </a:defRPr>
             </a:pPr>
             <a:r>
-              <a:t>PLANEJAMENTO E CONTROLE DE MANUTENÇÃO</a:t>
+              <a:t>STEPPER GUIADO COM EVIDÊNCIAS E ASSINATURA TOUCH</a:t>
             </a:r>
           </a:p>
           <a:p>
             <a:pPr>
               <a:spcBef>
-                <a:spcPts val="400"/>
+                <a:spcPts val="300"/>
               </a:spcBef>
               <a:defRPr sz="2200" b="1">
                 <a:solidFill>
@@ -7252,7 +7496,7 @@
               </a:defRPr>
             </a:pPr>
             <a:r>
-              <a:t>6. Central de Atendimento e Fluxo PCM</a:t>
+              <a:t>6. O Processo de Inspeção Técnica no Pátio</a:t>
             </a:r>
           </a:p>
         </p:txBody>
@@ -7273,7 +7517,7 @@
         </p:blipFill>
         <p:spPr>
           <a:xfrm>
-            <a:off x="9875520" y="320040"/>
+            <a:off x="9875520" y="274320"/>
             <a:ext cx="1645920" cy="660994"/>
           </a:xfrm>
           <a:prstGeom prst="rect">
@@ -7281,16 +7525,40 @@
           </a:prstGeom>
         </p:spPr>
       </p:pic>
-      <p:sp>
-        <p:nvSpPr>
-          <p:cNvPr id="6" name="Rounded Rectangle 5"/>
+      <p:pic>
+        <p:nvPicPr>
+          <p:cNvPr id="6" name="Picture 5" descr="screen_inspecao.png"/>
+          <p:cNvPicPr>
+            <a:picLocks noChangeAspect="1"/>
+          </p:cNvPicPr>
+          <p:nvPr/>
+        </p:nvPicPr>
+        <p:blipFill>
+          <a:blip r:embed="rId3"/>
+          <a:stretch>
+            <a:fillRect/>
+          </a:stretch>
+        </p:blipFill>
+        <p:spPr>
+          <a:xfrm>
+            <a:off x="731520" y="1645920"/>
+            <a:ext cx="5852160" cy="3291840"/>
+          </a:xfrm>
+          <a:prstGeom prst="rect">
+            <a:avLst/>
+          </a:prstGeom>
+        </p:spPr>
+      </p:pic>
+      <p:sp>
+        <p:nvSpPr>
+          <p:cNvPr id="7" name="Rounded Rectangle 6"/>
           <p:cNvSpPr/>
           <p:nvPr/>
         </p:nvSpPr>
         <p:spPr>
           <a:xfrm>
-            <a:off x="731520" y="1645920"/>
-            <a:ext cx="3383280" cy="4389120"/>
+            <a:off x="6766560" y="1645920"/>
+            <a:ext cx="4663440" cy="4480560"/>
           </a:xfrm>
           <a:prstGeom prst="roundRect">
             <a:avLst/>
@@ -7300,7 +7568,7 @@
           </a:solidFill>
           <a:ln w="15240">
             <a:solidFill>
-              <a:srgbClr val="334155"/>
+              <a:srgbClr val="3C4858"/>
             </a:solidFill>
           </a:ln>
         </p:spPr>
@@ -7328,14 +7596,14 @@
       </p:sp>
       <p:sp>
         <p:nvSpPr>
-          <p:cNvPr id="7" name="TextBox 6"/>
+          <p:cNvPr id="8" name="TextBox 7"/>
           <p:cNvSpPr txBox="1"/>
           <p:nvPr/>
         </p:nvSpPr>
         <p:spPr>
           <a:xfrm>
-            <a:off x="914400" y="1828800"/>
-            <a:ext cx="3017520" cy="4023360"/>
+            <a:off x="6995160" y="1828800"/>
+            <a:ext cx="4206240" cy="4114800"/>
           </a:xfrm>
           <a:prstGeom prst="rect">
             <a:avLst/>
@@ -7349,14 +7617,14 @@
           <a:lstStyle/>
           <a:p>
             <a:pPr>
-              <a:defRPr sz="1600" b="1">
+              <a:defRPr sz="1700" b="1">
                 <a:solidFill>
                   <a:srgbClr val="F59E0B"/>
                 </a:solidFill>
               </a:defRPr>
             </a:pPr>
             <a:r>
-              <a:t>1. Geração da S.S.</a:t>
+              <a:t>Rigor do Checklist Normativo</a:t>
             </a:r>
           </a:p>
           <a:p>
@@ -7366,237 +7634,43 @@
               </a:spcBef>
               <a:defRPr sz="1150">
                 <a:solidFill>
-                  <a:srgbClr val="CBD5E1"/>
+                  <a:srgbClr val="E2E8F0"/>
                 </a:solidFill>
               </a:defRPr>
             </a:pPr>
             <a:r>
-              <a:t>• Cada reprovação gera uma S.S. única numerada (ex: SS-PCM-BETIM-2026-003).</a:t>
+              <a:t>1. Identificação Completa:</a:t>
+            </a:r>
+            <a:br/>
+            <a:r>
+              <a:t>Matrícula do inspetor, telefone, turno e horímetro atual.</a:t>
             </a:r>
             <a:br/>
             <a:br/>
             <a:r>
-              <a:t>• Todas as não conformidades apontadas pelo inspetor são consolidadas em lista com fotos e normas violadas.</a:t>
+              <a:t>2. Vistoria Setorizada:</a:t>
+            </a:r>
+            <a:br/>
+            <a:r>
+              <a:t>Itens divididos por Estrutura Externa, Operação, Dispositivos de Emergência e Mecânica/Hidráulica.</a:t>
             </a:r>
             <a:br/>
             <a:br/>
             <a:r>
-              <a:t>• Prioridade de atendimento classificada de acordo com a criticidade operacional.</a:t>
-            </a:r>
-          </a:p>
-        </p:txBody>
-      </p:sp>
-      <p:sp>
-        <p:nvSpPr>
-          <p:cNvPr id="8" name="Rounded Rectangle 7"/>
-          <p:cNvSpPr/>
-          <p:nvPr/>
-        </p:nvSpPr>
-        <p:spPr>
-          <a:xfrm>
-            <a:off x="4389120" y="1645920"/>
-            <a:ext cx="3383280" cy="4389120"/>
-          </a:xfrm>
-          <a:prstGeom prst="roundRect">
-            <a:avLst/>
-          </a:prstGeom>
-          <a:solidFill>
-            <a:srgbClr val="1E232C"/>
-          </a:solidFill>
-          <a:ln w="15240">
-            <a:solidFill>
-              <a:srgbClr val="334155"/>
-            </a:solidFill>
-          </a:ln>
-        </p:spPr>
-        <p:style>
-          <a:lnRef idx="1">
-            <a:schemeClr val="accent1"/>
-          </a:lnRef>
-          <a:fillRef idx="3">
-            <a:schemeClr val="accent1"/>
-          </a:fillRef>
-          <a:effectRef idx="2">
-            <a:schemeClr val="accent1"/>
-          </a:effectRef>
-          <a:fontRef idx="minor">
-            <a:schemeClr val="lt1"/>
-          </a:fontRef>
-        </p:style>
-        <p:txBody>
-          <a:bodyPr rtlCol="0" anchor="ctr"/>
-          <a:lstStyle/>
-          <a:p>
-            <a:pPr algn="ctr"/>
-          </a:p>
-        </p:txBody>
-      </p:sp>
-      <p:sp>
-        <p:nvSpPr>
-          <p:cNvPr id="9" name="TextBox 8"/>
-          <p:cNvSpPr txBox="1"/>
-          <p:nvPr/>
-        </p:nvSpPr>
-        <p:spPr>
-          <a:xfrm>
-            <a:off x="4572000" y="1828800"/>
-            <a:ext cx="3017520" cy="4023360"/>
-          </a:xfrm>
-          <a:prstGeom prst="rect">
-            <a:avLst/>
-          </a:prstGeom>
-          <a:noFill/>
-        </p:spPr>
-        <p:txBody>
-          <a:bodyPr wrap="square">
-            <a:spAutoFit/>
-          </a:bodyPr>
-          <a:lstStyle/>
-          <a:p>
-            <a:pPr>
-              <a:defRPr sz="1600" b="1">
-                <a:solidFill>
-                  <a:srgbClr val="38BDF8"/>
-                </a:solidFill>
-              </a:defRPr>
-            </a:pPr>
-            <a:r>
-              <a:t>2. Disparo Automático</a:t>
-            </a:r>
-          </a:p>
-          <a:p>
-            <a:pPr>
-              <a:spcBef>
-                <a:spcPts val="1000"/>
-              </a:spcBef>
-              <a:defRPr sz="1150">
-                <a:solidFill>
-                  <a:srgbClr val="CBD5E1"/>
-                </a:solidFill>
-              </a:defRPr>
-            </a:pPr>
-            <a:r>
-              <a:t>• E-mail Corporativo: Mensagem estruturada em HTML enviada para pcm.betim@locar.com.br.</a:t>
+              <a:t>3. Foto Forense Obrigatória:</a:t>
+            </a:r>
+            <a:br/>
+            <a:r>
+              <a:t>Qualquer item marcado como Não Conforme exige captura de foto com carimbo de TAG, data e hora.</a:t>
             </a:r>
             <a:br/>
             <a:br/>
             <a:r>
-              <a:t>• Despacho WhatsApp: Botão rápido com link direto para o WhatsApp do gestor do PCM com resumo da avaria.</a:t>
+              <a:t>4. Assinatura Digital Touch no Canvas:</a:t>
             </a:r>
             <a:br/>
-            <a:br/>
-            <a:r>
-              <a:t>• Cliente de E-mail: Compatibilidade nativa para envio via Outlook ou Gmail em 1 clique.</a:t>
-            </a:r>
-          </a:p>
-        </p:txBody>
-      </p:sp>
-      <p:sp>
-        <p:nvSpPr>
-          <p:cNvPr id="10" name="Rounded Rectangle 9"/>
-          <p:cNvSpPr/>
-          <p:nvPr/>
-        </p:nvSpPr>
-        <p:spPr>
-          <a:xfrm>
-            <a:off x="8046720" y="1645920"/>
-            <a:ext cx="3383280" cy="4389120"/>
-          </a:xfrm>
-          <a:prstGeom prst="roundRect">
-            <a:avLst/>
-          </a:prstGeom>
-          <a:solidFill>
-            <a:srgbClr val="1E232C"/>
-          </a:solidFill>
-          <a:ln w="15240">
-            <a:solidFill>
-              <a:srgbClr val="334155"/>
-            </a:solidFill>
-          </a:ln>
-        </p:spPr>
-        <p:style>
-          <a:lnRef idx="1">
-            <a:schemeClr val="accent1"/>
-          </a:lnRef>
-          <a:fillRef idx="3">
-            <a:schemeClr val="accent1"/>
-          </a:fillRef>
-          <a:effectRef idx="2">
-            <a:schemeClr val="accent1"/>
-          </a:effectRef>
-          <a:fontRef idx="minor">
-            <a:schemeClr val="lt1"/>
-          </a:fontRef>
-        </p:style>
-        <p:txBody>
-          <a:bodyPr rtlCol="0" anchor="ctr"/>
-          <a:lstStyle/>
-          <a:p>
-            <a:pPr algn="ctr"/>
-          </a:p>
-        </p:txBody>
-      </p:sp>
-      <p:sp>
-        <p:nvSpPr>
-          <p:cNvPr id="11" name="TextBox 10"/>
-          <p:cNvSpPr txBox="1"/>
-          <p:nvPr/>
-        </p:nvSpPr>
-        <p:spPr>
-          <a:xfrm>
-            <a:off x="8229600" y="1828800"/>
-            <a:ext cx="3017520" cy="4023360"/>
-          </a:xfrm>
-          <a:prstGeom prst="rect">
-            <a:avLst/>
-          </a:prstGeom>
-          <a:noFill/>
-        </p:spPr>
-        <p:txBody>
-          <a:bodyPr wrap="square">
-            <a:spAutoFit/>
-          </a:bodyPr>
-          <a:lstStyle/>
-          <a:p>
-            <a:pPr>
-              <a:defRPr sz="1600" b="1">
-                <a:solidFill>
-                  <a:srgbClr val="10B981"/>
-                </a:solidFill>
-              </a:defRPr>
-            </a:pPr>
-            <a:r>
-              <a:t>3. Ciclo de Oficina</a:t>
-            </a:r>
-          </a:p>
-          <a:p>
-            <a:pPr>
-              <a:spcBef>
-                <a:spcPts val="1000"/>
-              </a:spcBef>
-              <a:defRPr sz="1150">
-                <a:solidFill>
-                  <a:srgbClr val="CBD5E1"/>
-                </a:solidFill>
-              </a:defRPr>
-            </a:pPr>
-            <a:r>
-              <a:t>• ABERTA: Aguardando inclusão no cronograma.</a:t>
-            </a:r>
-            <a:br/>
-            <a:br/>
-            <a:r>
-              <a:t>• EM PLANEJAMENTO: PCM aloca peças, recursos e equipe técnica.</a:t>
-            </a:r>
-            <a:br/>
-            <a:br/>
-            <a:r>
-              <a:t>• EM OFICINA: Serviços executados pelos mecânicos/eletricistas Locar.</a:t>
-            </a:r>
-            <a:br/>
-            <a:br/>
-            <a:r>
-              <a:t>• CONCLUÍDA: Oficina finaliza os reparos e libera para nova inspeção técnica de liberação.</a:t>
+            <a:r>
+              <a:t>Obrigatória antes de concluir. Sem assinatura, o laudo não é emitido.</a:t>
             </a:r>
           </a:p>
         </p:txBody>
@@ -7671,7 +7745,7 @@
         <p:spPr>
           <a:xfrm>
             <a:off x="0" y="0"/>
-            <a:ext cx="12191695" cy="73152"/>
+            <a:ext cx="12191695" cy="82296"/>
           </a:xfrm>
           <a:prstGeom prst="rect">
             <a:avLst/>
@@ -7713,7 +7787,7 @@
         </p:nvSpPr>
         <p:spPr>
           <a:xfrm>
-            <a:off x="731520" y="320040"/>
+            <a:off x="731520" y="292608"/>
             <a:ext cx="8686800" cy="1005840"/>
           </a:xfrm>
           <a:prstGeom prst="rect">
@@ -7736,13 +7810,13 @@
               </a:defRPr>
             </a:pPr>
             <a:r>
-              <a:t>DIRETRIZES COMERCIAIS &amp; OPERACIONAIS</a:t>
+              <a:t>PLANEJAMENTO, CONTROLE DE MANUTENÇÃO E NOTIFICAÇÕES</a:t>
             </a:r>
           </a:p>
           <a:p>
             <a:pPr>
               <a:spcBef>
-                <a:spcPts val="400"/>
+                <a:spcPts val="300"/>
               </a:spcBef>
               <a:defRPr sz="2200" b="1">
                 <a:solidFill>
@@ -7752,7 +7826,7 @@
               </a:defRPr>
             </a:pPr>
             <a:r>
-              <a:t>7. Matriz de Rigor Técnico por Cliente (Client Tiers)</a:t>
+              <a:t>7. Central do PCM &amp; Ordens Corretivas</a:t>
             </a:r>
           </a:p>
         </p:txBody>
@@ -7773,7 +7847,7 @@
         </p:blipFill>
         <p:spPr>
           <a:xfrm>
-            <a:off x="9875520" y="320040"/>
+            <a:off x="9875520" y="274320"/>
             <a:ext cx="1645920" cy="660994"/>
           </a:xfrm>
           <a:prstGeom prst="rect">
@@ -7781,16 +7855,40 @@
           </a:prstGeom>
         </p:spPr>
       </p:pic>
-      <p:sp>
-        <p:nvSpPr>
-          <p:cNvPr id="6" name="Rounded Rectangle 5"/>
+      <p:pic>
+        <p:nvPicPr>
+          <p:cNvPr id="6" name="Picture 5" descr="screen_pcm.png"/>
+          <p:cNvPicPr>
+            <a:picLocks noChangeAspect="1"/>
+          </p:cNvPicPr>
+          <p:nvPr/>
+        </p:nvPicPr>
+        <p:blipFill>
+          <a:blip r:embed="rId3"/>
+          <a:stretch>
+            <a:fillRect/>
+          </a:stretch>
+        </p:blipFill>
+        <p:spPr>
+          <a:xfrm>
+            <a:off x="731520" y="1645920"/>
+            <a:ext cx="5852160" cy="3291840"/>
+          </a:xfrm>
+          <a:prstGeom prst="rect">
+            <a:avLst/>
+          </a:prstGeom>
+        </p:spPr>
+      </p:pic>
+      <p:sp>
+        <p:nvSpPr>
+          <p:cNvPr id="7" name="Rounded Rectangle 6"/>
           <p:cNvSpPr/>
           <p:nvPr/>
         </p:nvSpPr>
         <p:spPr>
           <a:xfrm>
-            <a:off x="731520" y="1645920"/>
-            <a:ext cx="2560320" cy="4389120"/>
+            <a:off x="6766560" y="1645920"/>
+            <a:ext cx="4663440" cy="4480560"/>
           </a:xfrm>
           <a:prstGeom prst="roundRect">
             <a:avLst/>
@@ -7800,7 +7898,7 @@
           </a:solidFill>
           <a:ln w="15240">
             <a:solidFill>
-              <a:srgbClr val="334155"/>
+              <a:srgbClr val="3C4858"/>
             </a:solidFill>
           </a:ln>
         </p:spPr>
@@ -7828,57 +7926,14 @@
       </p:sp>
       <p:sp>
         <p:nvSpPr>
-          <p:cNvPr id="7" name="Rectangle 6"/>
-          <p:cNvSpPr/>
-          <p:nvPr/>
-        </p:nvSpPr>
-        <p:spPr>
-          <a:xfrm>
-            <a:off x="731520" y="1645920"/>
-            <a:ext cx="2560320" cy="109728"/>
-          </a:xfrm>
-          <a:prstGeom prst="rect">
-            <a:avLst/>
-          </a:prstGeom>
-          <a:solidFill>
-            <a:srgbClr val="A855F7"/>
-          </a:solidFill>
-          <a:ln>
-            <a:noFill/>
-          </a:ln>
-        </p:spPr>
-        <p:style>
-          <a:lnRef idx="1">
-            <a:schemeClr val="accent1"/>
-          </a:lnRef>
-          <a:fillRef idx="3">
-            <a:schemeClr val="accent1"/>
-          </a:fillRef>
-          <a:effectRef idx="2">
-            <a:schemeClr val="accent1"/>
-          </a:effectRef>
-          <a:fontRef idx="minor">
-            <a:schemeClr val="lt1"/>
-          </a:fontRef>
-        </p:style>
-        <p:txBody>
-          <a:bodyPr rtlCol="0" anchor="ctr"/>
-          <a:lstStyle/>
-          <a:p>
-            <a:pPr algn="ctr"/>
-          </a:p>
-        </p:txBody>
-      </p:sp>
-      <p:sp>
-        <p:nvSpPr>
           <p:cNvPr id="8" name="TextBox 7"/>
           <p:cNvSpPr txBox="1"/>
           <p:nvPr/>
         </p:nvSpPr>
         <p:spPr>
           <a:xfrm>
-            <a:off x="914400" y="1920240"/>
-            <a:ext cx="2194560" cy="3931920"/>
+            <a:off x="6995160" y="1828800"/>
+            <a:ext cx="4206240" cy="4114800"/>
           </a:xfrm>
           <a:prstGeom prst="rect">
             <a:avLst/>
@@ -7892,48 +7947,14 @@
           <a:lstStyle/>
           <a:p>
             <a:pPr>
-              <a:defRPr sz="1600" b="1">
-                <a:solidFill>
-                  <a:srgbClr val="A855F7"/>
+              <a:defRPr sz="1700" b="1">
+                <a:solidFill>
+                  <a:srgbClr val="F59E0B"/>
                 </a:solidFill>
               </a:defRPr>
             </a:pPr>
             <a:r>
-              <a:t>TIER AA</a:t>
-            </a:r>
-          </a:p>
-          <a:p>
-            <a:pPr>
-              <a:spcBef>
-                <a:spcPts val="400"/>
-              </a:spcBef>
-              <a:defRPr sz="1100" b="1">
-                <a:solidFill>
-                  <a:srgbClr val="FFFFFF"/>
-                </a:solidFill>
-              </a:defRPr>
-            </a:pPr>
-            <a:r>
-              <a:t>Grandes Minerações &amp; Siderurgias</a:t>
-            </a:r>
-          </a:p>
-          <a:p>
-            <a:pPr>
-              <a:spcBef>
-                <a:spcPts val="800"/>
-              </a:spcBef>
-              <a:defRPr sz="1000">
-                <a:solidFill>
-                  <a:srgbClr val="F59E0B"/>
-                </a:solidFill>
-              </a:defRPr>
-            </a:pPr>
-            <a:r>
-              <a:t>Principais Clientes:</a:t>
-            </a:r>
-            <a:br/>
-            <a:r>
-              <a:t>Vale, Usiminas, Anglo American, ArcelorMittal, CSN</a:t>
+              <a:t>Fluxo Integrado da Oficina</a:t>
             </a:r>
           </a:p>
           <a:p>
@@ -7941,546 +7962,49 @@
               <a:spcBef>
                 <a:spcPts val="1000"/>
               </a:spcBef>
-              <a:defRPr sz="1050">
-                <a:solidFill>
-                  <a:srgbClr val="CBD5E1"/>
+              <a:defRPr sz="1150">
+                <a:solidFill>
+                  <a:srgbClr val="E2E8F0"/>
                 </a:solidFill>
               </a:defRPr>
             </a:pPr>
             <a:r>
-              <a:t>Exigências Técnicas:</a:t>
+              <a:t>• Solicitação de Serviço (S.S.) Instantânea:</a:t>
             </a:r>
             <a:br/>
             <a:r>
-              <a:t>Rigor Máximo: Padrão visual 100% impecável, ART mecânica, testes de carga, horímetro estrito e vistoria nível pericial.</a:t>
-            </a:r>
-          </a:p>
-        </p:txBody>
-      </p:sp>
-      <p:sp>
-        <p:nvSpPr>
-          <p:cNvPr id="9" name="Rounded Rectangle 8"/>
-          <p:cNvSpPr/>
-          <p:nvPr/>
-        </p:nvSpPr>
-        <p:spPr>
-          <a:xfrm>
-            <a:off x="3456432" y="1645920"/>
-            <a:ext cx="2560320" cy="4389120"/>
-          </a:xfrm>
-          <a:prstGeom prst="roundRect">
-            <a:avLst/>
-          </a:prstGeom>
-          <a:solidFill>
-            <a:srgbClr val="1E232C"/>
-          </a:solidFill>
-          <a:ln w="15240">
-            <a:solidFill>
-              <a:srgbClr val="334155"/>
-            </a:solidFill>
-          </a:ln>
-        </p:spPr>
-        <p:style>
-          <a:lnRef idx="1">
-            <a:schemeClr val="accent1"/>
-          </a:lnRef>
-          <a:fillRef idx="3">
-            <a:schemeClr val="accent1"/>
-          </a:fillRef>
-          <a:effectRef idx="2">
-            <a:schemeClr val="accent1"/>
-          </a:effectRef>
-          <a:fontRef idx="minor">
-            <a:schemeClr val="lt1"/>
-          </a:fontRef>
-        </p:style>
-        <p:txBody>
-          <a:bodyPr rtlCol="0" anchor="ctr"/>
-          <a:lstStyle/>
-          <a:p>
-            <a:pPr algn="ctr"/>
-          </a:p>
-        </p:txBody>
-      </p:sp>
-      <p:sp>
-        <p:nvSpPr>
-          <p:cNvPr id="10" name="Rectangle 9"/>
-          <p:cNvSpPr/>
-          <p:nvPr/>
-        </p:nvSpPr>
-        <p:spPr>
-          <a:xfrm>
-            <a:off x="3456432" y="1645920"/>
-            <a:ext cx="2560320" cy="109728"/>
-          </a:xfrm>
-          <a:prstGeom prst="rect">
-            <a:avLst/>
-          </a:prstGeom>
-          <a:solidFill>
-            <a:srgbClr val="3B82F6"/>
-          </a:solidFill>
-          <a:ln>
-            <a:noFill/>
-          </a:ln>
-        </p:spPr>
-        <p:style>
-          <a:lnRef idx="1">
-            <a:schemeClr val="accent1"/>
-          </a:lnRef>
-          <a:fillRef idx="3">
-            <a:schemeClr val="accent1"/>
-          </a:fillRef>
-          <a:effectRef idx="2">
-            <a:schemeClr val="accent1"/>
-          </a:effectRef>
-          <a:fontRef idx="minor">
-            <a:schemeClr val="lt1"/>
-          </a:fontRef>
-        </p:style>
-        <p:txBody>
-          <a:bodyPr rtlCol="0" anchor="ctr"/>
-          <a:lstStyle/>
-          <a:p>
-            <a:pPr algn="ctr"/>
-          </a:p>
-        </p:txBody>
-      </p:sp>
-      <p:sp>
-        <p:nvSpPr>
-          <p:cNvPr id="11" name="TextBox 10"/>
-          <p:cNvSpPr txBox="1"/>
-          <p:nvPr/>
-        </p:nvSpPr>
-        <p:spPr>
-          <a:xfrm>
-            <a:off x="3639312" y="1920240"/>
-            <a:ext cx="2194560" cy="3931920"/>
-          </a:xfrm>
-          <a:prstGeom prst="rect">
-            <a:avLst/>
-          </a:prstGeom>
-          <a:noFill/>
-        </p:spPr>
-        <p:txBody>
-          <a:bodyPr wrap="square">
-            <a:spAutoFit/>
-          </a:bodyPr>
-          <a:lstStyle/>
-          <a:p>
-            <a:pPr>
-              <a:defRPr sz="1600" b="1">
-                <a:solidFill>
-                  <a:srgbClr val="3B82F6"/>
-                </a:solidFill>
-              </a:defRPr>
-            </a:pPr>
-            <a:r>
-              <a:t>TIER A</a:t>
-            </a:r>
-          </a:p>
-          <a:p>
-            <a:pPr>
-              <a:spcBef>
-                <a:spcPts val="400"/>
-              </a:spcBef>
-              <a:defRPr sz="1100" b="1">
-                <a:solidFill>
-                  <a:srgbClr val="FFFFFF"/>
-                </a:solidFill>
-              </a:defRPr>
-            </a:pPr>
-            <a:r>
-              <a:t>Contratadas dos Grandes Players</a:t>
-            </a:r>
-          </a:p>
-          <a:p>
-            <a:pPr>
-              <a:spcBef>
-                <a:spcPts val="800"/>
-              </a:spcBef>
-              <a:defRPr sz="1000">
-                <a:solidFill>
-                  <a:srgbClr val="F59E0B"/>
-                </a:solidFill>
-              </a:defRPr>
-            </a:pPr>
-            <a:r>
-              <a:t>Principais Clientes:</a:t>
+              <a:t>A cada máquina reprovada, gera-se uma S.S. oficial com a lista de defeitos e fotos anexadas.</a:t>
             </a:r>
             <a:br/>
-            <a:r>
-              <a:t>Andrade Gutierrez, Camargo Corrêa, Manserv, Tenenge</a:t>
-            </a:r>
-          </a:p>
-          <a:p>
-            <a:pPr>
-              <a:spcBef>
-                <a:spcPts val="1000"/>
-              </a:spcBef>
-              <a:defRPr sz="1050">
-                <a:solidFill>
-                  <a:srgbClr val="CBD5E1"/>
-                </a:solidFill>
-              </a:defRPr>
-            </a:pPr>
-            <a:r>
-              <a:t>Exigências Técnicas:</a:t>
-            </a:r>
             <a:br/>
             <a:r>
-              <a:t>Rigor Elevado: Atendimento a todas as normas regulamentadoras NR-11/12/18 e homologação nos padrões da contratante principal.</a:t>
-            </a:r>
-          </a:p>
-        </p:txBody>
-      </p:sp>
-      <p:sp>
-        <p:nvSpPr>
-          <p:cNvPr id="12" name="Rounded Rectangle 11"/>
-          <p:cNvSpPr/>
-          <p:nvPr/>
-        </p:nvSpPr>
-        <p:spPr>
-          <a:xfrm>
-            <a:off x="6181344" y="1645920"/>
-            <a:ext cx="2560320" cy="4389120"/>
-          </a:xfrm>
-          <a:prstGeom prst="roundRect">
-            <a:avLst/>
-          </a:prstGeom>
-          <a:solidFill>
-            <a:srgbClr val="1E232C"/>
-          </a:solidFill>
-          <a:ln w="15240">
-            <a:solidFill>
-              <a:srgbClr val="334155"/>
-            </a:solidFill>
-          </a:ln>
-        </p:spPr>
-        <p:style>
-          <a:lnRef idx="1">
-            <a:schemeClr val="accent1"/>
-          </a:lnRef>
-          <a:fillRef idx="3">
-            <a:schemeClr val="accent1"/>
-          </a:fillRef>
-          <a:effectRef idx="2">
-            <a:schemeClr val="accent1"/>
-          </a:effectRef>
-          <a:fontRef idx="minor">
-            <a:schemeClr val="lt1"/>
-          </a:fontRef>
-        </p:style>
-        <p:txBody>
-          <a:bodyPr rtlCol="0" anchor="ctr"/>
-          <a:lstStyle/>
-          <a:p>
-            <a:pPr algn="ctr"/>
-          </a:p>
-        </p:txBody>
-      </p:sp>
-      <p:sp>
-        <p:nvSpPr>
-          <p:cNvPr id="13" name="Rectangle 12"/>
-          <p:cNvSpPr/>
-          <p:nvPr/>
-        </p:nvSpPr>
-        <p:spPr>
-          <a:xfrm>
-            <a:off x="6181344" y="1645920"/>
-            <a:ext cx="2560320" cy="109728"/>
-          </a:xfrm>
-          <a:prstGeom prst="rect">
-            <a:avLst/>
-          </a:prstGeom>
-          <a:solidFill>
-            <a:srgbClr val="EAB308"/>
-          </a:solidFill>
-          <a:ln>
-            <a:noFill/>
-          </a:ln>
-        </p:spPr>
-        <p:style>
-          <a:lnRef idx="1">
-            <a:schemeClr val="accent1"/>
-          </a:lnRef>
-          <a:fillRef idx="3">
-            <a:schemeClr val="accent1"/>
-          </a:fillRef>
-          <a:effectRef idx="2">
-            <a:schemeClr val="accent1"/>
-          </a:effectRef>
-          <a:fontRef idx="minor">
-            <a:schemeClr val="lt1"/>
-          </a:fontRef>
-        </p:style>
-        <p:txBody>
-          <a:bodyPr rtlCol="0" anchor="ctr"/>
-          <a:lstStyle/>
-          <a:p>
-            <a:pPr algn="ctr"/>
-          </a:p>
-        </p:txBody>
-      </p:sp>
-      <p:sp>
-        <p:nvSpPr>
-          <p:cNvPr id="14" name="TextBox 13"/>
-          <p:cNvSpPr txBox="1"/>
-          <p:nvPr/>
-        </p:nvSpPr>
-        <p:spPr>
-          <a:xfrm>
-            <a:off x="6364224" y="1920240"/>
-            <a:ext cx="2194560" cy="3931920"/>
-          </a:xfrm>
-          <a:prstGeom prst="rect">
-            <a:avLst/>
-          </a:prstGeom>
-          <a:noFill/>
-        </p:spPr>
-        <p:txBody>
-          <a:bodyPr wrap="square">
-            <a:spAutoFit/>
-          </a:bodyPr>
-          <a:lstStyle/>
-          <a:p>
-            <a:pPr>
-              <a:defRPr sz="1600" b="1">
-                <a:solidFill>
-                  <a:srgbClr val="EAB308"/>
-                </a:solidFill>
-              </a:defRPr>
-            </a:pPr>
-            <a:r>
-              <a:t>TIER B</a:t>
-            </a:r>
-          </a:p>
-          <a:p>
-            <a:pPr>
-              <a:spcBef>
-                <a:spcPts val="400"/>
-              </a:spcBef>
-              <a:defRPr sz="1100" b="1">
-                <a:solidFill>
-                  <a:srgbClr val="FFFFFF"/>
-                </a:solidFill>
-              </a:defRPr>
-            </a:pPr>
-            <a:r>
-              <a:t>Obras Públicas &amp; Infraestrutura</a:t>
-            </a:r>
-          </a:p>
-          <a:p>
-            <a:pPr>
-              <a:spcBef>
-                <a:spcPts val="800"/>
-              </a:spcBef>
-              <a:defRPr sz="1000">
-                <a:solidFill>
-                  <a:srgbClr val="F59E0B"/>
-                </a:solidFill>
-              </a:defRPr>
-            </a:pPr>
-            <a:r>
-              <a:t>Principais Clientes:</a:t>
+              <a:t>• Notificação Multicanal:</a:t>
             </a:r>
             <a:br/>
             <a:r>
-              <a:t>Construtoras Regionais, Prefeituras, Rodovias e Galpões</a:t>
-            </a:r>
-          </a:p>
-          <a:p>
-            <a:pPr>
-              <a:spcBef>
-                <a:spcPts val="1000"/>
-              </a:spcBef>
-              <a:defRPr sz="1050">
-                <a:solidFill>
-                  <a:srgbClr val="CBD5E1"/>
-                </a:solidFill>
-              </a:defRPr>
-            </a:pPr>
-            <a:r>
-              <a:t>Exigências Técnicas:</a:t>
+              <a:t>  - E-mail corporativo em HTML com formato pericial.</a:t>
             </a:r>
             <a:br/>
             <a:r>
-              <a:t>Rigor Moderado: Equipamento 100% funcional, itens obrigatórios de segurança testados e atestados com laudo técnico válido.</a:t>
-            </a:r>
-          </a:p>
-        </p:txBody>
-      </p:sp>
-      <p:sp>
-        <p:nvSpPr>
-          <p:cNvPr id="15" name="Rounded Rectangle 14"/>
-          <p:cNvSpPr/>
-          <p:nvPr/>
-        </p:nvSpPr>
-        <p:spPr>
-          <a:xfrm>
-            <a:off x="8906256" y="1645920"/>
-            <a:ext cx="2560320" cy="4389120"/>
-          </a:xfrm>
-          <a:prstGeom prst="roundRect">
-            <a:avLst/>
-          </a:prstGeom>
-          <a:solidFill>
-            <a:srgbClr val="1E232C"/>
-          </a:solidFill>
-          <a:ln w="15240">
-            <a:solidFill>
-              <a:srgbClr val="334155"/>
-            </a:solidFill>
-          </a:ln>
-        </p:spPr>
-        <p:style>
-          <a:lnRef idx="1">
-            <a:schemeClr val="accent1"/>
-          </a:lnRef>
-          <a:fillRef idx="3">
-            <a:schemeClr val="accent1"/>
-          </a:fillRef>
-          <a:effectRef idx="2">
-            <a:schemeClr val="accent1"/>
-          </a:effectRef>
-          <a:fontRef idx="minor">
-            <a:schemeClr val="lt1"/>
-          </a:fontRef>
-        </p:style>
-        <p:txBody>
-          <a:bodyPr rtlCol="0" anchor="ctr"/>
-          <a:lstStyle/>
-          <a:p>
-            <a:pPr algn="ctr"/>
-          </a:p>
-        </p:txBody>
-      </p:sp>
-      <p:sp>
-        <p:nvSpPr>
-          <p:cNvPr id="16" name="Rectangle 15"/>
-          <p:cNvSpPr/>
-          <p:nvPr/>
-        </p:nvSpPr>
-        <p:spPr>
-          <a:xfrm>
-            <a:off x="8906256" y="1645920"/>
-            <a:ext cx="2560320" cy="109728"/>
-          </a:xfrm>
-          <a:prstGeom prst="rect">
-            <a:avLst/>
-          </a:prstGeom>
-          <a:solidFill>
-            <a:srgbClr val="94A3B8"/>
-          </a:solidFill>
-          <a:ln>
-            <a:noFill/>
-          </a:ln>
-        </p:spPr>
-        <p:style>
-          <a:lnRef idx="1">
-            <a:schemeClr val="accent1"/>
-          </a:lnRef>
-          <a:fillRef idx="3">
-            <a:schemeClr val="accent1"/>
-          </a:fillRef>
-          <a:effectRef idx="2">
-            <a:schemeClr val="accent1"/>
-          </a:effectRef>
-          <a:fontRef idx="minor">
-            <a:schemeClr val="lt1"/>
-          </a:fontRef>
-        </p:style>
-        <p:txBody>
-          <a:bodyPr rtlCol="0" anchor="ctr"/>
-          <a:lstStyle/>
-          <a:p>
-            <a:pPr algn="ctr"/>
-          </a:p>
-        </p:txBody>
-      </p:sp>
-      <p:sp>
-        <p:nvSpPr>
-          <p:cNvPr id="17" name="TextBox 16"/>
-          <p:cNvSpPr txBox="1"/>
-          <p:nvPr/>
-        </p:nvSpPr>
-        <p:spPr>
-          <a:xfrm>
-            <a:off x="9089136" y="1920240"/>
-            <a:ext cx="2194560" cy="3931920"/>
-          </a:xfrm>
-          <a:prstGeom prst="rect">
-            <a:avLst/>
-          </a:prstGeom>
-          <a:noFill/>
-        </p:spPr>
-        <p:txBody>
-          <a:bodyPr wrap="square">
-            <a:spAutoFit/>
-          </a:bodyPr>
-          <a:lstStyle/>
-          <a:p>
-            <a:pPr>
-              <a:defRPr sz="1600" b="1">
-                <a:solidFill>
-                  <a:srgbClr val="94A3B8"/>
-                </a:solidFill>
-              </a:defRPr>
-            </a:pPr>
-            <a:r>
-              <a:t>TIER C</a:t>
-            </a:r>
-          </a:p>
-          <a:p>
-            <a:pPr>
-              <a:spcBef>
-                <a:spcPts val="400"/>
-              </a:spcBef>
-              <a:defRPr sz="1100" b="1">
-                <a:solidFill>
-                  <a:srgbClr val="FFFFFF"/>
-                </a:solidFill>
-              </a:defRPr>
-            </a:pPr>
-            <a:r>
-              <a:t>Locação Operacional Padrão</a:t>
-            </a:r>
-          </a:p>
-          <a:p>
-            <a:pPr>
-              <a:spcBef>
-                <a:spcPts val="800"/>
-              </a:spcBef>
-              <a:defRPr sz="1000">
-                <a:solidFill>
-                  <a:srgbClr val="F59E0B"/>
-                </a:solidFill>
-              </a:defRPr>
-            </a:pPr>
-            <a:r>
-              <a:t>Principais Clientes:</a:t>
+              <a:t>  - Botão de envio rápido para o WhatsApp do gestor do PCM.</a:t>
             </a:r>
             <a:br/>
-            <a:r>
-              <a:t>Locação Avulsa, Indústrias Locais e Prestadores de Serviços</a:t>
-            </a:r>
-          </a:p>
-          <a:p>
-            <a:pPr>
-              <a:spcBef>
-                <a:spcPts val="1000"/>
-              </a:spcBef>
-              <a:defRPr sz="1050">
-                <a:solidFill>
-                  <a:srgbClr val="CBD5E1"/>
-                </a:solidFill>
-              </a:defRPr>
-            </a:pPr>
-            <a:r>
-              <a:t>Exigências Técnicas:</a:t>
-            </a:r>
             <a:br/>
             <a:r>
-              <a:t>Rigor Padrão: Conformidade mecânica, hidráulica e operacional plena antes da mobilização no pátio.</a:t>
+              <a:t>• Workflow de 4 Fases:</a:t>
+            </a:r>
+            <a:br/>
+            <a:r>
+              <a:t>  Aberta ➔ Em Planejamento ➔ Em Execução ➔ Concluída.</a:t>
+            </a:r>
+            <a:br/>
+            <a:br/>
+            <a:r>
+              <a:t>• Reinspeção Mandatória:</a:t>
+            </a:r>
+            <a:br/>
+            <a:r>
+              <a:t>  Após o PCM concluir, o equipamento passa por nova inspeção para retornar a DISPONÍVEL.</a:t>
             </a:r>
           </a:p>
         </p:txBody>
@@ -8555,7 +8079,7 @@
         <p:spPr>
           <a:xfrm>
             <a:off x="0" y="0"/>
-            <a:ext cx="12191695" cy="73152"/>
+            <a:ext cx="12191695" cy="82296"/>
           </a:xfrm>
           <a:prstGeom prst="rect">
             <a:avLst/>
@@ -8597,7 +8121,7 @@
         </p:nvSpPr>
         <p:spPr>
           <a:xfrm>
-            <a:off x="731520" y="320040"/>
+            <a:off x="731520" y="292608"/>
             <a:ext cx="8686800" cy="1005840"/>
           </a:xfrm>
           <a:prstGeom prst="rect">
@@ -8620,13 +8144,13 @@
               </a:defRPr>
             </a:pPr>
             <a:r>
-              <a:t>BLINDAGEM JURÍDICA E INTEGRIDADE DE DADOS</a:t>
+              <a:t>BLINDAGEM JURÍDICA E CERTIFICAÇÃO DIGITAL</a:t>
             </a:r>
           </a:p>
           <a:p>
             <a:pPr>
               <a:spcBef>
-                <a:spcPts val="400"/>
+                <a:spcPts val="300"/>
               </a:spcBef>
               <a:defRPr sz="2200" b="1">
                 <a:solidFill>
@@ -8636,7 +8160,7 @@
               </a:defRPr>
             </a:pPr>
             <a:r>
-              <a:t>8. Segurança, Perfis de Acesso (RBAC) e Laudo Pericial</a:t>
+              <a:t>8. Laudo Técnico Pericial &amp; Integridade Forense</a:t>
             </a:r>
           </a:p>
         </p:txBody>
@@ -8657,7 +8181,7 @@
         </p:blipFill>
         <p:spPr>
           <a:xfrm>
-            <a:off x="9875520" y="320040"/>
+            <a:off x="9875520" y="274320"/>
             <a:ext cx="1645920" cy="660994"/>
           </a:xfrm>
           <a:prstGeom prst="rect">
@@ -8665,16 +8189,40 @@
           </a:prstGeom>
         </p:spPr>
       </p:pic>
-      <p:sp>
-        <p:nvSpPr>
-          <p:cNvPr id="6" name="Rounded Rectangle 5"/>
+      <p:pic>
+        <p:nvPicPr>
+          <p:cNvPr id="6" name="Picture 5" descr="screen_laudos.png"/>
+          <p:cNvPicPr>
+            <a:picLocks noChangeAspect="1"/>
+          </p:cNvPicPr>
+          <p:nvPr/>
+        </p:nvPicPr>
+        <p:blipFill>
+          <a:blip r:embed="rId3"/>
+          <a:stretch>
+            <a:fillRect/>
+          </a:stretch>
+        </p:blipFill>
+        <p:spPr>
+          <a:xfrm>
+            <a:off x="731520" y="1645920"/>
+            <a:ext cx="5852160" cy="3291840"/>
+          </a:xfrm>
+          <a:prstGeom prst="rect">
+            <a:avLst/>
+          </a:prstGeom>
+        </p:spPr>
+      </p:pic>
+      <p:sp>
+        <p:nvSpPr>
+          <p:cNvPr id="7" name="Rounded Rectangle 6"/>
           <p:cNvSpPr/>
           <p:nvPr/>
         </p:nvSpPr>
         <p:spPr>
           <a:xfrm>
-            <a:off x="731520" y="1645920"/>
-            <a:ext cx="5120640" cy="4480560"/>
+            <a:off x="6766560" y="1645920"/>
+            <a:ext cx="4663440" cy="4480560"/>
           </a:xfrm>
           <a:prstGeom prst="roundRect">
             <a:avLst/>
@@ -8684,7 +8232,7 @@
           </a:solidFill>
           <a:ln w="15240">
             <a:solidFill>
-              <a:srgbClr val="334155"/>
+              <a:srgbClr val="3C4858"/>
             </a:solidFill>
           </a:ln>
         </p:spPr>
@@ -8712,14 +8260,14 @@
       </p:sp>
       <p:sp>
         <p:nvSpPr>
-          <p:cNvPr id="7" name="TextBox 6"/>
+          <p:cNvPr id="8" name="TextBox 7"/>
           <p:cNvSpPr txBox="1"/>
           <p:nvPr/>
         </p:nvSpPr>
         <p:spPr>
           <a:xfrm>
-            <a:off x="1005840" y="1828800"/>
-            <a:ext cx="4572000" cy="4114800"/>
+            <a:off x="6995160" y="1828800"/>
+            <a:ext cx="4206240" cy="4114800"/>
           </a:xfrm>
           <a:prstGeom prst="rect">
             <a:avLst/>
@@ -8733,14 +8281,14 @@
           <a:lstStyle/>
           <a:p>
             <a:pPr>
-              <a:defRPr sz="1600" b="1">
+              <a:defRPr sz="1700" b="1">
                 <a:solidFill>
                   <a:srgbClr val="F59E0B"/>
                 </a:solidFill>
               </a:defRPr>
             </a:pPr>
             <a:r>
-              <a:t>Perfis Corporativos de Acesso (RBAC)</a:t>
+              <a:t>Validade Pericial e Jurídica</a:t>
             </a:r>
           </a:p>
           <a:p>
@@ -8748,144 +8296,45 @@
               <a:spcBef>
                 <a:spcPts val="1000"/>
               </a:spcBef>
-              <a:defRPr sz="1100">
-                <a:solidFill>
-                  <a:srgbClr val="CBD5E1"/>
+              <a:defRPr sz="1150">
+                <a:solidFill>
+                  <a:srgbClr val="E2E8F0"/>
                 </a:solidFill>
               </a:defRPr>
             </a:pPr>
             <a:r>
-              <a:t>• Inspetor Técnico: Preenche e assina vistorias técnicas normativas de pátio.</a:t>
+              <a:t>• Hash Criptográfico SHA-256:</a:t>
+            </a:r>
+            <a:br/>
+            <a:r>
+              <a:t>Cada laudo emite uma assinatura matemática inviolável com base nos dados e fotos da vistoria.</a:t>
             </a:r>
             <a:br/>
             <a:br/>
             <a:r>
-              <a:t>• Equipe Comercial: Efetua reservas, define prazos, vincula clientes contratantes e inicia locação.</a:t>
+              <a:t>• QR Code de Validação em Campo:</a:t>
+            </a:r>
+            <a:br/>
+            <a:r>
+              <a:t>Auditores ou clientes em obra podem escanear o QR Code impresso e consultar a integridade original.</a:t>
             </a:r>
             <a:br/>
             <a:br/>
             <a:r>
-              <a:t>• Gestão PCM: Gerencia ordens de serviço, atualiza acompanhamento de oficina e valida manutenções.</a:t>
+              <a:t>• Exportação Direta para PDF:</a:t>
+            </a:r>
+            <a:br/>
+            <a:r>
+              <a:t>Emissão em 1 clique sem depender de impressoras ou conexões externas.</a:t>
             </a:r>
             <a:br/>
             <a:br/>
             <a:r>
-              <a:t>• Gestor de Frota / Admin: Acesso integral, cadastro de novos ativos e parametrizações gerais.</a:t>
+              <a:t>• Histórico Perpétuo do Ativo:</a:t>
             </a:r>
             <a:br/>
-            <a:br/>
-            <a:r>
-              <a:t>• Modo Consulta: Permite visualização e auditoria sem alterar dados.</a:t>
-            </a:r>
-          </a:p>
-        </p:txBody>
-      </p:sp>
-      <p:sp>
-        <p:nvSpPr>
-          <p:cNvPr id="8" name="Rounded Rectangle 7"/>
-          <p:cNvSpPr/>
-          <p:nvPr/>
-        </p:nvSpPr>
-        <p:spPr>
-          <a:xfrm>
-            <a:off x="6309360" y="1645920"/>
-            <a:ext cx="5120640" cy="4480560"/>
-          </a:xfrm>
-          <a:prstGeom prst="roundRect">
-            <a:avLst/>
-          </a:prstGeom>
-          <a:solidFill>
-            <a:srgbClr val="1E232C"/>
-          </a:solidFill>
-          <a:ln w="15240">
-            <a:solidFill>
-              <a:srgbClr val="334155"/>
-            </a:solidFill>
-          </a:ln>
-        </p:spPr>
-        <p:style>
-          <a:lnRef idx="1">
-            <a:schemeClr val="accent1"/>
-          </a:lnRef>
-          <a:fillRef idx="3">
-            <a:schemeClr val="accent1"/>
-          </a:fillRef>
-          <a:effectRef idx="2">
-            <a:schemeClr val="accent1"/>
-          </a:effectRef>
-          <a:fontRef idx="minor">
-            <a:schemeClr val="lt1"/>
-          </a:fontRef>
-        </p:style>
-        <p:txBody>
-          <a:bodyPr rtlCol="0" anchor="ctr"/>
-          <a:lstStyle/>
-          <a:p>
-            <a:pPr algn="ctr"/>
-          </a:p>
-        </p:txBody>
-      </p:sp>
-      <p:sp>
-        <p:nvSpPr>
-          <p:cNvPr id="9" name="TextBox 8"/>
-          <p:cNvSpPr txBox="1"/>
-          <p:nvPr/>
-        </p:nvSpPr>
-        <p:spPr>
-          <a:xfrm>
-            <a:off x="6583680" y="1828800"/>
-            <a:ext cx="4572000" cy="4114800"/>
-          </a:xfrm>
-          <a:prstGeom prst="rect">
-            <a:avLst/>
-          </a:prstGeom>
-          <a:noFill/>
-        </p:spPr>
-        <p:txBody>
-          <a:bodyPr wrap="square">
-            <a:spAutoFit/>
-          </a:bodyPr>
-          <a:lstStyle/>
-          <a:p>
-            <a:pPr>
-              <a:defRPr sz="1600" b="1">
-                <a:solidFill>
-                  <a:srgbClr val="10B981"/>
-                </a:solidFill>
-              </a:defRPr>
-            </a:pPr>
-            <a:r>
-              <a:t>Laudo Técnico &amp; Custódia Forense</a:t>
-            </a:r>
-          </a:p>
-          <a:p>
-            <a:pPr>
-              <a:spcBef>
-                <a:spcPts val="1000"/>
-              </a:spcBef>
-              <a:defRPr sz="1100">
-                <a:solidFill>
-                  <a:srgbClr val="CBD5E1"/>
-                </a:solidFill>
-              </a:defRPr>
-            </a:pPr>
-            <a:r>
-              <a:t>• Hash Criptográfico SHA-256: Cada laudo gera uma chave criptográfica inviolável baseada na TAG, dados da inspeção, inspetor e fotos.</a:t>
-            </a:r>
-            <a:br/>
-            <a:br/>
-            <a:r>
-              <a:t>• QR Code Autenticador: Permite que clientes e auditores em campo escaneiem o QR Code no papel e verifiquem a autenticidade imediata na base Locar.</a:t>
-            </a:r>
-            <a:br/>
-            <a:br/>
-            <a:r>
-              <a:t>• Exportação Direta para PDF: Geração offline instantânea do documento oficial pronto para impressão ou envio por e-mail.</a:t>
-            </a:r>
-            <a:br/>
-            <a:br/>
-            <a:r>
-              <a:t>• Histórico Perpétuo: Rastreabilidade de 100% das vistorias já realizadas no ativo.</a:t>
+            <a:r>
+              <a:t>Rastreabilidade completa de todas as intervenções para auditorias do Ministério do Trabalho e clientes.</a:t>
             </a:r>
           </a:p>
         </p:txBody>

--- a/Funcional.pptx
+++ b/Funcional.pptx
@@ -3113,7 +3113,7 @@
             <a:avLst/>
           </a:prstGeom>
           <a:solidFill>
-            <a:srgbClr val="14171D"/>
+            <a:srgbClr val="383535"/>
           </a:solidFill>
           <a:ln>
             <a:noFill/>
@@ -3150,13 +3150,13 @@
         <p:spPr>
           <a:xfrm>
             <a:off x="0" y="0"/>
-            <a:ext cx="12191695" cy="82296"/>
+            <a:ext cx="12191695" cy="91440"/>
           </a:xfrm>
           <a:prstGeom prst="rect">
             <a:avLst/>
           </a:prstGeom>
           <a:solidFill>
-            <a:srgbClr val="F59E0B"/>
+            <a:srgbClr val="FFF212"/>
           </a:solidFill>
           <a:ln>
             <a:noFill/>
@@ -3199,7 +3199,7 @@
             <a:avLst/>
           </a:prstGeom>
           <a:solidFill>
-            <a:srgbClr val="F59E0B"/>
+            <a:srgbClr val="FFF212"/>
           </a:solidFill>
           <a:ln>
             <a:noFill/>
@@ -3276,7 +3276,7 @@
             <a:pPr>
               <a:defRPr sz="1100" b="1">
                 <a:solidFill>
-                  <a:srgbClr val="F59E0B"/>
+                  <a:srgbClr val="FFF212"/>
                 </a:solidFill>
                 <a:latin typeface="Arial"/>
               </a:defRPr>
@@ -3308,7 +3308,7 @@
               </a:spcBef>
               <a:defRPr sz="1350">
                 <a:solidFill>
-                  <a:srgbClr val="E2E8F0"/>
+                  <a:srgbClr val="F1F5F9"/>
                 </a:solidFill>
                 <a:latin typeface="Arial"/>
               </a:defRPr>
@@ -3338,11 +3338,11 @@
             <a:avLst/>
           </a:prstGeom>
           <a:solidFill>
-            <a:srgbClr val="262C38"/>
+            <a:srgbClr val="474444"/>
           </a:solidFill>
           <a:ln w="15240">
             <a:solidFill>
-              <a:srgbClr val="F59E0B"/>
+              <a:srgbClr val="FFF212"/>
             </a:solidFill>
           </a:ln>
         </p:spPr>
@@ -3393,7 +3393,7 @@
             <a:pPr>
               <a:defRPr sz="1000" b="1">
                 <a:solidFill>
-                  <a:srgbClr val="F59E0B"/>
+                  <a:srgbClr val="FFF212"/>
                 </a:solidFill>
               </a:defRPr>
             </a:pPr>
@@ -3423,7 +3423,7 @@
               </a:spcBef>
               <a:defRPr sz="950">
                 <a:solidFill>
-                  <a:srgbClr val="94A3B8"/>
+                  <a:srgbClr val="CBD5E1"/>
                 </a:solidFill>
               </a:defRPr>
             </a:pPr>
@@ -3448,11 +3448,11 @@
             <a:avLst/>
           </a:prstGeom>
           <a:solidFill>
-            <a:srgbClr val="1E232C"/>
+            <a:srgbClr val="2E2B2B"/>
           </a:solidFill>
           <a:ln w="15240">
             <a:solidFill>
-              <a:srgbClr val="3C4858"/>
+              <a:srgbClr val="5C5656"/>
             </a:solidFill>
           </a:ln>
         </p:spPr>
@@ -3518,12 +3518,12 @@
               </a:spcBef>
               <a:defRPr sz="1000">
                 <a:solidFill>
-                  <a:srgbClr val="94A3B8"/>
+                  <a:srgbClr val="CBD5E1"/>
                 </a:solidFill>
               </a:defRPr>
             </a:pPr>
             <a:r>
-              <a:t>Desenvolvido por Maikon Pinho  •  Identidade Visual: Cinza Escuro, Amarelo e Branco  •  Versão 2026</a:t>
+              <a:t>Desenvolvido por Maikon Pinho  •  Identidade Visual: Cinza Oficial (#474444), Amarelo (#FFF212) e Branco  •  2026</a:t>
             </a:r>
           </a:p>
         </p:txBody>
@@ -3561,7 +3561,7 @@
             <a:avLst/>
           </a:prstGeom>
           <a:solidFill>
-            <a:srgbClr val="14171D"/>
+            <a:srgbClr val="383535"/>
           </a:solidFill>
           <a:ln>
             <a:noFill/>
@@ -3598,13 +3598,13 @@
         <p:spPr>
           <a:xfrm>
             <a:off x="0" y="0"/>
-            <a:ext cx="12191695" cy="82296"/>
+            <a:ext cx="12191695" cy="91440"/>
           </a:xfrm>
           <a:prstGeom prst="rect">
             <a:avLst/>
           </a:prstGeom>
           <a:solidFill>
-            <a:srgbClr val="F59E0B"/>
+            <a:srgbClr val="FFF212"/>
           </a:solidFill>
           <a:ln>
             <a:noFill/>
@@ -3657,7 +3657,7 @@
             <a:pPr>
               <a:defRPr sz="950" b="1">
                 <a:solidFill>
-                  <a:srgbClr val="F59E0B"/>
+                  <a:srgbClr val="FFF212"/>
                 </a:solidFill>
                 <a:latin typeface="Arial"/>
               </a:defRPr>
@@ -3723,11 +3723,11 @@
             <a:avLst/>
           </a:prstGeom>
           <a:solidFill>
-            <a:srgbClr val="1E232C"/>
+            <a:srgbClr val="474444"/>
           </a:solidFill>
           <a:ln w="15240">
             <a:solidFill>
-              <a:srgbClr val="3C4858"/>
+              <a:srgbClr val="FFF212"/>
             </a:solidFill>
           </a:ln>
         </p:spPr>
@@ -3768,7 +3768,7 @@
             <a:avLst/>
           </a:prstGeom>
           <a:solidFill>
-            <a:srgbClr val="F59E0B"/>
+            <a:srgbClr val="FFF212"/>
           </a:solidFill>
           <a:ln>
             <a:noFill/>
@@ -3821,7 +3821,7 @@
             <a:pPr>
               <a:defRPr sz="1600" b="1">
                 <a:solidFill>
-                  <a:srgbClr val="F59E0B"/>
+                  <a:srgbClr val="FFF212"/>
                 </a:solidFill>
               </a:defRPr>
             </a:pPr>
@@ -3851,7 +3851,7 @@
               </a:spcBef>
               <a:defRPr sz="1000">
                 <a:solidFill>
-                  <a:srgbClr val="F59E0B"/>
+                  <a:srgbClr val="F1F5F9"/>
                 </a:solidFill>
               </a:defRPr>
             </a:pPr>
@@ -3870,7 +3870,7 @@
               </a:spcBef>
               <a:defRPr sz="1050">
                 <a:solidFill>
-                  <a:srgbClr val="E2E8F0"/>
+                  <a:srgbClr val="CBD5E1"/>
                 </a:solidFill>
               </a:defRPr>
             </a:pPr>
@@ -3899,11 +3899,11 @@
             <a:avLst/>
           </a:prstGeom>
           <a:solidFill>
-            <a:srgbClr val="1E232C"/>
+            <a:srgbClr val="2E2B2B"/>
           </a:solidFill>
           <a:ln w="15240">
             <a:solidFill>
-              <a:srgbClr val="3C4858"/>
+              <a:srgbClr val="5C5656"/>
             </a:solidFill>
           </a:ln>
         </p:spPr>
@@ -3944,7 +3944,7 @@
             <a:avLst/>
           </a:prstGeom>
           <a:solidFill>
-            <a:srgbClr val="FFFFFF"/>
+            <a:srgbClr val="FFF212"/>
           </a:solidFill>
           <a:ln>
             <a:noFill/>
@@ -3997,7 +3997,7 @@
             <a:pPr>
               <a:defRPr sz="1600" b="1">
                 <a:solidFill>
-                  <a:srgbClr val="FFFFFF"/>
+                  <a:srgbClr val="FFF212"/>
                 </a:solidFill>
               </a:defRPr>
             </a:pPr>
@@ -4027,7 +4027,7 @@
               </a:spcBef>
               <a:defRPr sz="1000">
                 <a:solidFill>
-                  <a:srgbClr val="F59E0B"/>
+                  <a:srgbClr val="F1F5F9"/>
                 </a:solidFill>
               </a:defRPr>
             </a:pPr>
@@ -4046,7 +4046,7 @@
               </a:spcBef>
               <a:defRPr sz="1050">
                 <a:solidFill>
-                  <a:srgbClr val="E2E8F0"/>
+                  <a:srgbClr val="CBD5E1"/>
                 </a:solidFill>
               </a:defRPr>
             </a:pPr>
@@ -4075,11 +4075,11 @@
             <a:avLst/>
           </a:prstGeom>
           <a:solidFill>
-            <a:srgbClr val="1E232C"/>
+            <a:srgbClr val="2E2B2B"/>
           </a:solidFill>
           <a:ln w="15240">
             <a:solidFill>
-              <a:srgbClr val="3C4858"/>
+              <a:srgbClr val="5C5656"/>
             </a:solidFill>
           </a:ln>
         </p:spPr>
@@ -4120,7 +4120,7 @@
             <a:avLst/>
           </a:prstGeom>
           <a:solidFill>
-            <a:srgbClr val="F59E0B"/>
+            <a:srgbClr val="FFF212"/>
           </a:solidFill>
           <a:ln>
             <a:noFill/>
@@ -4173,7 +4173,7 @@
             <a:pPr>
               <a:defRPr sz="1600" b="1">
                 <a:solidFill>
-                  <a:srgbClr val="F59E0B"/>
+                  <a:srgbClr val="FFF212"/>
                 </a:solidFill>
               </a:defRPr>
             </a:pPr>
@@ -4203,7 +4203,7 @@
               </a:spcBef>
               <a:defRPr sz="1000">
                 <a:solidFill>
-                  <a:srgbClr val="F59E0B"/>
+                  <a:srgbClr val="F1F5F9"/>
                 </a:solidFill>
               </a:defRPr>
             </a:pPr>
@@ -4222,7 +4222,7 @@
               </a:spcBef>
               <a:defRPr sz="1050">
                 <a:solidFill>
-                  <a:srgbClr val="E2E8F0"/>
+                  <a:srgbClr val="CBD5E1"/>
                 </a:solidFill>
               </a:defRPr>
             </a:pPr>
@@ -4251,11 +4251,11 @@
             <a:avLst/>
           </a:prstGeom>
           <a:solidFill>
-            <a:srgbClr val="1E232C"/>
+            <a:srgbClr val="2E2B2B"/>
           </a:solidFill>
           <a:ln w="15240">
             <a:solidFill>
-              <a:srgbClr val="3C4858"/>
+              <a:srgbClr val="5C5656"/>
             </a:solidFill>
           </a:ln>
         </p:spPr>
@@ -4296,7 +4296,7 @@
             <a:avLst/>
           </a:prstGeom>
           <a:solidFill>
-            <a:srgbClr val="94A3B8"/>
+            <a:srgbClr val="FFF212"/>
           </a:solidFill>
           <a:ln>
             <a:noFill/>
@@ -4349,7 +4349,7 @@
             <a:pPr>
               <a:defRPr sz="1600" b="1">
                 <a:solidFill>
-                  <a:srgbClr val="94A3B8"/>
+                  <a:srgbClr val="FFF212"/>
                 </a:solidFill>
               </a:defRPr>
             </a:pPr>
@@ -4379,7 +4379,7 @@
               </a:spcBef>
               <a:defRPr sz="1000">
                 <a:solidFill>
-                  <a:srgbClr val="F59E0B"/>
+                  <a:srgbClr val="F1F5F9"/>
                 </a:solidFill>
               </a:defRPr>
             </a:pPr>
@@ -4398,7 +4398,7 @@
               </a:spcBef>
               <a:defRPr sz="1050">
                 <a:solidFill>
-                  <a:srgbClr val="E2E8F0"/>
+                  <a:srgbClr val="CBD5E1"/>
                 </a:solidFill>
               </a:defRPr>
             </a:pPr>
@@ -4445,7 +4445,7 @@
             <a:avLst/>
           </a:prstGeom>
           <a:solidFill>
-            <a:srgbClr val="14171D"/>
+            <a:srgbClr val="383535"/>
           </a:solidFill>
           <a:ln>
             <a:noFill/>
@@ -4482,13 +4482,13 @@
         <p:spPr>
           <a:xfrm>
             <a:off x="0" y="0"/>
-            <a:ext cx="12191695" cy="82296"/>
+            <a:ext cx="12191695" cy="91440"/>
           </a:xfrm>
           <a:prstGeom prst="rect">
             <a:avLst/>
           </a:prstGeom>
           <a:solidFill>
-            <a:srgbClr val="F59E0B"/>
+            <a:srgbClr val="FFF212"/>
           </a:solidFill>
           <a:ln>
             <a:noFill/>
@@ -4541,7 +4541,7 @@
             <a:pPr>
               <a:defRPr sz="950" b="1">
                 <a:solidFill>
-                  <a:srgbClr val="F59E0B"/>
+                  <a:srgbClr val="FFF212"/>
                 </a:solidFill>
                 <a:latin typeface="Arial"/>
               </a:defRPr>
@@ -4607,11 +4607,11 @@
             <a:avLst/>
           </a:prstGeom>
           <a:solidFill>
-            <a:srgbClr val="1E232C"/>
+            <a:srgbClr val="2E2B2B"/>
           </a:solidFill>
           <a:ln w="15240">
             <a:solidFill>
-              <a:srgbClr val="3C4858"/>
+              <a:srgbClr val="5C5656"/>
             </a:solidFill>
           </a:ln>
         </p:spPr>
@@ -4662,7 +4662,7 @@
             <a:pPr>
               <a:defRPr sz="1600" b="1">
                 <a:solidFill>
-                  <a:srgbClr val="F59E0B"/>
+                  <a:srgbClr val="FFF212"/>
                 </a:solidFill>
               </a:defRPr>
             </a:pPr>
@@ -4677,7 +4677,7 @@
               </a:spcBef>
               <a:defRPr sz="1200">
                 <a:solidFill>
-                  <a:srgbClr val="E2E8F0"/>
+                  <a:srgbClr val="F1F5F9"/>
                 </a:solidFill>
               </a:defRPr>
             </a:pPr>
@@ -4702,11 +4702,11 @@
             <a:avLst/>
           </a:prstGeom>
           <a:solidFill>
-            <a:srgbClr val="1E232C"/>
+            <a:srgbClr val="2E2B2B"/>
           </a:solidFill>
           <a:ln w="15240">
             <a:solidFill>
-              <a:srgbClr val="3C4858"/>
+              <a:srgbClr val="5C5656"/>
             </a:solidFill>
           </a:ln>
         </p:spPr>
@@ -4757,7 +4757,7 @@
             <a:pPr>
               <a:defRPr sz="1600" b="1">
                 <a:solidFill>
-                  <a:srgbClr val="F59E0B"/>
+                  <a:srgbClr val="FFF212"/>
                 </a:solidFill>
               </a:defRPr>
             </a:pPr>
@@ -4772,7 +4772,7 @@
               </a:spcBef>
               <a:defRPr sz="1200">
                 <a:solidFill>
-                  <a:srgbClr val="E2E8F0"/>
+                  <a:srgbClr val="F1F5F9"/>
                 </a:solidFill>
               </a:defRPr>
             </a:pPr>
@@ -4797,11 +4797,11 @@
             <a:avLst/>
           </a:prstGeom>
           <a:solidFill>
-            <a:srgbClr val="1E232C"/>
+            <a:srgbClr val="2E2B2B"/>
           </a:solidFill>
           <a:ln w="15240">
             <a:solidFill>
-              <a:srgbClr val="3C4858"/>
+              <a:srgbClr val="5C5656"/>
             </a:solidFill>
           </a:ln>
         </p:spPr>
@@ -4852,7 +4852,7 @@
             <a:pPr>
               <a:defRPr sz="1600" b="1">
                 <a:solidFill>
-                  <a:srgbClr val="F59E0B"/>
+                  <a:srgbClr val="FFF212"/>
                 </a:solidFill>
               </a:defRPr>
             </a:pPr>
@@ -4867,7 +4867,7 @@
               </a:spcBef>
               <a:defRPr sz="1200">
                 <a:solidFill>
-                  <a:srgbClr val="E2E8F0"/>
+                  <a:srgbClr val="F1F5F9"/>
                 </a:solidFill>
               </a:defRPr>
             </a:pPr>
@@ -4892,11 +4892,11 @@
             <a:avLst/>
           </a:prstGeom>
           <a:solidFill>
-            <a:srgbClr val="1E232C"/>
+            <a:srgbClr val="2E2B2B"/>
           </a:solidFill>
           <a:ln w="15240">
             <a:solidFill>
-              <a:srgbClr val="3C4858"/>
+              <a:srgbClr val="5C5656"/>
             </a:solidFill>
           </a:ln>
         </p:spPr>
@@ -4947,7 +4947,7 @@
             <a:pPr>
               <a:defRPr sz="1600" b="1">
                 <a:solidFill>
-                  <a:srgbClr val="F59E0B"/>
+                  <a:srgbClr val="FFF212"/>
                 </a:solidFill>
               </a:defRPr>
             </a:pPr>
@@ -4962,7 +4962,7 @@
               </a:spcBef>
               <a:defRPr sz="1200">
                 <a:solidFill>
-                  <a:srgbClr val="E2E8F0"/>
+                  <a:srgbClr val="F1F5F9"/>
                 </a:solidFill>
               </a:defRPr>
             </a:pPr>
@@ -5005,7 +5005,7 @@
             <a:avLst/>
           </a:prstGeom>
           <a:solidFill>
-            <a:srgbClr val="14171D"/>
+            <a:srgbClr val="383535"/>
           </a:solidFill>
           <a:ln>
             <a:noFill/>
@@ -5042,13 +5042,13 @@
         <p:spPr>
           <a:xfrm>
             <a:off x="0" y="0"/>
-            <a:ext cx="12191695" cy="82296"/>
+            <a:ext cx="12191695" cy="91440"/>
           </a:xfrm>
           <a:prstGeom prst="rect">
             <a:avLst/>
           </a:prstGeom>
           <a:solidFill>
-            <a:srgbClr val="F59E0B"/>
+            <a:srgbClr val="FFF212"/>
           </a:solidFill>
           <a:ln>
             <a:noFill/>
@@ -5101,7 +5101,7 @@
             <a:pPr>
               <a:defRPr sz="950" b="1">
                 <a:solidFill>
-                  <a:srgbClr val="F59E0B"/>
+                  <a:srgbClr val="FFF212"/>
                 </a:solidFill>
                 <a:latin typeface="Arial"/>
               </a:defRPr>
@@ -5167,11 +5167,11 @@
             <a:avLst/>
           </a:prstGeom>
           <a:solidFill>
-            <a:srgbClr val="1E232C"/>
+            <a:srgbClr val="2E2B2B"/>
           </a:solidFill>
           <a:ln w="15240">
             <a:solidFill>
-              <a:srgbClr val="3C4858"/>
+              <a:srgbClr val="5C5656"/>
             </a:solidFill>
           </a:ln>
         </p:spPr>
@@ -5246,7 +5246,7 @@
             <a:pPr>
               <a:defRPr sz="1400" b="1">
                 <a:solidFill>
-                  <a:srgbClr val="F59E0B"/>
+                  <a:srgbClr val="FFF212"/>
                 </a:solidFill>
               </a:defRPr>
             </a:pPr>
@@ -5261,7 +5261,7 @@
               </a:spcBef>
               <a:defRPr sz="1050">
                 <a:solidFill>
-                  <a:srgbClr val="E2E8F0"/>
+                  <a:srgbClr val="F1F5F9"/>
                 </a:solidFill>
               </a:defRPr>
             </a:pPr>
@@ -5286,11 +5286,11 @@
             <a:avLst/>
           </a:prstGeom>
           <a:solidFill>
-            <a:srgbClr val="1E232C"/>
+            <a:srgbClr val="2E2B2B"/>
           </a:solidFill>
           <a:ln w="15240">
             <a:solidFill>
-              <a:srgbClr val="3C4858"/>
+              <a:srgbClr val="5C5656"/>
             </a:solidFill>
           </a:ln>
         </p:spPr>
@@ -5365,7 +5365,7 @@
             <a:pPr>
               <a:defRPr sz="1400" b="1">
                 <a:solidFill>
-                  <a:srgbClr val="F59E0B"/>
+                  <a:srgbClr val="FFF212"/>
                 </a:solidFill>
               </a:defRPr>
             </a:pPr>
@@ -5380,7 +5380,7 @@
               </a:spcBef>
               <a:defRPr sz="1050">
                 <a:solidFill>
-                  <a:srgbClr val="E2E8F0"/>
+                  <a:srgbClr val="F1F5F9"/>
                 </a:solidFill>
               </a:defRPr>
             </a:pPr>
@@ -5405,11 +5405,11 @@
             <a:avLst/>
           </a:prstGeom>
           <a:solidFill>
-            <a:srgbClr val="1E232C"/>
+            <a:srgbClr val="2E2B2B"/>
           </a:solidFill>
           <a:ln w="15240">
             <a:solidFill>
-              <a:srgbClr val="3C4858"/>
+              <a:srgbClr val="5C5656"/>
             </a:solidFill>
           </a:ln>
         </p:spPr>
@@ -5484,7 +5484,7 @@
             <a:pPr>
               <a:defRPr sz="1400" b="1">
                 <a:solidFill>
-                  <a:srgbClr val="F59E0B"/>
+                  <a:srgbClr val="FFF212"/>
                 </a:solidFill>
               </a:defRPr>
             </a:pPr>
@@ -5499,7 +5499,7 @@
               </a:spcBef>
               <a:defRPr sz="1050">
                 <a:solidFill>
-                  <a:srgbClr val="E2E8F0"/>
+                  <a:srgbClr val="F1F5F9"/>
                 </a:solidFill>
               </a:defRPr>
             </a:pPr>
@@ -5524,11 +5524,11 @@
             <a:avLst/>
           </a:prstGeom>
           <a:solidFill>
-            <a:srgbClr val="1E232C"/>
+            <a:srgbClr val="2E2B2B"/>
           </a:solidFill>
           <a:ln w="15240">
             <a:solidFill>
-              <a:srgbClr val="3C4858"/>
+              <a:srgbClr val="5C5656"/>
             </a:solidFill>
           </a:ln>
         </p:spPr>
@@ -5603,7 +5603,7 @@
             <a:pPr>
               <a:defRPr sz="1400" b="1">
                 <a:solidFill>
-                  <a:srgbClr val="F59E0B"/>
+                  <a:srgbClr val="FFF212"/>
                 </a:solidFill>
               </a:defRPr>
             </a:pPr>
@@ -5618,7 +5618,7 @@
               </a:spcBef>
               <a:defRPr sz="1050">
                 <a:solidFill>
-                  <a:srgbClr val="E2E8F0"/>
+                  <a:srgbClr val="F1F5F9"/>
                 </a:solidFill>
               </a:defRPr>
             </a:pPr>
@@ -5661,7 +5661,7 @@
             <a:avLst/>
           </a:prstGeom>
           <a:solidFill>
-            <a:srgbClr val="14171D"/>
+            <a:srgbClr val="383535"/>
           </a:solidFill>
           <a:ln>
             <a:noFill/>
@@ -5698,13 +5698,13 @@
         <p:spPr>
           <a:xfrm>
             <a:off x="0" y="0"/>
-            <a:ext cx="12191695" cy="82296"/>
+            <a:ext cx="12191695" cy="91440"/>
           </a:xfrm>
           <a:prstGeom prst="rect">
             <a:avLst/>
           </a:prstGeom>
           <a:solidFill>
-            <a:srgbClr val="F59E0B"/>
+            <a:srgbClr val="FFF212"/>
           </a:solidFill>
           <a:ln>
             <a:noFill/>
@@ -5757,7 +5757,7 @@
             <a:pPr>
               <a:defRPr sz="950" b="1">
                 <a:solidFill>
-                  <a:srgbClr val="F59E0B"/>
+                  <a:srgbClr val="FFF212"/>
                 </a:solidFill>
                 <a:latin typeface="Arial"/>
               </a:defRPr>
@@ -5823,11 +5823,11 @@
             <a:avLst/>
           </a:prstGeom>
           <a:solidFill>
-            <a:srgbClr val="1E232C"/>
+            <a:srgbClr val="2E2B2B"/>
           </a:solidFill>
           <a:ln w="15240">
             <a:solidFill>
-              <a:srgbClr val="3C4858"/>
+              <a:srgbClr val="FFF212"/>
             </a:solidFill>
           </a:ln>
         </p:spPr>
@@ -5878,7 +5878,7 @@
             <a:pPr>
               <a:defRPr sz="1600" b="1">
                 <a:solidFill>
-                  <a:srgbClr val="F59E0B"/>
+                  <a:srgbClr val="FFF212"/>
                 </a:solidFill>
               </a:defRPr>
             </a:pPr>
@@ -5893,7 +5893,7 @@
               </a:spcBef>
               <a:defRPr sz="1100">
                 <a:solidFill>
-                  <a:srgbClr val="E2E8F0"/>
+                  <a:srgbClr val="F1F5F9"/>
                 </a:solidFill>
               </a:defRPr>
             </a:pPr>
@@ -5936,11 +5936,11 @@
             <a:avLst/>
           </a:prstGeom>
           <a:solidFill>
-            <a:srgbClr val="1E232C"/>
+            <a:srgbClr val="474444"/>
           </a:solidFill>
           <a:ln w="15240">
             <a:solidFill>
-              <a:srgbClr val="3C4858"/>
+              <a:srgbClr val="5C5656"/>
             </a:solidFill>
           </a:ln>
         </p:spPr>
@@ -6006,7 +6006,7 @@
               </a:spcBef>
               <a:defRPr sz="1100">
                 <a:solidFill>
-                  <a:srgbClr val="E2E8F0"/>
+                  <a:srgbClr val="F1F5F9"/>
                 </a:solidFill>
               </a:defRPr>
             </a:pPr>
@@ -6041,11 +6041,11 @@
             <a:avLst/>
           </a:prstGeom>
           <a:solidFill>
-            <a:srgbClr val="1E232C"/>
+            <a:srgbClr val="2E2B2B"/>
           </a:solidFill>
           <a:ln w="15240">
             <a:solidFill>
-              <a:srgbClr val="3C4858"/>
+              <a:srgbClr val="FFF212"/>
             </a:solidFill>
           </a:ln>
         </p:spPr>
@@ -6096,7 +6096,7 @@
             <a:pPr>
               <a:defRPr sz="1600" b="1">
                 <a:solidFill>
-                  <a:srgbClr val="F59E0B"/>
+                  <a:srgbClr val="FFF212"/>
                 </a:solidFill>
               </a:defRPr>
             </a:pPr>
@@ -6111,7 +6111,7 @@
               </a:spcBef>
               <a:defRPr sz="1100">
                 <a:solidFill>
-                  <a:srgbClr val="E2E8F0"/>
+                  <a:srgbClr val="F1F5F9"/>
                 </a:solidFill>
               </a:defRPr>
             </a:pPr>
@@ -6121,17 +6121,29 @@
             <a:br/>
             <a:br/>
             <a:r>
-              <a:t>🟢 Appwrite OK: Todos os laudos já estão salvos e sincronizados na nuvem.</a:t>
-            </a:r>
-            <a:br/>
-            <a:br/>
-            <a:r>
-              <a:t>🟡 X Pendente(s): Há laudos na fila aguardando término de transmissão.</a:t>
-            </a:r>
-            <a:br/>
-            <a:br/>
-            <a:r>
-              <a:t>🔴 Offline Pátio: Celular sem sinal; dados protegidos na memória local.</a:t>
+              <a:t>• Appwrite OK (Verde):</a:t>
+            </a:r>
+            <a:br/>
+            <a:r>
+              <a:t>  Todos os laudos já estão salvos e sincronizados na nuvem.</a:t>
+            </a:r>
+            <a:br/>
+            <a:br/>
+            <a:r>
+              <a:t>• X Pendente(s) (Amarelo):</a:t>
+            </a:r>
+            <a:br/>
+            <a:r>
+              <a:t>  Há laudos na fila aguardando término de transmissão.</a:t>
+            </a:r>
+            <a:br/>
+            <a:br/>
+            <a:r>
+              <a:t>• Offline Pátio (Vermelho):</a:t>
+            </a:r>
+            <a:br/>
+            <a:r>
+              <a:t>  Celular sem sinal; dados protegidos na memória local.</a:t>
             </a:r>
           </a:p>
         </p:txBody>
@@ -6169,7 +6181,7 @@
             <a:avLst/>
           </a:prstGeom>
           <a:solidFill>
-            <a:srgbClr val="14171D"/>
+            <a:srgbClr val="383535"/>
           </a:solidFill>
           <a:ln>
             <a:noFill/>
@@ -6206,13 +6218,13 @@
         <p:spPr>
           <a:xfrm>
             <a:off x="0" y="0"/>
-            <a:ext cx="12191695" cy="82296"/>
+            <a:ext cx="12191695" cy="91440"/>
           </a:xfrm>
           <a:prstGeom prst="rect">
             <a:avLst/>
           </a:prstGeom>
           <a:solidFill>
-            <a:srgbClr val="F59E0B"/>
+            <a:srgbClr val="FFF212"/>
           </a:solidFill>
           <a:ln>
             <a:noFill/>
@@ -6265,7 +6277,7 @@
             <a:pPr>
               <a:defRPr sz="950" b="1">
                 <a:solidFill>
-                  <a:srgbClr val="F59E0B"/>
+                  <a:srgbClr val="FFF212"/>
                 </a:solidFill>
                 <a:latin typeface="Arial"/>
               </a:defRPr>
@@ -6331,11 +6343,11 @@
             <a:avLst/>
           </a:prstGeom>
           <a:solidFill>
-            <a:srgbClr val="1E232C"/>
+            <a:srgbClr val="2E2B2B"/>
           </a:solidFill>
           <a:ln w="15240">
             <a:solidFill>
-              <a:srgbClr val="3C4858"/>
+              <a:srgbClr val="5C5656"/>
             </a:solidFill>
           </a:ln>
         </p:spPr>
@@ -6386,7 +6398,7 @@
             <a:pPr>
               <a:defRPr sz="1800" b="1">
                 <a:solidFill>
-                  <a:srgbClr val="F59E0B"/>
+                  <a:srgbClr val="FFF212"/>
                 </a:solidFill>
               </a:defRPr>
             </a:pPr>
@@ -6401,7 +6413,7 @@
               </a:spcBef>
               <a:defRPr sz="1150">
                 <a:solidFill>
-                  <a:srgbClr val="E2E8F0"/>
+                  <a:srgbClr val="F1F5F9"/>
                 </a:solidFill>
               </a:defRPr>
             </a:pPr>
@@ -6448,11 +6460,11 @@
             <a:avLst/>
           </a:prstGeom>
           <a:solidFill>
-            <a:srgbClr val="262C38"/>
+            <a:srgbClr val="474444"/>
           </a:solidFill>
           <a:ln w="15240">
             <a:solidFill>
-              <a:srgbClr val="F59E0B"/>
+              <a:srgbClr val="FFF212"/>
             </a:solidFill>
           </a:ln>
         </p:spPr>
@@ -6518,7 +6530,7 @@
               </a:spcBef>
               <a:defRPr sz="1300" b="1">
                 <a:solidFill>
-                  <a:srgbClr val="10B981"/>
+                  <a:srgbClr val="FFF212"/>
                 </a:solidFill>
               </a:defRPr>
             </a:pPr>
@@ -6533,7 +6545,7 @@
               </a:spcBef>
               <a:defRPr sz="1150">
                 <a:solidFill>
-                  <a:srgbClr val="E2E8F0"/>
+                  <a:srgbClr val="F1F5F9"/>
                 </a:solidFill>
               </a:defRPr>
             </a:pPr>
@@ -6590,7 +6602,7 @@
             <a:avLst/>
           </a:prstGeom>
           <a:solidFill>
-            <a:srgbClr val="14171D"/>
+            <a:srgbClr val="383535"/>
           </a:solidFill>
           <a:ln>
             <a:noFill/>
@@ -6627,13 +6639,13 @@
         <p:spPr>
           <a:xfrm>
             <a:off x="0" y="0"/>
-            <a:ext cx="12191695" cy="82296"/>
+            <a:ext cx="12191695" cy="91440"/>
           </a:xfrm>
           <a:prstGeom prst="rect">
             <a:avLst/>
           </a:prstGeom>
           <a:solidFill>
-            <a:srgbClr val="F59E0B"/>
+            <a:srgbClr val="FFF212"/>
           </a:solidFill>
           <a:ln>
             <a:noFill/>
@@ -6686,7 +6698,7 @@
             <a:pPr>
               <a:defRPr sz="950" b="1">
                 <a:solidFill>
-                  <a:srgbClr val="F59E0B"/>
+                  <a:srgbClr val="FFF212"/>
                 </a:solidFill>
                 <a:latin typeface="Arial"/>
               </a:defRPr>
@@ -6752,11 +6764,11 @@
             <a:avLst/>
           </a:prstGeom>
           <a:solidFill>
-            <a:srgbClr val="1E232C"/>
+            <a:srgbClr val="2E2B2B"/>
           </a:solidFill>
           <a:ln w="15240">
             <a:solidFill>
-              <a:srgbClr val="EF4444"/>
+              <a:srgbClr val="FFF212"/>
             </a:solidFill>
           </a:ln>
         </p:spPr>
@@ -6807,7 +6819,7 @@
             <a:pPr>
               <a:defRPr sz="1700" b="1">
                 <a:solidFill>
-                  <a:srgbClr val="EF4444"/>
+                  <a:srgbClr val="FFFFFF"/>
                 </a:solidFill>
               </a:defRPr>
             </a:pPr>
@@ -6822,7 +6834,7 @@
               </a:spcBef>
               <a:defRPr sz="1100">
                 <a:solidFill>
-                  <a:srgbClr val="94A3B8"/>
+                  <a:srgbClr val="CBD5E1"/>
                 </a:solidFill>
               </a:defRPr>
             </a:pPr>
@@ -6837,7 +6849,7 @@
               </a:spcBef>
               <a:defRPr sz="2000" b="1">
                 <a:solidFill>
-                  <a:srgbClr val="F59E0B"/>
+                  <a:srgbClr val="FFF212"/>
                 </a:solidFill>
               </a:defRPr>
             </a:pPr>
@@ -6852,7 +6864,7 @@
               </a:spcBef>
               <a:defRPr sz="1150">
                 <a:solidFill>
-                  <a:srgbClr val="E2E8F0"/>
+                  <a:srgbClr val="F1F5F9"/>
                 </a:solidFill>
               </a:defRPr>
             </a:pPr>
@@ -6889,11 +6901,11 @@
             <a:avLst/>
           </a:prstGeom>
           <a:solidFill>
-            <a:srgbClr val="1E232C"/>
+            <a:srgbClr val="474444"/>
           </a:solidFill>
           <a:ln w="15240">
             <a:solidFill>
-              <a:srgbClr val="10B981"/>
+              <a:srgbClr val="5C5656"/>
             </a:solidFill>
           </a:ln>
         </p:spPr>
@@ -6944,7 +6956,7 @@
             <a:pPr>
               <a:defRPr sz="1700" b="1">
                 <a:solidFill>
-                  <a:srgbClr val="10B981"/>
+                  <a:srgbClr val="FFF212"/>
                 </a:solidFill>
               </a:defRPr>
             </a:pPr>
@@ -6959,7 +6971,7 @@
               </a:spcBef>
               <a:defRPr sz="1100">
                 <a:solidFill>
-                  <a:srgbClr val="94A3B8"/>
+                  <a:srgbClr val="CBD5E1"/>
                 </a:solidFill>
               </a:defRPr>
             </a:pPr>
@@ -6974,7 +6986,7 @@
               </a:spcBef>
               <a:defRPr sz="2000" b="1">
                 <a:solidFill>
-                  <a:srgbClr val="10B981"/>
+                  <a:srgbClr val="FFFFFF"/>
                 </a:solidFill>
               </a:defRPr>
             </a:pPr>
@@ -6989,7 +7001,7 @@
               </a:spcBef>
               <a:defRPr sz="1150">
                 <a:solidFill>
-                  <a:srgbClr val="E2E8F0"/>
+                  <a:srgbClr val="F1F5F9"/>
                 </a:solidFill>
               </a:defRPr>
             </a:pPr>
@@ -7006,7 +7018,7 @@
             </a:r>
             <a:br/>
             <a:r>
-              <a:t>• Laudo Liberado: Emissão do laudo com selo verde, QR Code e Hash SHA-256.</a:t>
+              <a:t>• Laudo Liberado: Emissão do laudo com selo de liberação, QR Code e Hash SHA-256.</a:t>
             </a:r>
           </a:p>
         </p:txBody>
@@ -7044,7 +7056,7 @@
             <a:avLst/>
           </a:prstGeom>
           <a:solidFill>
-            <a:srgbClr val="14171D"/>
+            <a:srgbClr val="383535"/>
           </a:solidFill>
           <a:ln>
             <a:noFill/>
@@ -7081,13 +7093,13 @@
         <p:spPr>
           <a:xfrm>
             <a:off x="0" y="0"/>
-            <a:ext cx="12191695" cy="82296"/>
+            <a:ext cx="12191695" cy="91440"/>
           </a:xfrm>
           <a:prstGeom prst="rect">
             <a:avLst/>
           </a:prstGeom>
           <a:solidFill>
-            <a:srgbClr val="F59E0B"/>
+            <a:srgbClr val="FFF212"/>
           </a:solidFill>
           <a:ln>
             <a:noFill/>
@@ -7140,7 +7152,7 @@
             <a:pPr>
               <a:defRPr sz="950" b="1">
                 <a:solidFill>
-                  <a:srgbClr val="F59E0B"/>
+                  <a:srgbClr val="FFF212"/>
                 </a:solidFill>
                 <a:latin typeface="Arial"/>
               </a:defRPr>
@@ -7230,11 +7242,11 @@
             <a:avLst/>
           </a:prstGeom>
           <a:solidFill>
-            <a:srgbClr val="1E232C"/>
+            <a:srgbClr val="2E2B2B"/>
           </a:solidFill>
           <a:ln w="15240">
             <a:solidFill>
-              <a:srgbClr val="3C4858"/>
+              <a:srgbClr val="5C5656"/>
             </a:solidFill>
           </a:ln>
         </p:spPr>
@@ -7285,7 +7297,7 @@
             <a:pPr>
               <a:defRPr sz="1700" b="1">
                 <a:solidFill>
-                  <a:srgbClr val="F59E0B"/>
+                  <a:srgbClr val="FFF212"/>
                 </a:solidFill>
               </a:defRPr>
             </a:pPr>
@@ -7300,7 +7312,7 @@
               </a:spcBef>
               <a:defRPr sz="1150">
                 <a:solidFill>
-                  <a:srgbClr val="E2E8F0"/>
+                  <a:srgbClr val="F1F5F9"/>
                 </a:solidFill>
               </a:defRPr>
             </a:pPr>
@@ -7378,7 +7390,7 @@
             <a:avLst/>
           </a:prstGeom>
           <a:solidFill>
-            <a:srgbClr val="14171D"/>
+            <a:srgbClr val="383535"/>
           </a:solidFill>
           <a:ln>
             <a:noFill/>
@@ -7415,13 +7427,13 @@
         <p:spPr>
           <a:xfrm>
             <a:off x="0" y="0"/>
-            <a:ext cx="12191695" cy="82296"/>
+            <a:ext cx="12191695" cy="91440"/>
           </a:xfrm>
           <a:prstGeom prst="rect">
             <a:avLst/>
           </a:prstGeom>
           <a:solidFill>
-            <a:srgbClr val="F59E0B"/>
+            <a:srgbClr val="FFF212"/>
           </a:solidFill>
           <a:ln>
             <a:noFill/>
@@ -7474,7 +7486,7 @@
             <a:pPr>
               <a:defRPr sz="950" b="1">
                 <a:solidFill>
-                  <a:srgbClr val="F59E0B"/>
+                  <a:srgbClr val="FFF212"/>
                 </a:solidFill>
                 <a:latin typeface="Arial"/>
               </a:defRPr>
@@ -7564,11 +7576,11 @@
             <a:avLst/>
           </a:prstGeom>
           <a:solidFill>
-            <a:srgbClr val="1E232C"/>
+            <a:srgbClr val="2E2B2B"/>
           </a:solidFill>
           <a:ln w="15240">
             <a:solidFill>
-              <a:srgbClr val="3C4858"/>
+              <a:srgbClr val="FFF212"/>
             </a:solidFill>
           </a:ln>
         </p:spPr>
@@ -7619,7 +7631,7 @@
             <a:pPr>
               <a:defRPr sz="1700" b="1">
                 <a:solidFill>
-                  <a:srgbClr val="F59E0B"/>
+                  <a:srgbClr val="FFF212"/>
                 </a:solidFill>
               </a:defRPr>
             </a:pPr>
@@ -7634,7 +7646,7 @@
               </a:spcBef>
               <a:defRPr sz="1150">
                 <a:solidFill>
-                  <a:srgbClr val="E2E8F0"/>
+                  <a:srgbClr val="F1F5F9"/>
                 </a:solidFill>
               </a:defRPr>
             </a:pPr>
@@ -7708,7 +7720,7 @@
             <a:avLst/>
           </a:prstGeom>
           <a:solidFill>
-            <a:srgbClr val="14171D"/>
+            <a:srgbClr val="383535"/>
           </a:solidFill>
           <a:ln>
             <a:noFill/>
@@ -7745,13 +7757,13 @@
         <p:spPr>
           <a:xfrm>
             <a:off x="0" y="0"/>
-            <a:ext cx="12191695" cy="82296"/>
+            <a:ext cx="12191695" cy="91440"/>
           </a:xfrm>
           <a:prstGeom prst="rect">
             <a:avLst/>
           </a:prstGeom>
           <a:solidFill>
-            <a:srgbClr val="F59E0B"/>
+            <a:srgbClr val="FFF212"/>
           </a:solidFill>
           <a:ln>
             <a:noFill/>
@@ -7804,7 +7816,7 @@
             <a:pPr>
               <a:defRPr sz="950" b="1">
                 <a:solidFill>
-                  <a:srgbClr val="F59E0B"/>
+                  <a:srgbClr val="FFF212"/>
                 </a:solidFill>
                 <a:latin typeface="Arial"/>
               </a:defRPr>
@@ -7894,11 +7906,11 @@
             <a:avLst/>
           </a:prstGeom>
           <a:solidFill>
-            <a:srgbClr val="1E232C"/>
+            <a:srgbClr val="2E2B2B"/>
           </a:solidFill>
           <a:ln w="15240">
             <a:solidFill>
-              <a:srgbClr val="3C4858"/>
+              <a:srgbClr val="5C5656"/>
             </a:solidFill>
           </a:ln>
         </p:spPr>
@@ -7949,7 +7961,7 @@
             <a:pPr>
               <a:defRPr sz="1700" b="1">
                 <a:solidFill>
-                  <a:srgbClr val="F59E0B"/>
+                  <a:srgbClr val="FFF212"/>
                 </a:solidFill>
               </a:defRPr>
             </a:pPr>
@@ -7964,7 +7976,7 @@
               </a:spcBef>
               <a:defRPr sz="1150">
                 <a:solidFill>
-                  <a:srgbClr val="E2E8F0"/>
+                  <a:srgbClr val="F1F5F9"/>
                 </a:solidFill>
               </a:defRPr>
             </a:pPr>
@@ -8042,7 +8054,7 @@
             <a:avLst/>
           </a:prstGeom>
           <a:solidFill>
-            <a:srgbClr val="14171D"/>
+            <a:srgbClr val="383535"/>
           </a:solidFill>
           <a:ln>
             <a:noFill/>
@@ -8079,13 +8091,13 @@
         <p:spPr>
           <a:xfrm>
             <a:off x="0" y="0"/>
-            <a:ext cx="12191695" cy="82296"/>
+            <a:ext cx="12191695" cy="91440"/>
           </a:xfrm>
           <a:prstGeom prst="rect">
             <a:avLst/>
           </a:prstGeom>
           <a:solidFill>
-            <a:srgbClr val="F59E0B"/>
+            <a:srgbClr val="FFF212"/>
           </a:solidFill>
           <a:ln>
             <a:noFill/>
@@ -8138,7 +8150,7 @@
             <a:pPr>
               <a:defRPr sz="950" b="1">
                 <a:solidFill>
-                  <a:srgbClr val="F59E0B"/>
+                  <a:srgbClr val="FFF212"/>
                 </a:solidFill>
                 <a:latin typeface="Arial"/>
               </a:defRPr>
@@ -8228,11 +8240,11 @@
             <a:avLst/>
           </a:prstGeom>
           <a:solidFill>
-            <a:srgbClr val="1E232C"/>
+            <a:srgbClr val="474444"/>
           </a:solidFill>
           <a:ln w="15240">
             <a:solidFill>
-              <a:srgbClr val="3C4858"/>
+              <a:srgbClr val="FFF212"/>
             </a:solidFill>
           </a:ln>
         </p:spPr>
@@ -8283,7 +8295,7 @@
             <a:pPr>
               <a:defRPr sz="1700" b="1">
                 <a:solidFill>
-                  <a:srgbClr val="F59E0B"/>
+                  <a:srgbClr val="FFFFFF"/>
                 </a:solidFill>
               </a:defRPr>
             </a:pPr>
@@ -8298,7 +8310,7 @@
               </a:spcBef>
               <a:defRPr sz="1150">
                 <a:solidFill>
-                  <a:srgbClr val="E2E8F0"/>
+                  <a:srgbClr val="F1F5F9"/>
                 </a:solidFill>
               </a:defRPr>
             </a:pPr>
